--- a/public/docs/accounted_network_pitch_deck.pptx
+++ b/public/docs/accounted_network_pitch_deck.pptx
@@ -3118,7 +3118,7 @@
             <a:avLst/>
           </a:prstGeom>
           <a:solidFill>
-            <a:srgbClr val="0B0F19"/>
+            <a:srgbClr val="FAF8F5"/>
           </a:solidFill>
           <a:ln>
             <a:noFill/>
@@ -3154,18 +3154,18 @@
         </p:nvSpPr>
         <p:spPr>
           <a:xfrm>
-            <a:off x="4114800" y="914400"/>
+            <a:off x="4114800" y="822960"/>
             <a:ext cx="3962095" cy="411480"/>
           </a:xfrm>
           <a:prstGeom prst="roundRect">
             <a:avLst/>
           </a:prstGeom>
           <a:solidFill>
-            <a:srgbClr val="102C28"/>
+            <a:srgbClr val="F1F7F3"/>
           </a:solidFill>
           <a:ln w="12700">
             <a:solidFill>
-              <a:srgbClr val="10B981"/>
+              <a:srgbClr val="225E42"/>
             </a:solidFill>
           </a:ln>
         </p:spPr>
@@ -3190,13 +3190,13 @@
             <a:pPr algn="ctr">
               <a:defRPr sz="1000" b="1">
                 <a:solidFill>
-                  <a:srgbClr val="10B981"/>
-                </a:solidFill>
-                <a:latin typeface="Helvetica"/>
-              </a:defRPr>
-            </a:pPr>
-            <a:r>
-              <a:t>THE GLOBAL B2B SETTLEMENT PROTOCOL</a:t>
+                  <a:srgbClr val="225E42"/>
+                </a:solidFill>
+                <a:latin typeface="Helvetica"/>
+              </a:defRPr>
+            </a:pPr>
+            <a:r>
+              <a:t>accounted. — B2B SETTLEMENT NETWORK</a:t>
             </a:r>
           </a:p>
         </p:txBody>
@@ -3209,8 +3209,8 @@
         </p:nvSpPr>
         <p:spPr>
           <a:xfrm>
-            <a:off x="914400" y="1645920"/>
-            <a:ext cx="10362895" cy="1828800"/>
+            <a:off x="914400" y="1554480"/>
+            <a:ext cx="10362895" cy="2011680"/>
           </a:xfrm>
           <a:prstGeom prst="rect">
             <a:avLst/>
@@ -3226,9 +3226,9 @@
             <a:pPr algn="ctr">
               <a:defRPr sz="4000" b="1">
                 <a:solidFill>
-                  <a:srgbClr val="FFFFFF"/>
-                </a:solidFill>
-                <a:latin typeface="Helvetica"/>
+                  <a:srgbClr val="171717"/>
+                </a:solidFill>
+                <a:latin typeface="Georgia"/>
               </a:defRPr>
             </a:pPr>
             <a:r>
@@ -3237,9 +3237,9 @@
           </a:p>
           <a:p>
             <a:pPr algn="ctr">
-              <a:defRPr sz="1500">
-                <a:solidFill>
-                  <a:srgbClr val="94A3B8"/>
+              <a:defRPr sz="1400">
+                <a:solidFill>
+                  <a:srgbClr val="66625C"/>
                 </a:solidFill>
                 <a:latin typeface="Helvetica"/>
               </a:defRPr>
@@ -3263,17 +3263,17 @@
         <p:spPr>
           <a:xfrm>
             <a:off x="914400" y="3840480"/>
-            <a:ext cx="3200400" cy="2011680"/>
+            <a:ext cx="3200400" cy="2103120"/>
           </a:xfrm>
           <a:prstGeom prst="roundRect">
             <a:avLst/>
           </a:prstGeom>
           <a:solidFill>
-            <a:srgbClr val="131C2E"/>
+            <a:srgbClr val="FFFFFF"/>
           </a:solidFill>
           <a:ln w="12700">
             <a:solidFill>
-              <a:srgbClr val="1E293B"/>
+              <a:srgbClr val="E4E0D8"/>
             </a:solidFill>
           </a:ln>
         </p:spPr>
@@ -3298,8 +3298,9 @@
             <a:pPr algn="ctr">
               <a:defRPr sz="1000" b="1">
                 <a:solidFill>
-                  <a:srgbClr val="94A3B8"/>
-                </a:solidFill>
+                  <a:srgbClr val="66625C"/>
+                </a:solidFill>
+                <a:latin typeface="Helvetica"/>
               </a:defRPr>
             </a:pPr>
             <a:r>
@@ -3311,8 +3312,9 @@
             <a:pPr>
               <a:defRPr sz="2800" b="1">
                 <a:solidFill>
-                  <a:srgbClr val="FFFFFF"/>
-                </a:solidFill>
+                  <a:srgbClr val="171717"/>
+                </a:solidFill>
+                <a:latin typeface="Georgia"/>
               </a:defRPr>
             </a:pPr>
             <a:r>
@@ -3324,8 +3326,9 @@
             <a:pPr>
               <a:defRPr sz="1100">
                 <a:solidFill>
-                  <a:srgbClr val="94A3B8"/>
-                </a:solidFill>
+                  <a:srgbClr val="66625C"/>
+                </a:solidFill>
+                <a:latin typeface="Helvetica"/>
               </a:defRPr>
             </a:pPr>
             <a:r>
@@ -3343,17 +3346,17 @@
         <p:spPr>
           <a:xfrm>
             <a:off x="4480560" y="3840480"/>
-            <a:ext cx="3200400" cy="2011680"/>
+            <a:ext cx="3200400" cy="2103120"/>
           </a:xfrm>
           <a:prstGeom prst="roundRect">
             <a:avLst/>
           </a:prstGeom>
           <a:solidFill>
-            <a:srgbClr val="131C2E"/>
+            <a:srgbClr val="FFFFFF"/>
           </a:solidFill>
           <a:ln w="12700">
             <a:solidFill>
-              <a:srgbClr val="10B981"/>
+              <a:srgbClr val="225E42"/>
             </a:solidFill>
           </a:ln>
         </p:spPr>
@@ -3378,8 +3381,9 @@
             <a:pPr algn="ctr">
               <a:defRPr sz="1000" b="1">
                 <a:solidFill>
-                  <a:srgbClr val="10B981"/>
-                </a:solidFill>
+                  <a:srgbClr val="225E42"/>
+                </a:solidFill>
+                <a:latin typeface="Helvetica"/>
               </a:defRPr>
             </a:pPr>
             <a:r>
@@ -3391,8 +3395,9 @@
             <a:pPr>
               <a:defRPr sz="2800" b="1">
                 <a:solidFill>
-                  <a:srgbClr val="10B981"/>
-                </a:solidFill>
+                  <a:srgbClr val="225E42"/>
+                </a:solidFill>
+                <a:latin typeface="Georgia"/>
               </a:defRPr>
             </a:pPr>
             <a:r>
@@ -3404,8 +3409,9 @@
             <a:pPr>
               <a:defRPr sz="1100">
                 <a:solidFill>
-                  <a:srgbClr val="94A3B8"/>
-                </a:solidFill>
+                  <a:srgbClr val="66625C"/>
+                </a:solidFill>
+                <a:latin typeface="Helvetica"/>
               </a:defRPr>
             </a:pPr>
             <a:r>
@@ -3423,17 +3429,17 @@
         <p:spPr>
           <a:xfrm>
             <a:off x="8046720" y="3840480"/>
-            <a:ext cx="3200400" cy="2011680"/>
+            <a:ext cx="3200400" cy="2103120"/>
           </a:xfrm>
           <a:prstGeom prst="roundRect">
             <a:avLst/>
           </a:prstGeom>
           <a:solidFill>
-            <a:srgbClr val="131C2E"/>
+            <a:srgbClr val="FFFFFF"/>
           </a:solidFill>
           <a:ln w="12700">
             <a:solidFill>
-              <a:srgbClr val="14B8A6"/>
+              <a:srgbClr val="A65A24"/>
             </a:solidFill>
           </a:ln>
         </p:spPr>
@@ -3458,8 +3464,9 @@
             <a:pPr algn="ctr">
               <a:defRPr sz="1000" b="1">
                 <a:solidFill>
-                  <a:srgbClr val="14B8A6"/>
-                </a:solidFill>
+                  <a:srgbClr val="A65A24"/>
+                </a:solidFill>
+                <a:latin typeface="Helvetica"/>
               </a:defRPr>
             </a:pPr>
             <a:r>
@@ -3471,8 +3478,9 @@
             <a:pPr>
               <a:defRPr sz="2800" b="1">
                 <a:solidFill>
-                  <a:srgbClr val="14B8A6"/>
-                </a:solidFill>
+                  <a:srgbClr val="A65A24"/>
+                </a:solidFill>
+                <a:latin typeface="Georgia"/>
               </a:defRPr>
             </a:pPr>
             <a:r>
@@ -3484,8 +3492,9 @@
             <a:pPr>
               <a:defRPr sz="1100">
                 <a:solidFill>
-                  <a:srgbClr val="94A3B8"/>
-                </a:solidFill>
+                  <a:srgbClr val="66625C"/>
+                </a:solidFill>
+                <a:latin typeface="Helvetica"/>
               </a:defRPr>
             </a:pPr>
             <a:r>
@@ -3527,7 +3536,7 @@
             <a:avLst/>
           </a:prstGeom>
           <a:solidFill>
-            <a:srgbClr val="0B0F19"/>
+            <a:srgbClr val="FAF8F5"/>
           </a:solidFill>
           <a:ln>
             <a:noFill/>
@@ -3564,7 +3573,7 @@
         <p:spPr>
           <a:xfrm>
             <a:off x="731520" y="365760"/>
-            <a:ext cx="10698480" cy="365760"/>
+            <a:ext cx="10698480" cy="320040"/>
           </a:xfrm>
           <a:prstGeom prst="rect">
             <a:avLst/>
@@ -3580,7 +3589,7 @@
             <a:pPr>
               <a:defRPr sz="1000" b="1">
                 <a:solidFill>
-                  <a:srgbClr val="10B981"/>
+                  <a:srgbClr val="225E42"/>
                 </a:solidFill>
                 <a:latin typeface="Helvetica"/>
               </a:defRPr>
@@ -3616,9 +3625,9 @@
             <a:pPr>
               <a:defRPr sz="2400" b="1">
                 <a:solidFill>
-                  <a:srgbClr val="FFFFFF"/>
-                </a:solidFill>
-                <a:latin typeface="Helvetica"/>
+                  <a:srgbClr val="171717"/>
+                </a:solidFill>
+                <a:latin typeface="Georgia"/>
               </a:defRPr>
             </a:pPr>
             <a:r>
@@ -3627,9 +3636,9 @@
           </a:p>
           <a:p>
             <a:pPr>
-              <a:defRPr sz="1300">
-                <a:solidFill>
-                  <a:srgbClr val="94A3B8"/>
+              <a:defRPr sz="1200">
+                <a:solidFill>
+                  <a:srgbClr val="66625C"/>
                 </a:solidFill>
                 <a:latin typeface="Helvetica"/>
               </a:defRPr>
@@ -3655,11 +3664,11 @@
             <a:avLst/>
           </a:prstGeom>
           <a:solidFill>
-            <a:srgbClr val="131C2E"/>
+            <a:srgbClr val="FFFFFF"/>
           </a:solidFill>
           <a:ln w="12700">
             <a:solidFill>
-              <a:srgbClr val="1E293B"/>
+              <a:srgbClr val="E4E0D8"/>
             </a:solidFill>
           </a:ln>
         </p:spPr>
@@ -3682,10 +3691,11 @@
           <a:lstStyle/>
           <a:p>
             <a:pPr algn="ctr">
-              <a:defRPr sz="1300" b="1">
-                <a:solidFill>
-                  <a:srgbClr val="10B981"/>
-                </a:solidFill>
+              <a:defRPr sz="1200" b="1">
+                <a:solidFill>
+                  <a:srgbClr val="225E42"/>
+                </a:solidFill>
+                <a:latin typeface="Helvetica"/>
               </a:defRPr>
             </a:pPr>
             <a:r>
@@ -3697,8 +3707,9 @@
             <a:pPr>
               <a:defRPr sz="1050">
                 <a:solidFill>
-                  <a:srgbClr val="94A3B8"/>
-                </a:solidFill>
+                  <a:srgbClr val="66625C"/>
+                </a:solidFill>
+                <a:latin typeface="Helvetica"/>
               </a:defRPr>
             </a:pPr>
             <a:r>
@@ -3722,11 +3733,11 @@
             <a:avLst/>
           </a:prstGeom>
           <a:solidFill>
-            <a:srgbClr val="131C2E"/>
+            <a:srgbClr val="FFFFFF"/>
           </a:solidFill>
           <a:ln w="12700">
             <a:solidFill>
-              <a:srgbClr val="1E293B"/>
+              <a:srgbClr val="E4E0D8"/>
             </a:solidFill>
           </a:ln>
         </p:spPr>
@@ -3749,10 +3760,11 @@
           <a:lstStyle/>
           <a:p>
             <a:pPr algn="ctr">
-              <a:defRPr sz="1300" b="1">
-                <a:solidFill>
-                  <a:srgbClr val="10B981"/>
-                </a:solidFill>
+              <a:defRPr sz="1200" b="1">
+                <a:solidFill>
+                  <a:srgbClr val="225E42"/>
+                </a:solidFill>
+                <a:latin typeface="Helvetica"/>
               </a:defRPr>
             </a:pPr>
             <a:r>
@@ -3764,8 +3776,9 @@
             <a:pPr>
               <a:defRPr sz="1050">
                 <a:solidFill>
-                  <a:srgbClr val="94A3B8"/>
-                </a:solidFill>
+                  <a:srgbClr val="66625C"/>
+                </a:solidFill>
+                <a:latin typeface="Helvetica"/>
               </a:defRPr>
             </a:pPr>
             <a:r>
@@ -3789,11 +3802,11 @@
             <a:avLst/>
           </a:prstGeom>
           <a:solidFill>
-            <a:srgbClr val="131C2E"/>
+            <a:srgbClr val="FFFFFF"/>
           </a:solidFill>
           <a:ln w="12700">
             <a:solidFill>
-              <a:srgbClr val="1E293B"/>
+              <a:srgbClr val="E4E0D8"/>
             </a:solidFill>
           </a:ln>
         </p:spPr>
@@ -3816,10 +3829,11 @@
           <a:lstStyle/>
           <a:p>
             <a:pPr algn="ctr">
-              <a:defRPr sz="1300" b="1">
-                <a:solidFill>
-                  <a:srgbClr val="10B981"/>
-                </a:solidFill>
+              <a:defRPr sz="1200" b="1">
+                <a:solidFill>
+                  <a:srgbClr val="225E42"/>
+                </a:solidFill>
+                <a:latin typeface="Helvetica"/>
               </a:defRPr>
             </a:pPr>
             <a:r>
@@ -3831,8 +3845,9 @@
             <a:pPr>
               <a:defRPr sz="1050">
                 <a:solidFill>
-                  <a:srgbClr val="94A3B8"/>
-                </a:solidFill>
+                  <a:srgbClr val="66625C"/>
+                </a:solidFill>
+                <a:latin typeface="Helvetica"/>
               </a:defRPr>
             </a:pPr>
             <a:r>
@@ -3856,11 +3871,11 @@
             <a:avLst/>
           </a:prstGeom>
           <a:solidFill>
-            <a:srgbClr val="131C2E"/>
+            <a:srgbClr val="FFFFFF"/>
           </a:solidFill>
           <a:ln w="12700">
             <a:solidFill>
-              <a:srgbClr val="1E293B"/>
+              <a:srgbClr val="E4E0D8"/>
             </a:solidFill>
           </a:ln>
         </p:spPr>
@@ -3883,10 +3898,11 @@
           <a:lstStyle/>
           <a:p>
             <a:pPr algn="ctr">
-              <a:defRPr sz="1300" b="1">
-                <a:solidFill>
-                  <a:srgbClr val="10B981"/>
-                </a:solidFill>
+              <a:defRPr sz="1200" b="1">
+                <a:solidFill>
+                  <a:srgbClr val="225E42"/>
+                </a:solidFill>
+                <a:latin typeface="Helvetica"/>
               </a:defRPr>
             </a:pPr>
             <a:r>
@@ -3898,8 +3914,9 @@
             <a:pPr>
               <a:defRPr sz="1050">
                 <a:solidFill>
-                  <a:srgbClr val="94A3B8"/>
-                </a:solidFill>
+                  <a:srgbClr val="66625C"/>
+                </a:solidFill>
+                <a:latin typeface="Helvetica"/>
               </a:defRPr>
             </a:pPr>
             <a:r>
@@ -3923,11 +3940,11 @@
             <a:avLst/>
           </a:prstGeom>
           <a:solidFill>
-            <a:srgbClr val="131C2E"/>
+            <a:srgbClr val="F3F0EA"/>
           </a:solidFill>
           <a:ln w="12700">
             <a:solidFill>
-              <a:srgbClr val="1E293B"/>
+              <a:srgbClr val="E4E0D8"/>
             </a:solidFill>
           </a:ln>
         </p:spPr>
@@ -3950,10 +3967,11 @@
           <a:lstStyle/>
           <a:p>
             <a:pPr algn="ctr">
-              <a:defRPr sz="1200" b="1">
-                <a:solidFill>
-                  <a:srgbClr val="FFFFFF"/>
-                </a:solidFill>
+              <a:defRPr sz="1150" b="1">
+                <a:solidFill>
+                  <a:srgbClr val="171717"/>
+                </a:solidFill>
+                <a:latin typeface="Helvetica"/>
               </a:defRPr>
             </a:pPr>
             <a:r>
@@ -3995,7 +4013,7 @@
             <a:avLst/>
           </a:prstGeom>
           <a:solidFill>
-            <a:srgbClr val="0B0F19"/>
+            <a:srgbClr val="FAF8F5"/>
           </a:solidFill>
           <a:ln>
             <a:noFill/>
@@ -4032,7 +4050,7 @@
         <p:spPr>
           <a:xfrm>
             <a:off x="731520" y="365760"/>
-            <a:ext cx="10698480" cy="365760"/>
+            <a:ext cx="10698480" cy="320040"/>
           </a:xfrm>
           <a:prstGeom prst="rect">
             <a:avLst/>
@@ -4048,7 +4066,7 @@
             <a:pPr>
               <a:defRPr sz="1000" b="1">
                 <a:solidFill>
-                  <a:srgbClr val="10B981"/>
+                  <a:srgbClr val="225E42"/>
                 </a:solidFill>
                 <a:latin typeface="Helvetica"/>
               </a:defRPr>
@@ -4084,9 +4102,9 @@
             <a:pPr>
               <a:defRPr sz="2400" b="1">
                 <a:solidFill>
-                  <a:srgbClr val="FFFFFF"/>
-                </a:solidFill>
-                <a:latin typeface="Helvetica"/>
+                  <a:srgbClr val="171717"/>
+                </a:solidFill>
+                <a:latin typeface="Georgia"/>
               </a:defRPr>
             </a:pPr>
             <a:r>
@@ -4095,9 +4113,9 @@
           </a:p>
           <a:p>
             <a:pPr>
-              <a:defRPr sz="1300">
-                <a:solidFill>
-                  <a:srgbClr val="94A3B8"/>
+              <a:defRPr sz="1200">
+                <a:solidFill>
+                  <a:srgbClr val="66625C"/>
                 </a:solidFill>
                 <a:latin typeface="Helvetica"/>
               </a:defRPr>
@@ -4123,11 +4141,11 @@
             <a:avLst/>
           </a:prstGeom>
           <a:solidFill>
-            <a:srgbClr val="131C2E"/>
+            <a:srgbClr val="FFFFFF"/>
           </a:solidFill>
           <a:ln w="12700">
             <a:solidFill>
-              <a:srgbClr val="10B981"/>
+              <a:srgbClr val="225E42"/>
             </a:solidFill>
           </a:ln>
         </p:spPr>
@@ -4152,8 +4170,9 @@
             <a:pPr algn="ctr">
               <a:defRPr sz="1100" b="1">
                 <a:solidFill>
-                  <a:srgbClr val="10B981"/>
-                </a:solidFill>
+                  <a:srgbClr val="225E42"/>
+                </a:solidFill>
+                <a:latin typeface="Helvetica"/>
               </a:defRPr>
             </a:pPr>
             <a:r>
@@ -4165,8 +4184,9 @@
             <a:pPr>
               <a:defRPr sz="1600" b="1">
                 <a:solidFill>
-                  <a:srgbClr val="FFFFFF"/>
-                </a:solidFill>
+                  <a:srgbClr val="171717"/>
+                </a:solidFill>
+                <a:latin typeface="Georgia"/>
               </a:defRPr>
             </a:pPr>
             <a:r>
@@ -4179,8 +4199,9 @@
             <a:pPr>
               <a:defRPr sz="1100">
                 <a:solidFill>
-                  <a:srgbClr val="94A3B8"/>
-                </a:solidFill>
+                  <a:srgbClr val="66625C"/>
+                </a:solidFill>
+                <a:latin typeface="Helvetica"/>
               </a:defRPr>
             </a:pPr>
             <a:r>
@@ -4204,11 +4225,11 @@
             <a:avLst/>
           </a:prstGeom>
           <a:solidFill>
-            <a:srgbClr val="131C2E"/>
+            <a:srgbClr val="FFFFFF"/>
           </a:solidFill>
           <a:ln w="12700">
             <a:solidFill>
-              <a:srgbClr val="14B8A6"/>
+              <a:srgbClr val="A65A24"/>
             </a:solidFill>
           </a:ln>
         </p:spPr>
@@ -4233,8 +4254,9 @@
             <a:pPr algn="ctr">
               <a:defRPr sz="1100" b="1">
                 <a:solidFill>
-                  <a:srgbClr val="14B8A6"/>
-                </a:solidFill>
+                  <a:srgbClr val="A65A24"/>
+                </a:solidFill>
+                <a:latin typeface="Helvetica"/>
               </a:defRPr>
             </a:pPr>
             <a:r>
@@ -4246,8 +4268,9 @@
             <a:pPr>
               <a:defRPr sz="1600" b="1">
                 <a:solidFill>
-                  <a:srgbClr val="FFFFFF"/>
-                </a:solidFill>
+                  <a:srgbClr val="171717"/>
+                </a:solidFill>
+                <a:latin typeface="Georgia"/>
               </a:defRPr>
             </a:pPr>
             <a:r>
@@ -4260,8 +4283,9 @@
             <a:pPr>
               <a:defRPr sz="1100">
                 <a:solidFill>
-                  <a:srgbClr val="94A3B8"/>
-                </a:solidFill>
+                  <a:srgbClr val="66625C"/>
+                </a:solidFill>
+                <a:latin typeface="Helvetica"/>
               </a:defRPr>
             </a:pPr>
             <a:r>
@@ -4285,11 +4309,11 @@
             <a:avLst/>
           </a:prstGeom>
           <a:solidFill>
-            <a:srgbClr val="131C2E"/>
+            <a:srgbClr val="FFFFFF"/>
           </a:solidFill>
           <a:ln w="12700">
             <a:solidFill>
-              <a:srgbClr val="06B6D4"/>
+              <a:srgbClr val="171717"/>
             </a:solidFill>
           </a:ln>
         </p:spPr>
@@ -4314,8 +4338,9 @@
             <a:pPr algn="ctr">
               <a:defRPr sz="1100" b="1">
                 <a:solidFill>
-                  <a:srgbClr val="06B6D4"/>
-                </a:solidFill>
+                  <a:srgbClr val="171717"/>
+                </a:solidFill>
+                <a:latin typeface="Helvetica"/>
               </a:defRPr>
             </a:pPr>
             <a:r>
@@ -4327,8 +4352,9 @@
             <a:pPr>
               <a:defRPr sz="1600" b="1">
                 <a:solidFill>
-                  <a:srgbClr val="FFFFFF"/>
-                </a:solidFill>
+                  <a:srgbClr val="171717"/>
+                </a:solidFill>
+                <a:latin typeface="Georgia"/>
               </a:defRPr>
             </a:pPr>
             <a:r>
@@ -4341,8 +4367,9 @@
             <a:pPr>
               <a:defRPr sz="1100">
                 <a:solidFill>
-                  <a:srgbClr val="94A3B8"/>
-                </a:solidFill>
+                  <a:srgbClr val="66625C"/>
+                </a:solidFill>
+                <a:latin typeface="Helvetica"/>
               </a:defRPr>
             </a:pPr>
             <a:r>
@@ -4366,11 +4393,11 @@
             <a:avLst/>
           </a:prstGeom>
           <a:solidFill>
-            <a:srgbClr val="131C2E"/>
+            <a:srgbClr val="F3F0EA"/>
           </a:solidFill>
           <a:ln w="12700">
             <a:solidFill>
-              <a:srgbClr val="1E293B"/>
+              <a:srgbClr val="E4E0D8"/>
             </a:solidFill>
           </a:ln>
         </p:spPr>
@@ -4395,8 +4422,9 @@
             <a:pPr algn="ctr">
               <a:defRPr sz="1100" b="1">
                 <a:solidFill>
-                  <a:srgbClr val="10B981"/>
-                </a:solidFill>
+                  <a:srgbClr val="225E42"/>
+                </a:solidFill>
+                <a:latin typeface="Helvetica"/>
               </a:defRPr>
             </a:pPr>
             <a:r>
@@ -4438,7 +4466,7 @@
             <a:avLst/>
           </a:prstGeom>
           <a:solidFill>
-            <a:srgbClr val="0B0F19"/>
+            <a:srgbClr val="FAF8F5"/>
           </a:solidFill>
           <a:ln>
             <a:noFill/>
@@ -4475,7 +4503,7 @@
         <p:spPr>
           <a:xfrm>
             <a:off x="731520" y="365760"/>
-            <a:ext cx="10698480" cy="365760"/>
+            <a:ext cx="10698480" cy="320040"/>
           </a:xfrm>
           <a:prstGeom prst="rect">
             <a:avLst/>
@@ -4491,7 +4519,7 @@
             <a:pPr>
               <a:defRPr sz="1000" b="1">
                 <a:solidFill>
-                  <a:srgbClr val="10B981"/>
+                  <a:srgbClr val="225E42"/>
                 </a:solidFill>
                 <a:latin typeface="Helvetica"/>
               </a:defRPr>
@@ -4527,9 +4555,9 @@
             <a:pPr>
               <a:defRPr sz="2400" b="1">
                 <a:solidFill>
-                  <a:srgbClr val="FFFFFF"/>
-                </a:solidFill>
-                <a:latin typeface="Helvetica"/>
+                  <a:srgbClr val="171717"/>
+                </a:solidFill>
+                <a:latin typeface="Georgia"/>
               </a:defRPr>
             </a:pPr>
             <a:r>
@@ -4538,9 +4566,9 @@
           </a:p>
           <a:p>
             <a:pPr>
-              <a:defRPr sz="1300">
-                <a:solidFill>
-                  <a:srgbClr val="94A3B8"/>
+              <a:defRPr sz="1200">
+                <a:solidFill>
+                  <a:srgbClr val="66625C"/>
                 </a:solidFill>
                 <a:latin typeface="Helvetica"/>
               </a:defRPr>
@@ -4566,11 +4594,11 @@
             <a:avLst/>
           </a:prstGeom>
           <a:solidFill>
-            <a:srgbClr val="131C2E"/>
+            <a:srgbClr val="FFFFFF"/>
           </a:solidFill>
           <a:ln w="12700">
             <a:solidFill>
-              <a:srgbClr val="1E293B"/>
+              <a:srgbClr val="E4E0D8"/>
             </a:solidFill>
           </a:ln>
         </p:spPr>
@@ -4595,8 +4623,9 @@
             <a:pPr algn="ctr">
               <a:defRPr sz="1100" b="1">
                 <a:solidFill>
-                  <a:srgbClr val="10B981"/>
-                </a:solidFill>
+                  <a:srgbClr val="225E42"/>
+                </a:solidFill>
+                <a:latin typeface="Helvetica"/>
               </a:defRPr>
             </a:pPr>
             <a:r>
@@ -4608,8 +4637,9 @@
             <a:pPr>
               <a:defRPr sz="1600" b="1">
                 <a:solidFill>
-                  <a:srgbClr val="FFFFFF"/>
-                </a:solidFill>
+                  <a:srgbClr val="171717"/>
+                </a:solidFill>
+                <a:latin typeface="Georgia"/>
               </a:defRPr>
             </a:pPr>
             <a:r>
@@ -4622,8 +4652,9 @@
             <a:pPr>
               <a:defRPr sz="1100">
                 <a:solidFill>
-                  <a:srgbClr val="94A3B8"/>
-                </a:solidFill>
+                  <a:srgbClr val="66625C"/>
+                </a:solidFill>
+                <a:latin typeface="Helvetica"/>
               </a:defRPr>
             </a:pPr>
             <a:r>
@@ -4634,8 +4665,9 @@
             <a:pPr>
               <a:defRPr sz="1100">
                 <a:solidFill>
-                  <a:srgbClr val="94A3B8"/>
-                </a:solidFill>
+                  <a:srgbClr val="66625C"/>
+                </a:solidFill>
+                <a:latin typeface="Helvetica"/>
               </a:defRPr>
             </a:pPr>
             <a:r>
@@ -4646,8 +4678,9 @@
             <a:pPr>
               <a:defRPr sz="1100">
                 <a:solidFill>
-                  <a:srgbClr val="94A3B8"/>
-                </a:solidFill>
+                  <a:srgbClr val="66625C"/>
+                </a:solidFill>
+                <a:latin typeface="Helvetica"/>
               </a:defRPr>
             </a:pPr>
             <a:r>
@@ -4658,8 +4691,9 @@
             <a:pPr>
               <a:defRPr sz="1100">
                 <a:solidFill>
-                  <a:srgbClr val="94A3B8"/>
-                </a:solidFill>
+                  <a:srgbClr val="66625C"/>
+                </a:solidFill>
+                <a:latin typeface="Helvetica"/>
               </a:defRPr>
             </a:pPr>
             <a:r>
@@ -4671,8 +4705,9 @@
             <a:pPr>
               <a:defRPr sz="1100" b="1">
                 <a:solidFill>
-                  <a:srgbClr val="10B981"/>
-                </a:solidFill>
+                  <a:srgbClr val="225E42"/>
+                </a:solidFill>
+                <a:latin typeface="Helvetica"/>
               </a:defRPr>
             </a:pPr>
             <a:r>
@@ -4696,11 +4731,11 @@
             <a:avLst/>
           </a:prstGeom>
           <a:solidFill>
-            <a:srgbClr val="131C2E"/>
+            <a:srgbClr val="FFFFFF"/>
           </a:solidFill>
           <a:ln w="12700">
             <a:solidFill>
-              <a:srgbClr val="1E293B"/>
+              <a:srgbClr val="E4E0D8"/>
             </a:solidFill>
           </a:ln>
         </p:spPr>
@@ -4725,8 +4760,9 @@
             <a:pPr algn="ctr">
               <a:defRPr sz="1100" b="1">
                 <a:solidFill>
-                  <a:srgbClr val="14B8A6"/>
-                </a:solidFill>
+                  <a:srgbClr val="A65A24"/>
+                </a:solidFill>
+                <a:latin typeface="Helvetica"/>
               </a:defRPr>
             </a:pPr>
             <a:r>
@@ -4738,8 +4774,9 @@
             <a:pPr>
               <a:defRPr sz="1600" b="1">
                 <a:solidFill>
-                  <a:srgbClr val="FFFFFF"/>
-                </a:solidFill>
+                  <a:srgbClr val="171717"/>
+                </a:solidFill>
+                <a:latin typeface="Georgia"/>
               </a:defRPr>
             </a:pPr>
             <a:r>
@@ -4752,8 +4789,9 @@
             <a:pPr>
               <a:defRPr sz="1100">
                 <a:solidFill>
-                  <a:srgbClr val="94A3B8"/>
-                </a:solidFill>
+                  <a:srgbClr val="66625C"/>
+                </a:solidFill>
+                <a:latin typeface="Helvetica"/>
               </a:defRPr>
             </a:pPr>
             <a:r>
@@ -4764,8 +4802,9 @@
             <a:pPr>
               <a:defRPr sz="1100">
                 <a:solidFill>
-                  <a:srgbClr val="94A3B8"/>
-                </a:solidFill>
+                  <a:srgbClr val="66625C"/>
+                </a:solidFill>
+                <a:latin typeface="Helvetica"/>
               </a:defRPr>
             </a:pPr>
             <a:r>
@@ -4776,8 +4815,9 @@
             <a:pPr>
               <a:defRPr sz="1100">
                 <a:solidFill>
-                  <a:srgbClr val="94A3B8"/>
-                </a:solidFill>
+                  <a:srgbClr val="66625C"/>
+                </a:solidFill>
+                <a:latin typeface="Helvetica"/>
               </a:defRPr>
             </a:pPr>
             <a:r>
@@ -4788,8 +4828,9 @@
             <a:pPr>
               <a:defRPr sz="1100">
                 <a:solidFill>
-                  <a:srgbClr val="94A3B8"/>
-                </a:solidFill>
+                  <a:srgbClr val="66625C"/>
+                </a:solidFill>
+                <a:latin typeface="Helvetica"/>
               </a:defRPr>
             </a:pPr>
             <a:r>
@@ -4801,8 +4842,9 @@
             <a:pPr>
               <a:defRPr sz="1100" b="1">
                 <a:solidFill>
-                  <a:srgbClr val="14B8A6"/>
-                </a:solidFill>
+                  <a:srgbClr val="A65A24"/>
+                </a:solidFill>
+                <a:latin typeface="Helvetica"/>
               </a:defRPr>
             </a:pPr>
             <a:r>
@@ -4826,11 +4868,11 @@
             <a:avLst/>
           </a:prstGeom>
           <a:solidFill>
-            <a:srgbClr val="131C2E"/>
+            <a:srgbClr val="FFFFFF"/>
           </a:solidFill>
           <a:ln w="12700">
             <a:solidFill>
-              <a:srgbClr val="1E293B"/>
+              <a:srgbClr val="E4E0D8"/>
             </a:solidFill>
           </a:ln>
         </p:spPr>
@@ -4855,8 +4897,9 @@
             <a:pPr algn="ctr">
               <a:defRPr sz="1100" b="1">
                 <a:solidFill>
-                  <a:srgbClr val="FFFFFF"/>
-                </a:solidFill>
+                  <a:srgbClr val="171717"/>
+                </a:solidFill>
+                <a:latin typeface="Helvetica"/>
               </a:defRPr>
             </a:pPr>
             <a:r>
@@ -4868,8 +4911,9 @@
             <a:pPr>
               <a:defRPr sz="1600" b="1">
                 <a:solidFill>
-                  <a:srgbClr val="FFFFFF"/>
-                </a:solidFill>
+                  <a:srgbClr val="171717"/>
+                </a:solidFill>
+                <a:latin typeface="Georgia"/>
               </a:defRPr>
             </a:pPr>
             <a:r>
@@ -4882,8 +4926,9 @@
             <a:pPr>
               <a:defRPr sz="1100">
                 <a:solidFill>
-                  <a:srgbClr val="94A3B8"/>
-                </a:solidFill>
+                  <a:srgbClr val="66625C"/>
+                </a:solidFill>
+                <a:latin typeface="Helvetica"/>
               </a:defRPr>
             </a:pPr>
             <a:r>
@@ -4894,8 +4939,9 @@
             <a:pPr>
               <a:defRPr sz="1100">
                 <a:solidFill>
-                  <a:srgbClr val="94A3B8"/>
-                </a:solidFill>
+                  <a:srgbClr val="66625C"/>
+                </a:solidFill>
+                <a:latin typeface="Helvetica"/>
               </a:defRPr>
             </a:pPr>
             <a:r>
@@ -4906,8 +4952,9 @@
             <a:pPr>
               <a:defRPr sz="1100">
                 <a:solidFill>
-                  <a:srgbClr val="94A3B8"/>
-                </a:solidFill>
+                  <a:srgbClr val="66625C"/>
+                </a:solidFill>
+                <a:latin typeface="Helvetica"/>
               </a:defRPr>
             </a:pPr>
             <a:r>
@@ -4918,8 +4965,9 @@
             <a:pPr>
               <a:defRPr sz="1100">
                 <a:solidFill>
-                  <a:srgbClr val="94A3B8"/>
-                </a:solidFill>
+                  <a:srgbClr val="66625C"/>
+                </a:solidFill>
+                <a:latin typeface="Helvetica"/>
               </a:defRPr>
             </a:pPr>
             <a:r>
@@ -4931,8 +4979,9 @@
             <a:pPr>
               <a:defRPr sz="1100" b="1">
                 <a:solidFill>
-                  <a:srgbClr val="FFFFFF"/>
-                </a:solidFill>
+                  <a:srgbClr val="171717"/>
+                </a:solidFill>
+                <a:latin typeface="Helvetica"/>
               </a:defRPr>
             </a:pPr>
             <a:r>
@@ -4956,11 +5005,11 @@
             <a:avLst/>
           </a:prstGeom>
           <a:solidFill>
-            <a:srgbClr val="131C2E"/>
+            <a:srgbClr val="F3F0EA"/>
           </a:solidFill>
           <a:ln w="12700">
             <a:solidFill>
-              <a:srgbClr val="1E293B"/>
+              <a:srgbClr val="E4E0D8"/>
             </a:solidFill>
           </a:ln>
         </p:spPr>
@@ -4985,8 +5034,9 @@
             <a:pPr algn="ctr">
               <a:defRPr sz="1100" b="1">
                 <a:solidFill>
-                  <a:srgbClr val="FFFFFF"/>
-                </a:solidFill>
+                  <a:srgbClr val="171717"/>
+                </a:solidFill>
+                <a:latin typeface="Helvetica"/>
               </a:defRPr>
             </a:pPr>
             <a:r>
@@ -5028,7 +5078,7 @@
             <a:avLst/>
           </a:prstGeom>
           <a:solidFill>
-            <a:srgbClr val="0B0F19"/>
+            <a:srgbClr val="FAF8F5"/>
           </a:solidFill>
           <a:ln>
             <a:noFill/>
@@ -5065,7 +5115,7 @@
         <p:spPr>
           <a:xfrm>
             <a:off x="731520" y="365760"/>
-            <a:ext cx="10698480" cy="365760"/>
+            <a:ext cx="10698480" cy="320040"/>
           </a:xfrm>
           <a:prstGeom prst="rect">
             <a:avLst/>
@@ -5081,7 +5131,7 @@
             <a:pPr>
               <a:defRPr sz="1000" b="1">
                 <a:solidFill>
-                  <a:srgbClr val="10B981"/>
+                  <a:srgbClr val="225E42"/>
                 </a:solidFill>
                 <a:latin typeface="Helvetica"/>
               </a:defRPr>
@@ -5117,9 +5167,9 @@
             <a:pPr>
               <a:defRPr sz="2400" b="1">
                 <a:solidFill>
-                  <a:srgbClr val="FFFFFF"/>
-                </a:solidFill>
-                <a:latin typeface="Helvetica"/>
+                  <a:srgbClr val="171717"/>
+                </a:solidFill>
+                <a:latin typeface="Georgia"/>
               </a:defRPr>
             </a:pPr>
             <a:r>
@@ -5128,9 +5178,9 @@
           </a:p>
           <a:p>
             <a:pPr>
-              <a:defRPr sz="1300">
-                <a:solidFill>
-                  <a:srgbClr val="94A3B8"/>
+              <a:defRPr sz="1200">
+                <a:solidFill>
+                  <a:srgbClr val="66625C"/>
                 </a:solidFill>
                 <a:latin typeface="Helvetica"/>
               </a:defRPr>
@@ -5156,11 +5206,11 @@
             <a:avLst/>
           </a:prstGeom>
           <a:solidFill>
-            <a:srgbClr val="131C2E"/>
+            <a:srgbClr val="FFFFFF"/>
           </a:solidFill>
           <a:ln w="12700">
             <a:solidFill>
-              <a:srgbClr val="1E293B"/>
+              <a:srgbClr val="E4E0D8"/>
             </a:solidFill>
           </a:ln>
         </p:spPr>
@@ -5185,8 +5235,9 @@
             <a:pPr algn="ctr">
               <a:defRPr sz="1000" b="1">
                 <a:solidFill>
-                  <a:srgbClr val="94A3B8"/>
-                </a:solidFill>
+                  <a:srgbClr val="66625C"/>
+                </a:solidFill>
+                <a:latin typeface="Helvetica"/>
               </a:defRPr>
             </a:pPr>
             <a:r>
@@ -5198,8 +5249,9 @@
             <a:pPr>
               <a:defRPr sz="2200" b="1">
                 <a:solidFill>
-                  <a:srgbClr val="10B981"/>
-                </a:solidFill>
+                  <a:srgbClr val="225E42"/>
+                </a:solidFill>
+                <a:latin typeface="Georgia"/>
               </a:defRPr>
             </a:pPr>
             <a:r>
@@ -5209,10 +5261,11 @@
           </a:p>
           <a:p>
             <a:pPr>
-              <a:defRPr sz="1300" b="1">
-                <a:solidFill>
-                  <a:srgbClr val="FFFFFF"/>
-                </a:solidFill>
+              <a:defRPr sz="1200" b="1">
+                <a:solidFill>
+                  <a:srgbClr val="171717"/>
+                </a:solidFill>
+                <a:latin typeface="Helvetica"/>
               </a:defRPr>
             </a:pPr>
             <a:r>
@@ -5225,8 +5278,9 @@
             <a:pPr>
               <a:defRPr sz="1000">
                 <a:solidFill>
-                  <a:srgbClr val="94A3B8"/>
-                </a:solidFill>
+                  <a:srgbClr val="66625C"/>
+                </a:solidFill>
+                <a:latin typeface="Helvetica"/>
               </a:defRPr>
             </a:pPr>
             <a:r>
@@ -5250,11 +5304,11 @@
             <a:avLst/>
           </a:prstGeom>
           <a:solidFill>
-            <a:srgbClr val="131C2E"/>
+            <a:srgbClr val="FFFFFF"/>
           </a:solidFill>
           <a:ln w="12700">
             <a:solidFill>
-              <a:srgbClr val="1E293B"/>
+              <a:srgbClr val="E4E0D8"/>
             </a:solidFill>
           </a:ln>
         </p:spPr>
@@ -5279,8 +5333,9 @@
             <a:pPr algn="ctr">
               <a:defRPr sz="1000" b="1">
                 <a:solidFill>
-                  <a:srgbClr val="94A3B8"/>
-                </a:solidFill>
+                  <a:srgbClr val="66625C"/>
+                </a:solidFill>
+                <a:latin typeface="Helvetica"/>
               </a:defRPr>
             </a:pPr>
             <a:r>
@@ -5292,8 +5347,9 @@
             <a:pPr>
               <a:defRPr sz="2200" b="1">
                 <a:solidFill>
-                  <a:srgbClr val="14B8A6"/>
-                </a:solidFill>
+                  <a:srgbClr val="171717"/>
+                </a:solidFill>
+                <a:latin typeface="Georgia"/>
               </a:defRPr>
             </a:pPr>
             <a:r>
@@ -5303,10 +5359,11 @@
           </a:p>
           <a:p>
             <a:pPr>
-              <a:defRPr sz="1300" b="1">
-                <a:solidFill>
-                  <a:srgbClr val="FFFFFF"/>
-                </a:solidFill>
+              <a:defRPr sz="1200" b="1">
+                <a:solidFill>
+                  <a:srgbClr val="171717"/>
+                </a:solidFill>
+                <a:latin typeface="Helvetica"/>
               </a:defRPr>
             </a:pPr>
             <a:r>
@@ -5319,8 +5376,9 @@
             <a:pPr>
               <a:defRPr sz="1000">
                 <a:solidFill>
-                  <a:srgbClr val="94A3B8"/>
-                </a:solidFill>
+                  <a:srgbClr val="66625C"/>
+                </a:solidFill>
+                <a:latin typeface="Helvetica"/>
               </a:defRPr>
             </a:pPr>
             <a:r>
@@ -5344,11 +5402,11 @@
             <a:avLst/>
           </a:prstGeom>
           <a:solidFill>
-            <a:srgbClr val="131C2E"/>
+            <a:srgbClr val="FFFFFF"/>
           </a:solidFill>
           <a:ln w="12700">
             <a:solidFill>
-              <a:srgbClr val="1E293B"/>
+              <a:srgbClr val="E4E0D8"/>
             </a:solidFill>
           </a:ln>
         </p:spPr>
@@ -5373,8 +5431,9 @@
             <a:pPr algn="ctr">
               <a:defRPr sz="1000" b="1">
                 <a:solidFill>
-                  <a:srgbClr val="94A3B8"/>
-                </a:solidFill>
+                  <a:srgbClr val="66625C"/>
+                </a:solidFill>
+                <a:latin typeface="Helvetica"/>
               </a:defRPr>
             </a:pPr>
             <a:r>
@@ -5386,8 +5445,9 @@
             <a:pPr>
               <a:defRPr sz="2200" b="1">
                 <a:solidFill>
-                  <a:srgbClr val="10B981"/>
-                </a:solidFill>
+                  <a:srgbClr val="225E42"/>
+                </a:solidFill>
+                <a:latin typeface="Georgia"/>
               </a:defRPr>
             </a:pPr>
             <a:r>
@@ -5397,10 +5457,11 @@
           </a:p>
           <a:p>
             <a:pPr>
-              <a:defRPr sz="1300" b="1">
-                <a:solidFill>
-                  <a:srgbClr val="FFFFFF"/>
-                </a:solidFill>
+              <a:defRPr sz="1200" b="1">
+                <a:solidFill>
+                  <a:srgbClr val="171717"/>
+                </a:solidFill>
+                <a:latin typeface="Helvetica"/>
               </a:defRPr>
             </a:pPr>
             <a:r>
@@ -5413,8 +5474,9 @@
             <a:pPr>
               <a:defRPr sz="1000">
                 <a:solidFill>
-                  <a:srgbClr val="94A3B8"/>
-                </a:solidFill>
+                  <a:srgbClr val="66625C"/>
+                </a:solidFill>
+                <a:latin typeface="Helvetica"/>
               </a:defRPr>
             </a:pPr>
             <a:r>
@@ -5438,11 +5500,11 @@
             <a:avLst/>
           </a:prstGeom>
           <a:solidFill>
-            <a:srgbClr val="131C2E"/>
+            <a:srgbClr val="FFFFFF"/>
           </a:solidFill>
           <a:ln w="12700">
             <a:solidFill>
-              <a:srgbClr val="1E293B"/>
+              <a:srgbClr val="E4E0D8"/>
             </a:solidFill>
           </a:ln>
         </p:spPr>
@@ -5467,8 +5529,9 @@
             <a:pPr algn="ctr">
               <a:defRPr sz="1000" b="1">
                 <a:solidFill>
-                  <a:srgbClr val="94A3B8"/>
-                </a:solidFill>
+                  <a:srgbClr val="66625C"/>
+                </a:solidFill>
+                <a:latin typeface="Helvetica"/>
               </a:defRPr>
             </a:pPr>
             <a:r>
@@ -5480,8 +5543,9 @@
             <a:pPr>
               <a:defRPr sz="2200" b="1">
                 <a:solidFill>
-                  <a:srgbClr val="06B6D4"/>
-                </a:solidFill>
+                  <a:srgbClr val="A65A24"/>
+                </a:solidFill>
+                <a:latin typeface="Georgia"/>
               </a:defRPr>
             </a:pPr>
             <a:r>
@@ -5491,10 +5555,11 @@
           </a:p>
           <a:p>
             <a:pPr>
-              <a:defRPr sz="1300" b="1">
-                <a:solidFill>
-                  <a:srgbClr val="FFFFFF"/>
-                </a:solidFill>
+              <a:defRPr sz="1200" b="1">
+                <a:solidFill>
+                  <a:srgbClr val="171717"/>
+                </a:solidFill>
+                <a:latin typeface="Helvetica"/>
               </a:defRPr>
             </a:pPr>
             <a:r>
@@ -5507,8 +5572,9 @@
             <a:pPr>
               <a:defRPr sz="1000">
                 <a:solidFill>
-                  <a:srgbClr val="94A3B8"/>
-                </a:solidFill>
+                  <a:srgbClr val="66625C"/>
+                </a:solidFill>
+                <a:latin typeface="Helvetica"/>
               </a:defRPr>
             </a:pPr>
             <a:r>
@@ -5532,11 +5598,11 @@
             <a:avLst/>
           </a:prstGeom>
           <a:solidFill>
-            <a:srgbClr val="131C2E"/>
+            <a:srgbClr val="FFFFFF"/>
           </a:solidFill>
           <a:ln w="12700">
             <a:solidFill>
-              <a:srgbClr val="1E293B"/>
+              <a:srgbClr val="E4E0D8"/>
             </a:solidFill>
           </a:ln>
         </p:spPr>
@@ -5561,8 +5627,9 @@
             <a:pPr algn="ctr">
               <a:defRPr sz="1000" b="1">
                 <a:solidFill>
-                  <a:srgbClr val="94A3B8"/>
-                </a:solidFill>
+                  <a:srgbClr val="66625C"/>
+                </a:solidFill>
+                <a:latin typeface="Helvetica"/>
               </a:defRPr>
             </a:pPr>
             <a:r>
@@ -5574,8 +5641,9 @@
             <a:pPr>
               <a:defRPr sz="2200" b="1">
                 <a:solidFill>
-                  <a:srgbClr val="FFFFFF"/>
-                </a:solidFill>
+                  <a:srgbClr val="66625C"/>
+                </a:solidFill>
+                <a:latin typeface="Georgia"/>
               </a:defRPr>
             </a:pPr>
             <a:r>
@@ -5585,10 +5653,11 @@
           </a:p>
           <a:p>
             <a:pPr>
-              <a:defRPr sz="1300" b="1">
-                <a:solidFill>
-                  <a:srgbClr val="FFFFFF"/>
-                </a:solidFill>
+              <a:defRPr sz="1200" b="1">
+                <a:solidFill>
+                  <a:srgbClr val="171717"/>
+                </a:solidFill>
+                <a:latin typeface="Helvetica"/>
               </a:defRPr>
             </a:pPr>
             <a:r>
@@ -5601,8 +5670,9 @@
             <a:pPr>
               <a:defRPr sz="1000">
                 <a:solidFill>
-                  <a:srgbClr val="94A3B8"/>
-                </a:solidFill>
+                  <a:srgbClr val="66625C"/>
+                </a:solidFill>
+                <a:latin typeface="Helvetica"/>
               </a:defRPr>
             </a:pPr>
             <a:r>
@@ -5626,11 +5696,11 @@
             <a:avLst/>
           </a:prstGeom>
           <a:solidFill>
-            <a:srgbClr val="131C2E"/>
+            <a:srgbClr val="F3F0EA"/>
           </a:solidFill>
           <a:ln w="12700">
             <a:solidFill>
-              <a:srgbClr val="1E293B"/>
+              <a:srgbClr val="E4E0D8"/>
             </a:solidFill>
           </a:ln>
         </p:spPr>
@@ -5655,8 +5725,9 @@
             <a:pPr algn="ctr">
               <a:defRPr sz="1100" b="1">
                 <a:solidFill>
-                  <a:srgbClr val="10B981"/>
-                </a:solidFill>
+                  <a:srgbClr val="225E42"/>
+                </a:solidFill>
+                <a:latin typeface="Helvetica"/>
               </a:defRPr>
             </a:pPr>
             <a:r>
@@ -5698,7 +5769,7 @@
             <a:avLst/>
           </a:prstGeom>
           <a:solidFill>
-            <a:srgbClr val="0B0F19"/>
+            <a:srgbClr val="FAF8F5"/>
           </a:solidFill>
           <a:ln>
             <a:noFill/>
@@ -5735,7 +5806,7 @@
         <p:spPr>
           <a:xfrm>
             <a:off x="731520" y="365760"/>
-            <a:ext cx="10698480" cy="365760"/>
+            <a:ext cx="10698480" cy="320040"/>
           </a:xfrm>
           <a:prstGeom prst="rect">
             <a:avLst/>
@@ -5751,7 +5822,7 @@
             <a:pPr>
               <a:defRPr sz="1000" b="1">
                 <a:solidFill>
-                  <a:srgbClr val="10B981"/>
+                  <a:srgbClr val="225E42"/>
                 </a:solidFill>
                 <a:latin typeface="Helvetica"/>
               </a:defRPr>
@@ -5787,9 +5858,9 @@
             <a:pPr>
               <a:defRPr sz="2400" b="1">
                 <a:solidFill>
-                  <a:srgbClr val="FFFFFF"/>
-                </a:solidFill>
-                <a:latin typeface="Helvetica"/>
+                  <a:srgbClr val="171717"/>
+                </a:solidFill>
+                <a:latin typeface="Georgia"/>
               </a:defRPr>
             </a:pPr>
             <a:r>
@@ -5798,9 +5869,9 @@
           </a:p>
           <a:p>
             <a:pPr>
-              <a:defRPr sz="1300">
-                <a:solidFill>
-                  <a:srgbClr val="94A3B8"/>
+              <a:defRPr sz="1200">
+                <a:solidFill>
+                  <a:srgbClr val="66625C"/>
                 </a:solidFill>
                 <a:latin typeface="Helvetica"/>
               </a:defRPr>
@@ -5826,11 +5897,11 @@
             <a:avLst/>
           </a:prstGeom>
           <a:solidFill>
-            <a:srgbClr val="131C2E"/>
+            <a:srgbClr val="FFFFFF"/>
           </a:solidFill>
           <a:ln w="12700">
             <a:solidFill>
-              <a:srgbClr val="1E293B"/>
+              <a:srgbClr val="E4E0D8"/>
             </a:solidFill>
           </a:ln>
         </p:spPr>
@@ -5855,8 +5926,9 @@
             <a:pPr algn="ctr">
               <a:defRPr sz="1100" b="1">
                 <a:solidFill>
-                  <a:srgbClr val="FFFFFF"/>
-                </a:solidFill>
+                  <a:srgbClr val="171717"/>
+                </a:solidFill>
+                <a:latin typeface="Helvetica"/>
               </a:defRPr>
             </a:pPr>
             <a:r>
@@ -5868,8 +5940,9 @@
             <a:pPr>
               <a:defRPr sz="2800" b="1">
                 <a:solidFill>
-                  <a:srgbClr val="FFFFFF"/>
-                </a:solidFill>
+                  <a:srgbClr val="171717"/>
+                </a:solidFill>
+                <a:latin typeface="Georgia"/>
               </a:defRPr>
             </a:pPr>
             <a:r>
@@ -5881,8 +5954,9 @@
             <a:pPr>
               <a:defRPr sz="1600" b="1">
                 <a:solidFill>
-                  <a:srgbClr val="FFFFFF"/>
-                </a:solidFill>
+                  <a:srgbClr val="171717"/>
+                </a:solidFill>
+                <a:latin typeface="Georgia"/>
               </a:defRPr>
             </a:pPr>
             <a:r>
@@ -5895,8 +5969,9 @@
             <a:pPr>
               <a:defRPr sz="1100">
                 <a:solidFill>
-                  <a:srgbClr val="94A3B8"/>
-                </a:solidFill>
+                  <a:srgbClr val="66625C"/>
+                </a:solidFill>
+                <a:latin typeface="Helvetica"/>
               </a:defRPr>
             </a:pPr>
             <a:r>
@@ -5920,11 +5995,11 @@
             <a:avLst/>
           </a:prstGeom>
           <a:solidFill>
-            <a:srgbClr val="131C2E"/>
+            <a:srgbClr val="FFFFFF"/>
           </a:solidFill>
           <a:ln w="12700">
             <a:solidFill>
-              <a:srgbClr val="1E293B"/>
+              <a:srgbClr val="E4E0D8"/>
             </a:solidFill>
           </a:ln>
         </p:spPr>
@@ -5949,8 +6024,9 @@
             <a:pPr algn="ctr">
               <a:defRPr sz="1100" b="1">
                 <a:solidFill>
-                  <a:srgbClr val="14B8A6"/>
-                </a:solidFill>
+                  <a:srgbClr val="A65A24"/>
+                </a:solidFill>
+                <a:latin typeface="Helvetica"/>
               </a:defRPr>
             </a:pPr>
             <a:r>
@@ -5962,8 +6038,9 @@
             <a:pPr>
               <a:defRPr sz="2800" b="1">
                 <a:solidFill>
-                  <a:srgbClr val="14B8A6"/>
-                </a:solidFill>
+                  <a:srgbClr val="A65A24"/>
+                </a:solidFill>
+                <a:latin typeface="Georgia"/>
               </a:defRPr>
             </a:pPr>
             <a:r>
@@ -5975,8 +6052,9 @@
             <a:pPr>
               <a:defRPr sz="1600" b="1">
                 <a:solidFill>
-                  <a:srgbClr val="FFFFFF"/>
-                </a:solidFill>
+                  <a:srgbClr val="171717"/>
+                </a:solidFill>
+                <a:latin typeface="Georgia"/>
               </a:defRPr>
             </a:pPr>
             <a:r>
@@ -5989,8 +6067,9 @@
             <a:pPr>
               <a:defRPr sz="1100">
                 <a:solidFill>
-                  <a:srgbClr val="94A3B8"/>
-                </a:solidFill>
+                  <a:srgbClr val="66625C"/>
+                </a:solidFill>
+                <a:latin typeface="Helvetica"/>
               </a:defRPr>
             </a:pPr>
             <a:r>
@@ -6014,11 +6093,11 @@
             <a:avLst/>
           </a:prstGeom>
           <a:solidFill>
-            <a:srgbClr val="131C2E"/>
+            <a:srgbClr val="FFFFFF"/>
           </a:solidFill>
           <a:ln w="12700">
             <a:solidFill>
-              <a:srgbClr val="1E293B"/>
+              <a:srgbClr val="E4E0D8"/>
             </a:solidFill>
           </a:ln>
         </p:spPr>
@@ -6043,8 +6122,9 @@
             <a:pPr algn="ctr">
               <a:defRPr sz="1100" b="1">
                 <a:solidFill>
-                  <a:srgbClr val="10B981"/>
-                </a:solidFill>
+                  <a:srgbClr val="225E42"/>
+                </a:solidFill>
+                <a:latin typeface="Helvetica"/>
               </a:defRPr>
             </a:pPr>
             <a:r>
@@ -6056,8 +6136,9 @@
             <a:pPr>
               <a:defRPr sz="2800" b="1">
                 <a:solidFill>
-                  <a:srgbClr val="10B981"/>
-                </a:solidFill>
+                  <a:srgbClr val="225E42"/>
+                </a:solidFill>
+                <a:latin typeface="Georgia"/>
               </a:defRPr>
             </a:pPr>
             <a:r>
@@ -6069,8 +6150,9 @@
             <a:pPr>
               <a:defRPr sz="1600" b="1">
                 <a:solidFill>
-                  <a:srgbClr val="FFFFFF"/>
-                </a:solidFill>
+                  <a:srgbClr val="171717"/>
+                </a:solidFill>
+                <a:latin typeface="Georgia"/>
               </a:defRPr>
             </a:pPr>
             <a:r>
@@ -6083,8 +6165,9 @@
             <a:pPr>
               <a:defRPr sz="1100">
                 <a:solidFill>
-                  <a:srgbClr val="94A3B8"/>
-                </a:solidFill>
+                  <a:srgbClr val="66625C"/>
+                </a:solidFill>
+                <a:latin typeface="Helvetica"/>
               </a:defRPr>
             </a:pPr>
             <a:r>
@@ -6108,11 +6191,11 @@
             <a:avLst/>
           </a:prstGeom>
           <a:solidFill>
-            <a:srgbClr val="131C2E"/>
+            <a:srgbClr val="F3F0EA"/>
           </a:solidFill>
           <a:ln w="12700">
             <a:solidFill>
-              <a:srgbClr val="1E293B"/>
+              <a:srgbClr val="E4E0D8"/>
             </a:solidFill>
           </a:ln>
         </p:spPr>
@@ -6137,8 +6220,9 @@
             <a:pPr algn="ctr">
               <a:defRPr sz="1100">
                 <a:solidFill>
-                  <a:srgbClr val="94A3B8"/>
-                </a:solidFill>
+                  <a:srgbClr val="66625C"/>
+                </a:solidFill>
+                <a:latin typeface="Helvetica"/>
               </a:defRPr>
             </a:pPr>
             <a:r>
@@ -6180,7 +6264,7 @@
             <a:avLst/>
           </a:prstGeom>
           <a:solidFill>
-            <a:srgbClr val="0B0F19"/>
+            <a:srgbClr val="FAF8F5"/>
           </a:solidFill>
           <a:ln>
             <a:noFill/>
@@ -6217,7 +6301,7 @@
         <p:spPr>
           <a:xfrm>
             <a:off x="731520" y="365760"/>
-            <a:ext cx="10698480" cy="365760"/>
+            <a:ext cx="10698480" cy="320040"/>
           </a:xfrm>
           <a:prstGeom prst="rect">
             <a:avLst/>
@@ -6233,7 +6317,7 @@
             <a:pPr>
               <a:defRPr sz="1000" b="1">
                 <a:solidFill>
-                  <a:srgbClr val="10B981"/>
+                  <a:srgbClr val="225E42"/>
                 </a:solidFill>
                 <a:latin typeface="Helvetica"/>
               </a:defRPr>
@@ -6269,9 +6353,9 @@
             <a:pPr>
               <a:defRPr sz="2400" b="1">
                 <a:solidFill>
-                  <a:srgbClr val="FFFFFF"/>
-                </a:solidFill>
-                <a:latin typeface="Helvetica"/>
+                  <a:srgbClr val="171717"/>
+                </a:solidFill>
+                <a:latin typeface="Georgia"/>
               </a:defRPr>
             </a:pPr>
             <a:r>
@@ -6280,9 +6364,9 @@
           </a:p>
           <a:p>
             <a:pPr>
-              <a:defRPr sz="1300">
-                <a:solidFill>
-                  <a:srgbClr val="94A3B8"/>
+              <a:defRPr sz="1200">
+                <a:solidFill>
+                  <a:srgbClr val="66625C"/>
                 </a:solidFill>
                 <a:latin typeface="Helvetica"/>
               </a:defRPr>
@@ -6327,8 +6411,9 @@
                       <a:pPr>
                         <a:defRPr sz="1100" b="1">
                           <a:solidFill>
-                            <a:srgbClr val="FFFFFF"/>
+                            <a:srgbClr val="171717"/>
                           </a:solidFill>
+                          <a:latin typeface="Helvetica"/>
                         </a:defRPr>
                       </a:pPr>
                       <a:r>
@@ -6346,8 +6431,9 @@
                       <a:pPr>
                         <a:defRPr sz="1100" b="1">
                           <a:solidFill>
-                            <a:srgbClr val="FFFFFF"/>
+                            <a:srgbClr val="171717"/>
                           </a:solidFill>
+                          <a:latin typeface="Helvetica"/>
                         </a:defRPr>
                       </a:pPr>
                       <a:r>
@@ -6365,8 +6451,9 @@
                       <a:pPr>
                         <a:defRPr sz="1100" b="1">
                           <a:solidFill>
-                            <a:srgbClr val="FFFFFF"/>
+                            <a:srgbClr val="171717"/>
                           </a:solidFill>
+                          <a:latin typeface="Helvetica"/>
                         </a:defRPr>
                       </a:pPr>
                       <a:r>
@@ -6384,8 +6471,9 @@
                       <a:pPr>
                         <a:defRPr sz="1100" b="1">
                           <a:solidFill>
-                            <a:srgbClr val="FFFFFF"/>
+                            <a:srgbClr val="171717"/>
                           </a:solidFill>
+                          <a:latin typeface="Helvetica"/>
                         </a:defRPr>
                       </a:pPr>
                       <a:r>
@@ -6403,8 +6491,9 @@
                       <a:pPr>
                         <a:defRPr sz="1100" b="1">
                           <a:solidFill>
-                            <a:srgbClr val="10B981"/>
+                            <a:srgbClr val="225E42"/>
                           </a:solidFill>
+                          <a:latin typeface="Helvetica"/>
                         </a:defRPr>
                       </a:pPr>
                       <a:r>
@@ -6424,8 +6513,9 @@
                       <a:pPr>
                         <a:defRPr sz="1000">
                           <a:solidFill>
-                            <a:srgbClr val="94A3B8"/>
+                            <a:srgbClr val="66625C"/>
                           </a:solidFill>
+                          <a:latin typeface="Helvetica"/>
                         </a:defRPr>
                       </a:pPr>
                       <a:r>
@@ -6443,8 +6533,9 @@
                       <a:pPr>
                         <a:defRPr sz="1000">
                           <a:solidFill>
-                            <a:srgbClr val="94A3B8"/>
+                            <a:srgbClr val="66625C"/>
                           </a:solidFill>
+                          <a:latin typeface="Helvetica"/>
                         </a:defRPr>
                       </a:pPr>
                       <a:r>
@@ -6462,8 +6553,9 @@
                       <a:pPr>
                         <a:defRPr sz="1000">
                           <a:solidFill>
-                            <a:srgbClr val="94A3B8"/>
+                            <a:srgbClr val="66625C"/>
                           </a:solidFill>
+                          <a:latin typeface="Helvetica"/>
                         </a:defRPr>
                       </a:pPr>
                       <a:r>
@@ -6481,8 +6573,9 @@
                       <a:pPr>
                         <a:defRPr sz="1000">
                           <a:solidFill>
-                            <a:srgbClr val="94A3B8"/>
+                            <a:srgbClr val="66625C"/>
                           </a:solidFill>
+                          <a:latin typeface="Helvetica"/>
                         </a:defRPr>
                       </a:pPr>
                       <a:r>
@@ -6500,8 +6593,9 @@
                       <a:pPr>
                         <a:defRPr sz="1000" b="1">
                           <a:solidFill>
-                            <a:srgbClr val="10B981"/>
+                            <a:srgbClr val="225E42"/>
                           </a:solidFill>
+                          <a:latin typeface="Helvetica"/>
                         </a:defRPr>
                       </a:pPr>
                       <a:r>
@@ -6521,8 +6615,9 @@
                       <a:pPr>
                         <a:defRPr sz="1000">
                           <a:solidFill>
-                            <a:srgbClr val="94A3B8"/>
+                            <a:srgbClr val="66625C"/>
                           </a:solidFill>
+                          <a:latin typeface="Helvetica"/>
                         </a:defRPr>
                       </a:pPr>
                       <a:r>
@@ -6540,8 +6635,9 @@
                       <a:pPr>
                         <a:defRPr sz="1000">
                           <a:solidFill>
-                            <a:srgbClr val="94A3B8"/>
+                            <a:srgbClr val="66625C"/>
                           </a:solidFill>
+                          <a:latin typeface="Helvetica"/>
                         </a:defRPr>
                       </a:pPr>
                       <a:r>
@@ -6559,8 +6655,9 @@
                       <a:pPr>
                         <a:defRPr sz="1000">
                           <a:solidFill>
-                            <a:srgbClr val="94A3B8"/>
+                            <a:srgbClr val="66625C"/>
                           </a:solidFill>
+                          <a:latin typeface="Helvetica"/>
                         </a:defRPr>
                       </a:pPr>
                       <a:r>
@@ -6578,8 +6675,9 @@
                       <a:pPr>
                         <a:defRPr sz="1000">
                           <a:solidFill>
-                            <a:srgbClr val="94A3B8"/>
+                            <a:srgbClr val="66625C"/>
                           </a:solidFill>
+                          <a:latin typeface="Helvetica"/>
                         </a:defRPr>
                       </a:pPr>
                       <a:r>
@@ -6597,8 +6695,9 @@
                       <a:pPr>
                         <a:defRPr sz="1000" b="1">
                           <a:solidFill>
-                            <a:srgbClr val="10B981"/>
+                            <a:srgbClr val="225E42"/>
                           </a:solidFill>
+                          <a:latin typeface="Helvetica"/>
                         </a:defRPr>
                       </a:pPr>
                       <a:r>
@@ -6618,8 +6717,9 @@
                       <a:pPr>
                         <a:defRPr sz="1000">
                           <a:solidFill>
-                            <a:srgbClr val="94A3B8"/>
+                            <a:srgbClr val="66625C"/>
                           </a:solidFill>
+                          <a:latin typeface="Helvetica"/>
                         </a:defRPr>
                       </a:pPr>
                       <a:r>
@@ -6637,8 +6737,9 @@
                       <a:pPr>
                         <a:defRPr sz="1000">
                           <a:solidFill>
-                            <a:srgbClr val="94A3B8"/>
+                            <a:srgbClr val="66625C"/>
                           </a:solidFill>
+                          <a:latin typeface="Helvetica"/>
                         </a:defRPr>
                       </a:pPr>
                       <a:r>
@@ -6656,8 +6757,9 @@
                       <a:pPr>
                         <a:defRPr sz="1000">
                           <a:solidFill>
-                            <a:srgbClr val="94A3B8"/>
+                            <a:srgbClr val="66625C"/>
                           </a:solidFill>
+                          <a:latin typeface="Helvetica"/>
                         </a:defRPr>
                       </a:pPr>
                       <a:r>
@@ -6675,8 +6777,9 @@
                       <a:pPr>
                         <a:defRPr sz="1000">
                           <a:solidFill>
-                            <a:srgbClr val="94A3B8"/>
+                            <a:srgbClr val="66625C"/>
                           </a:solidFill>
+                          <a:latin typeface="Helvetica"/>
                         </a:defRPr>
                       </a:pPr>
                       <a:r>
@@ -6694,8 +6797,9 @@
                       <a:pPr>
                         <a:defRPr sz="1000" b="1">
                           <a:solidFill>
-                            <a:srgbClr val="10B981"/>
+                            <a:srgbClr val="225E42"/>
                           </a:solidFill>
+                          <a:latin typeface="Helvetica"/>
                         </a:defRPr>
                       </a:pPr>
                       <a:r>
@@ -6715,8 +6819,9 @@
                       <a:pPr>
                         <a:defRPr sz="1000">
                           <a:solidFill>
-                            <a:srgbClr val="94A3B8"/>
+                            <a:srgbClr val="66625C"/>
                           </a:solidFill>
+                          <a:latin typeface="Helvetica"/>
                         </a:defRPr>
                       </a:pPr>
                       <a:r>
@@ -6734,8 +6839,9 @@
                       <a:pPr>
                         <a:defRPr sz="1000">
                           <a:solidFill>
-                            <a:srgbClr val="94A3B8"/>
+                            <a:srgbClr val="66625C"/>
                           </a:solidFill>
+                          <a:latin typeface="Helvetica"/>
                         </a:defRPr>
                       </a:pPr>
                       <a:r>
@@ -6753,8 +6859,9 @@
                       <a:pPr>
                         <a:defRPr sz="1000">
                           <a:solidFill>
-                            <a:srgbClr val="94A3B8"/>
+                            <a:srgbClr val="66625C"/>
                           </a:solidFill>
+                          <a:latin typeface="Helvetica"/>
                         </a:defRPr>
                       </a:pPr>
                       <a:r>
@@ -6772,8 +6879,9 @@
                       <a:pPr>
                         <a:defRPr sz="1000">
                           <a:solidFill>
-                            <a:srgbClr val="94A3B8"/>
+                            <a:srgbClr val="66625C"/>
                           </a:solidFill>
+                          <a:latin typeface="Helvetica"/>
                         </a:defRPr>
                       </a:pPr>
                       <a:r>
@@ -6791,8 +6899,9 @@
                       <a:pPr>
                         <a:defRPr sz="1000" b="1">
                           <a:solidFill>
-                            <a:srgbClr val="10B981"/>
+                            <a:srgbClr val="225E42"/>
                           </a:solidFill>
+                          <a:latin typeface="Helvetica"/>
                         </a:defRPr>
                       </a:pPr>
                       <a:r>
@@ -6812,8 +6921,9 @@
                       <a:pPr>
                         <a:defRPr sz="1000">
                           <a:solidFill>
-                            <a:srgbClr val="94A3B8"/>
+                            <a:srgbClr val="66625C"/>
                           </a:solidFill>
+                          <a:latin typeface="Helvetica"/>
                         </a:defRPr>
                       </a:pPr>
                       <a:r>
@@ -6831,8 +6941,9 @@
                       <a:pPr>
                         <a:defRPr sz="1000">
                           <a:solidFill>
-                            <a:srgbClr val="94A3B8"/>
+                            <a:srgbClr val="66625C"/>
                           </a:solidFill>
+                          <a:latin typeface="Helvetica"/>
                         </a:defRPr>
                       </a:pPr>
                       <a:r>
@@ -6850,8 +6961,9 @@
                       <a:pPr>
                         <a:defRPr sz="1000">
                           <a:solidFill>
-                            <a:srgbClr val="94A3B8"/>
+                            <a:srgbClr val="66625C"/>
                           </a:solidFill>
+                          <a:latin typeface="Helvetica"/>
                         </a:defRPr>
                       </a:pPr>
                       <a:r>
@@ -6869,8 +6981,9 @@
                       <a:pPr>
                         <a:defRPr sz="1000">
                           <a:solidFill>
-                            <a:srgbClr val="94A3B8"/>
+                            <a:srgbClr val="66625C"/>
                           </a:solidFill>
+                          <a:latin typeface="Helvetica"/>
                         </a:defRPr>
                       </a:pPr>
                       <a:r>
@@ -6888,8 +7001,9 @@
                       <a:pPr>
                         <a:defRPr sz="1000" b="1">
                           <a:solidFill>
-                            <a:srgbClr val="10B981"/>
+                            <a:srgbClr val="225E42"/>
                           </a:solidFill>
+                          <a:latin typeface="Helvetica"/>
                         </a:defRPr>
                       </a:pPr>
                       <a:r>
@@ -6937,7 +7051,7 @@
             <a:avLst/>
           </a:prstGeom>
           <a:solidFill>
-            <a:srgbClr val="0B0F19"/>
+            <a:srgbClr val="FAF8F5"/>
           </a:solidFill>
           <a:ln>
             <a:noFill/>
@@ -6974,7 +7088,7 @@
         <p:spPr>
           <a:xfrm>
             <a:off x="731520" y="365760"/>
-            <a:ext cx="10698480" cy="365760"/>
+            <a:ext cx="10698480" cy="320040"/>
           </a:xfrm>
           <a:prstGeom prst="rect">
             <a:avLst/>
@@ -6990,7 +7104,7 @@
             <a:pPr>
               <a:defRPr sz="1000" b="1">
                 <a:solidFill>
-                  <a:srgbClr val="10B981"/>
+                  <a:srgbClr val="225E42"/>
                 </a:solidFill>
                 <a:latin typeface="Helvetica"/>
               </a:defRPr>
@@ -7026,9 +7140,9 @@
             <a:pPr>
               <a:defRPr sz="2400" b="1">
                 <a:solidFill>
-                  <a:srgbClr val="FFFFFF"/>
-                </a:solidFill>
-                <a:latin typeface="Helvetica"/>
+                  <a:srgbClr val="171717"/>
+                </a:solidFill>
+                <a:latin typeface="Georgia"/>
               </a:defRPr>
             </a:pPr>
             <a:r>
@@ -7037,9 +7151,9 @@
           </a:p>
           <a:p>
             <a:pPr>
-              <a:defRPr sz="1300">
-                <a:solidFill>
-                  <a:srgbClr val="94A3B8"/>
+              <a:defRPr sz="1200">
+                <a:solidFill>
+                  <a:srgbClr val="66625C"/>
                 </a:solidFill>
                 <a:latin typeface="Helvetica"/>
               </a:defRPr>
@@ -7065,11 +7179,11 @@
             <a:avLst/>
           </a:prstGeom>
           <a:solidFill>
-            <a:srgbClr val="131C2E"/>
+            <a:srgbClr val="FFFFFF"/>
           </a:solidFill>
           <a:ln w="12700">
             <a:solidFill>
-              <a:srgbClr val="1E293B"/>
+              <a:srgbClr val="E4E0D8"/>
             </a:solidFill>
           </a:ln>
         </p:spPr>
@@ -7094,8 +7208,9 @@
             <a:pPr algn="ctr">
               <a:defRPr sz="1400" b="1">
                 <a:solidFill>
-                  <a:srgbClr val="FFFFFF"/>
-                </a:solidFill>
+                  <a:srgbClr val="171717"/>
+                </a:solidFill>
+                <a:latin typeface="Georgia"/>
               </a:defRPr>
             </a:pPr>
             <a:r>
@@ -7107,8 +7222,9 @@
             <a:pPr>
               <a:defRPr sz="1200" b="1">
                 <a:solidFill>
-                  <a:srgbClr val="10B981"/>
-                </a:solidFill>
+                  <a:srgbClr val="225E42"/>
+                </a:solidFill>
+                <a:latin typeface="Helvetica"/>
               </a:defRPr>
             </a:pPr>
             <a:r>
@@ -7120,8 +7236,9 @@
             <a:pPr>
               <a:defRPr sz="1050">
                 <a:solidFill>
-                  <a:srgbClr val="94A3B8"/>
-                </a:solidFill>
+                  <a:srgbClr val="66625C"/>
+                </a:solidFill>
+                <a:latin typeface="Helvetica"/>
               </a:defRPr>
             </a:pPr>
             <a:r>
@@ -7133,8 +7250,9 @@
             <a:pPr>
               <a:defRPr sz="1200" b="1">
                 <a:solidFill>
-                  <a:srgbClr val="10B981"/>
-                </a:solidFill>
+                  <a:srgbClr val="225E42"/>
+                </a:solidFill>
+                <a:latin typeface="Helvetica"/>
               </a:defRPr>
             </a:pPr>
             <a:r>
@@ -7146,8 +7264,9 @@
             <a:pPr>
               <a:defRPr sz="1050">
                 <a:solidFill>
-                  <a:srgbClr val="94A3B8"/>
-                </a:solidFill>
+                  <a:srgbClr val="66625C"/>
+                </a:solidFill>
+                <a:latin typeface="Helvetica"/>
               </a:defRPr>
             </a:pPr>
             <a:r>
@@ -7159,8 +7278,9 @@
             <a:pPr>
               <a:defRPr sz="1200" b="1">
                 <a:solidFill>
-                  <a:srgbClr val="10B981"/>
-                </a:solidFill>
+                  <a:srgbClr val="225E42"/>
+                </a:solidFill>
+                <a:latin typeface="Helvetica"/>
               </a:defRPr>
             </a:pPr>
             <a:r>
@@ -7172,8 +7292,9 @@
             <a:pPr>
               <a:defRPr sz="1050">
                 <a:solidFill>
-                  <a:srgbClr val="94A3B8"/>
-                </a:solidFill>
+                  <a:srgbClr val="66625C"/>
+                </a:solidFill>
+                <a:latin typeface="Helvetica"/>
               </a:defRPr>
             </a:pPr>
             <a:r>
@@ -7185,8 +7306,9 @@
             <a:pPr>
               <a:defRPr sz="1200" b="1">
                 <a:solidFill>
-                  <a:srgbClr val="10B981"/>
-                </a:solidFill>
+                  <a:srgbClr val="225E42"/>
+                </a:solidFill>
+                <a:latin typeface="Helvetica"/>
               </a:defRPr>
             </a:pPr>
             <a:r>
@@ -7198,8 +7320,9 @@
             <a:pPr>
               <a:defRPr sz="1050">
                 <a:solidFill>
-                  <a:srgbClr val="94A3B8"/>
-                </a:solidFill>
+                  <a:srgbClr val="66625C"/>
+                </a:solidFill>
+                <a:latin typeface="Helvetica"/>
               </a:defRPr>
             </a:pPr>
             <a:r>
@@ -7224,11 +7347,11 @@
             <a:avLst/>
           </a:prstGeom>
           <a:solidFill>
-            <a:srgbClr val="131C2E"/>
+            <a:srgbClr val="F1F7F3"/>
           </a:solidFill>
           <a:ln w="12700">
             <a:solidFill>
-              <a:srgbClr val="10B981"/>
+              <a:srgbClr val="225E42"/>
             </a:solidFill>
           </a:ln>
         </p:spPr>
@@ -7251,10 +7374,11 @@
           <a:lstStyle/>
           <a:p>
             <a:pPr algn="ctr">
-              <a:defRPr sz="1200" b="1">
-                <a:solidFill>
-                  <a:srgbClr val="10B981"/>
-                </a:solidFill>
+              <a:defRPr sz="1100" b="1">
+                <a:solidFill>
+                  <a:srgbClr val="225E42"/>
+                </a:solidFill>
+                <a:latin typeface="Helvetica"/>
               </a:defRPr>
             </a:pPr>
             <a:r>
@@ -7266,8 +7390,9 @@
             <a:pPr>
               <a:defRPr sz="2200" b="1">
                 <a:solidFill>
-                  <a:srgbClr val="FFFFFF"/>
-                </a:solidFill>
+                  <a:srgbClr val="171717"/>
+                </a:solidFill>
+                <a:latin typeface="Georgia"/>
               </a:defRPr>
             </a:pPr>
             <a:r>
@@ -7278,10 +7403,11 @@
           </a:p>
           <a:p>
             <a:pPr>
-              <a:defRPr sz="1200">
-                <a:solidFill>
-                  <a:srgbClr val="94A3B8"/>
-                </a:solidFill>
+              <a:defRPr sz="1150">
+                <a:solidFill>
+                  <a:srgbClr val="66625C"/>
+                </a:solidFill>
+                <a:latin typeface="Helvetica"/>
               </a:defRPr>
             </a:pPr>
             <a:r>
@@ -7294,8 +7420,9 @@
             <a:pPr>
               <a:defRPr sz="1100" b="1">
                 <a:solidFill>
-                  <a:srgbClr val="FFFFFF"/>
-                </a:solidFill>
+                  <a:srgbClr val="171717"/>
+                </a:solidFill>
+                <a:latin typeface="Helvetica"/>
               </a:defRPr>
             </a:pPr>
             <a:r>
@@ -7306,8 +7433,9 @@
             <a:pPr>
               <a:defRPr sz="1100">
                 <a:solidFill>
-                  <a:srgbClr val="10B981"/>
-                </a:solidFill>
+                  <a:srgbClr val="225E42"/>
+                </a:solidFill>
+                <a:latin typeface="Helvetica"/>
               </a:defRPr>
             </a:pPr>
             <a:r>
@@ -7349,7 +7477,7 @@
             <a:avLst/>
           </a:prstGeom>
           <a:solidFill>
-            <a:srgbClr val="0B0F19"/>
+            <a:srgbClr val="FAF8F5"/>
           </a:solidFill>
           <a:ln>
             <a:noFill/>
@@ -7386,7 +7514,7 @@
         <p:spPr>
           <a:xfrm>
             <a:off x="731520" y="365760"/>
-            <a:ext cx="10698480" cy="365760"/>
+            <a:ext cx="10698480" cy="320040"/>
           </a:xfrm>
           <a:prstGeom prst="rect">
             <a:avLst/>
@@ -7402,7 +7530,7 @@
             <a:pPr>
               <a:defRPr sz="1000" b="1">
                 <a:solidFill>
-                  <a:srgbClr val="10B981"/>
+                  <a:srgbClr val="225E42"/>
                 </a:solidFill>
                 <a:latin typeface="Helvetica"/>
               </a:defRPr>
@@ -7438,9 +7566,9 @@
             <a:pPr>
               <a:defRPr sz="2400" b="1">
                 <a:solidFill>
-                  <a:srgbClr val="FFFFFF"/>
-                </a:solidFill>
-                <a:latin typeface="Helvetica"/>
+                  <a:srgbClr val="171717"/>
+                </a:solidFill>
+                <a:latin typeface="Georgia"/>
               </a:defRPr>
             </a:pPr>
             <a:r>
@@ -7449,15 +7577,15 @@
           </a:p>
           <a:p>
             <a:pPr>
-              <a:defRPr sz="1300">
-                <a:solidFill>
-                  <a:srgbClr val="94A3B8"/>
-                </a:solidFill>
-                <a:latin typeface="Helvetica"/>
-              </a:defRPr>
-            </a:pPr>
-            <a:r>
-              <a:t>How 54-day payment cycles paralyze global supply chains</a:t>
+              <a:defRPr sz="1200">
+                <a:solidFill>
+                  <a:srgbClr val="66625C"/>
+                </a:solidFill>
+                <a:latin typeface="Helvetica"/>
+              </a:defRPr>
+            </a:pPr>
+            <a:r>
+              <a:t>How 54-day payment cycles paralyze global enterprise supply chains</a:t>
             </a:r>
           </a:p>
         </p:txBody>
@@ -7471,17 +7599,17 @@
         <p:spPr>
           <a:xfrm>
             <a:off x="731520" y="1645920"/>
-            <a:ext cx="3291840" cy="2377440"/>
+            <a:ext cx="3291840" cy="2468880"/>
           </a:xfrm>
           <a:prstGeom prst="roundRect">
             <a:avLst/>
           </a:prstGeom>
           <a:solidFill>
-            <a:srgbClr val="131C2E"/>
+            <a:srgbClr val="FFFFFF"/>
           </a:solidFill>
           <a:ln w="12700">
             <a:solidFill>
-              <a:srgbClr val="EF4444"/>
+              <a:srgbClr val="B91C1C"/>
             </a:solidFill>
           </a:ln>
         </p:spPr>
@@ -7506,8 +7634,9 @@
             <a:pPr algn="ctr">
               <a:defRPr sz="3200" b="1">
                 <a:solidFill>
-                  <a:srgbClr val="EF4444"/>
-                </a:solidFill>
+                  <a:srgbClr val="B91C1C"/>
+                </a:solidFill>
+                <a:latin typeface="Georgia"/>
               </a:defRPr>
             </a:pPr>
             <a:r>
@@ -7517,10 +7646,11 @@
           </a:p>
           <a:p>
             <a:pPr>
-              <a:defRPr sz="1400" b="1">
-                <a:solidFill>
-                  <a:srgbClr val="FFFFFF"/>
-                </a:solidFill>
+              <a:defRPr sz="1300" b="1">
+                <a:solidFill>
+                  <a:srgbClr val="171717"/>
+                </a:solidFill>
+                <a:latin typeface="Helvetica"/>
               </a:defRPr>
             </a:pPr>
             <a:r>
@@ -7532,8 +7662,9 @@
             <a:pPr>
               <a:defRPr sz="1100">
                 <a:solidFill>
-                  <a:srgbClr val="94A3B8"/>
-                </a:solidFill>
+                  <a:srgbClr val="66625C"/>
+                </a:solidFill>
+                <a:latin typeface="Helvetica"/>
               </a:defRPr>
             </a:pPr>
             <a:r>
@@ -7551,17 +7682,17 @@
         <p:spPr>
           <a:xfrm>
             <a:off x="4389120" y="1645920"/>
-            <a:ext cx="3291840" cy="2377440"/>
+            <a:ext cx="3291840" cy="2468880"/>
           </a:xfrm>
           <a:prstGeom prst="roundRect">
             <a:avLst/>
           </a:prstGeom>
           <a:solidFill>
-            <a:srgbClr val="131C2E"/>
+            <a:srgbClr val="FFFFFF"/>
           </a:solidFill>
           <a:ln w="12700">
             <a:solidFill>
-              <a:srgbClr val="F59E0B"/>
+              <a:srgbClr val="A65A24"/>
             </a:solidFill>
           </a:ln>
         </p:spPr>
@@ -7586,8 +7717,9 @@
             <a:pPr algn="ctr">
               <a:defRPr sz="3200" b="1">
                 <a:solidFill>
-                  <a:srgbClr val="F59E0B"/>
-                </a:solidFill>
+                  <a:srgbClr val="A65A24"/>
+                </a:solidFill>
+                <a:latin typeface="Georgia"/>
               </a:defRPr>
             </a:pPr>
             <a:r>
@@ -7597,10 +7729,11 @@
           </a:p>
           <a:p>
             <a:pPr>
-              <a:defRPr sz="1400" b="1">
-                <a:solidFill>
-                  <a:srgbClr val="FFFFFF"/>
-                </a:solidFill>
+              <a:defRPr sz="1300" b="1">
+                <a:solidFill>
+                  <a:srgbClr val="171717"/>
+                </a:solidFill>
+                <a:latin typeface="Helvetica"/>
               </a:defRPr>
             </a:pPr>
             <a:r>
@@ -7612,8 +7745,9 @@
             <a:pPr>
               <a:defRPr sz="1100">
                 <a:solidFill>
-                  <a:srgbClr val="94A3B8"/>
-                </a:solidFill>
+                  <a:srgbClr val="66625C"/>
+                </a:solidFill>
+                <a:latin typeface="Helvetica"/>
               </a:defRPr>
             </a:pPr>
             <a:r>
@@ -7631,17 +7765,17 @@
         <p:spPr>
           <a:xfrm>
             <a:off x="8046720" y="1645920"/>
-            <a:ext cx="3291840" cy="2377440"/>
+            <a:ext cx="3291840" cy="2468880"/>
           </a:xfrm>
           <a:prstGeom prst="roundRect">
             <a:avLst/>
           </a:prstGeom>
           <a:solidFill>
-            <a:srgbClr val="131C2E"/>
+            <a:srgbClr val="FFFFFF"/>
           </a:solidFill>
           <a:ln w="12700">
             <a:solidFill>
-              <a:srgbClr val="1E293B"/>
+              <a:srgbClr val="E4E0D8"/>
             </a:solidFill>
           </a:ln>
         </p:spPr>
@@ -7666,8 +7800,9 @@
             <a:pPr algn="ctr">
               <a:defRPr sz="3200" b="1">
                 <a:solidFill>
-                  <a:srgbClr val="FFFFFF"/>
-                </a:solidFill>
+                  <a:srgbClr val="171717"/>
+                </a:solidFill>
+                <a:latin typeface="Georgia"/>
               </a:defRPr>
             </a:pPr>
             <a:r>
@@ -7677,10 +7812,11 @@
           </a:p>
           <a:p>
             <a:pPr>
-              <a:defRPr sz="1400" b="1">
-                <a:solidFill>
-                  <a:srgbClr val="FFFFFF"/>
-                </a:solidFill>
+              <a:defRPr sz="1300" b="1">
+                <a:solidFill>
+                  <a:srgbClr val="171717"/>
+                </a:solidFill>
+                <a:latin typeface="Helvetica"/>
               </a:defRPr>
             </a:pPr>
             <a:r>
@@ -7692,12 +7828,13 @@
             <a:pPr>
               <a:defRPr sz="1100">
                 <a:solidFill>
-                  <a:srgbClr val="94A3B8"/>
-                </a:solidFill>
-              </a:defRPr>
-            </a:pPr>
-            <a:r>
-              <a:t>Consumer commerce moved to instant VISA chips in seconds. B2B payments still run on static PDFs, manual IBAN wires, and email chasing.</a:t>
+                  <a:srgbClr val="66625C"/>
+                </a:solidFill>
+                <a:latin typeface="Helvetica"/>
+              </a:defRPr>
+            </a:pPr>
+            <a:r>
+              <a:t>Consumer commerce moved to instant card clearing in seconds. B2B payments still run on static PDFs, manual IBAN wires, and email chasing.</a:t>
             </a:r>
           </a:p>
         </p:txBody>
@@ -7717,11 +7854,11 @@
             <a:avLst/>
           </a:prstGeom>
           <a:solidFill>
-            <a:srgbClr val="131C2E"/>
+            <a:srgbClr val="FEF2F2"/>
           </a:solidFill>
           <a:ln w="12700">
             <a:solidFill>
-              <a:srgbClr val="1E293B"/>
+              <a:srgbClr val="B91C1C"/>
             </a:solidFill>
           </a:ln>
         </p:spPr>
@@ -7744,10 +7881,11 @@
           <a:lstStyle/>
           <a:p>
             <a:pPr algn="ctr">
-              <a:defRPr sz="1200" b="1">
-                <a:solidFill>
-                  <a:srgbClr val="EF4444"/>
-                </a:solidFill>
+              <a:defRPr sz="1100" b="1">
+                <a:solidFill>
+                  <a:srgbClr val="B91C1C"/>
+                </a:solidFill>
+                <a:latin typeface="Helvetica"/>
               </a:defRPr>
             </a:pPr>
             <a:r>
@@ -7759,8 +7897,9 @@
             <a:pPr>
               <a:defRPr sz="1200">
                 <a:solidFill>
-                  <a:srgbClr val="94A3B8"/>
-                </a:solidFill>
+                  <a:srgbClr val="171717"/>
+                </a:solidFill>
+                <a:latin typeface="Helvetica"/>
               </a:defRPr>
             </a:pPr>
             <a:r>
@@ -7802,7 +7941,7 @@
             <a:avLst/>
           </a:prstGeom>
           <a:solidFill>
-            <a:srgbClr val="0B0F19"/>
+            <a:srgbClr val="FAF8F5"/>
           </a:solidFill>
           <a:ln>
             <a:noFill/>
@@ -7839,7 +7978,7 @@
         <p:spPr>
           <a:xfrm>
             <a:off x="731520" y="365760"/>
-            <a:ext cx="10698480" cy="365760"/>
+            <a:ext cx="10698480" cy="320040"/>
           </a:xfrm>
           <a:prstGeom prst="rect">
             <a:avLst/>
@@ -7855,7 +7994,7 @@
             <a:pPr>
               <a:defRPr sz="1000" b="1">
                 <a:solidFill>
-                  <a:srgbClr val="10B981"/>
+                  <a:srgbClr val="225E42"/>
                 </a:solidFill>
                 <a:latin typeface="Helvetica"/>
               </a:defRPr>
@@ -7891,9 +8030,9 @@
             <a:pPr>
               <a:defRPr sz="2400" b="1">
                 <a:solidFill>
-                  <a:srgbClr val="FFFFFF"/>
-                </a:solidFill>
-                <a:latin typeface="Helvetica"/>
+                  <a:srgbClr val="171717"/>
+                </a:solidFill>
+                <a:latin typeface="Georgia"/>
               </a:defRPr>
             </a:pPr>
             <a:r>
@@ -7902,9 +8041,9 @@
           </a:p>
           <a:p>
             <a:pPr>
-              <a:defRPr sz="1300">
-                <a:solidFill>
-                  <a:srgbClr val="94A3B8"/>
+              <a:defRPr sz="1200">
+                <a:solidFill>
+                  <a:srgbClr val="66625C"/>
                 </a:solidFill>
                 <a:latin typeface="Helvetica"/>
               </a:defRPr>
@@ -7930,11 +8069,11 @@
             <a:avLst/>
           </a:prstGeom>
           <a:solidFill>
-            <a:srgbClr val="131C2E"/>
+            <a:srgbClr val="FFFFFF"/>
           </a:solidFill>
           <a:ln w="12700">
             <a:solidFill>
-              <a:srgbClr val="1E293B"/>
+              <a:srgbClr val="E4E0D8"/>
             </a:solidFill>
           </a:ln>
         </p:spPr>
@@ -7957,10 +8096,11 @@
           <a:lstStyle/>
           <a:p>
             <a:pPr algn="ctr">
-              <a:defRPr sz="1400" b="1">
-                <a:solidFill>
-                  <a:srgbClr val="EF4444"/>
-                </a:solidFill>
+              <a:defRPr sz="1300" b="1">
+                <a:solidFill>
+                  <a:srgbClr val="B91C1C"/>
+                </a:solidFill>
+                <a:latin typeface="Helvetica"/>
               </a:defRPr>
             </a:pPr>
             <a:r>
@@ -7970,10 +8110,11 @@
           </a:p>
           <a:p>
             <a:pPr>
-              <a:defRPr sz="1200">
-                <a:solidFill>
-                  <a:srgbClr val="FFFFFF"/>
-                </a:solidFill>
+              <a:defRPr sz="1150">
+                <a:solidFill>
+                  <a:srgbClr val="171717"/>
+                </a:solidFill>
+                <a:latin typeface="Helvetica"/>
               </a:defRPr>
             </a:pPr>
             <a:r>
@@ -7983,10 +8124,11 @@
           </a:p>
           <a:p>
             <a:pPr>
-              <a:defRPr sz="1200">
-                <a:solidFill>
-                  <a:srgbClr val="FFFFFF"/>
-                </a:solidFill>
+              <a:defRPr sz="1150">
+                <a:solidFill>
+                  <a:srgbClr val="171717"/>
+                </a:solidFill>
+                <a:latin typeface="Helvetica"/>
               </a:defRPr>
             </a:pPr>
             <a:r>
@@ -7996,10 +8138,11 @@
           </a:p>
           <a:p>
             <a:pPr>
-              <a:defRPr sz="1200">
-                <a:solidFill>
-                  <a:srgbClr val="FFFFFF"/>
-                </a:solidFill>
+              <a:defRPr sz="1150">
+                <a:solidFill>
+                  <a:srgbClr val="171717"/>
+                </a:solidFill>
+                <a:latin typeface="Helvetica"/>
               </a:defRPr>
             </a:pPr>
             <a:r>
@@ -8009,10 +8152,11 @@
           </a:p>
           <a:p>
             <a:pPr>
-              <a:defRPr sz="1200">
-                <a:solidFill>
-                  <a:srgbClr val="FFFFFF"/>
-                </a:solidFill>
+              <a:defRPr sz="1150">
+                <a:solidFill>
+                  <a:srgbClr val="171717"/>
+                </a:solidFill>
+                <a:latin typeface="Helvetica"/>
               </a:defRPr>
             </a:pPr>
             <a:r>
@@ -8037,11 +8181,11 @@
             <a:avLst/>
           </a:prstGeom>
           <a:solidFill>
-            <a:srgbClr val="131C2E"/>
+            <a:srgbClr val="FFFFFF"/>
           </a:solidFill>
           <a:ln w="12700">
             <a:solidFill>
-              <a:srgbClr val="1E293B"/>
+              <a:srgbClr val="A65A24"/>
             </a:solidFill>
           </a:ln>
         </p:spPr>
@@ -8064,10 +8208,11 @@
           <a:lstStyle/>
           <a:p>
             <a:pPr algn="ctr">
-              <a:defRPr sz="1400" b="1">
-                <a:solidFill>
-                  <a:srgbClr val="F59E0B"/>
-                </a:solidFill>
+              <a:defRPr sz="1300" b="1">
+                <a:solidFill>
+                  <a:srgbClr val="A65A24"/>
+                </a:solidFill>
+                <a:latin typeface="Helvetica"/>
               </a:defRPr>
             </a:pPr>
             <a:r>
@@ -8077,10 +8222,11 @@
           </a:p>
           <a:p>
             <a:pPr>
-              <a:defRPr sz="1200">
-                <a:solidFill>
-                  <a:srgbClr val="94A3B8"/>
-                </a:solidFill>
+              <a:defRPr sz="1150">
+                <a:solidFill>
+                  <a:srgbClr val="66625C"/>
+                </a:solidFill>
+                <a:latin typeface="Helvetica"/>
               </a:defRPr>
             </a:pPr>
             <a:r>
@@ -8090,22 +8236,24 @@
           </a:p>
           <a:p>
             <a:pPr>
-              <a:defRPr sz="1200" b="1">
-                <a:solidFill>
-                  <a:srgbClr val="FFFFFF"/>
-                </a:solidFill>
-              </a:defRPr>
-            </a:pPr>
-            <a:r>
-              <a:t>  1. No real-time bank cash balance (PSD2)</a:t>
-            </a:r>
-          </a:p>
-          <a:p>
-            <a:pPr>
-              <a:defRPr sz="1200" b="1">
-                <a:solidFill>
-                  <a:srgbClr val="FFFFFF"/>
-                </a:solidFill>
+              <a:defRPr sz="1150" b="1">
+                <a:solidFill>
+                  <a:srgbClr val="171717"/>
+                </a:solidFill>
+                <a:latin typeface="Helvetica"/>
+              </a:defRPr>
+            </a:pPr>
+            <a:r>
+              <a:t>  1. No real-time bank cash balance (PSD2 Open Banking)</a:t>
+            </a:r>
+          </a:p>
+          <a:p>
+            <a:pPr>
+              <a:defRPr sz="1150" b="1">
+                <a:solidFill>
+                  <a:srgbClr val="171717"/>
+                </a:solidFill>
+                <a:latin typeface="Helvetica"/>
               </a:defRPr>
             </a:pPr>
             <a:r>
@@ -8114,10 +8262,11 @@
           </a:p>
           <a:p>
             <a:pPr>
-              <a:defRPr sz="1200" b="1">
-                <a:solidFill>
-                  <a:srgbClr val="FFFFFF"/>
-                </a:solidFill>
+              <a:defRPr sz="1150" b="1">
+                <a:solidFill>
+                  <a:srgbClr val="171717"/>
+                </a:solidFill>
+                <a:latin typeface="Helvetica"/>
               </a:defRPr>
             </a:pPr>
             <a:r>
@@ -8126,10 +8275,11 @@
           </a:p>
           <a:p>
             <a:pPr>
-              <a:defRPr sz="1200" b="1">
-                <a:solidFill>
-                  <a:srgbClr val="FFFFFF"/>
-                </a:solidFill>
+              <a:defRPr sz="1150" b="1">
+                <a:solidFill>
+                  <a:srgbClr val="171717"/>
+                </a:solidFill>
+                <a:latin typeface="Helvetica"/>
               </a:defRPr>
             </a:pPr>
             <a:r>
@@ -8171,7 +8321,7 @@
             <a:avLst/>
           </a:prstGeom>
           <a:solidFill>
-            <a:srgbClr val="0B0F19"/>
+            <a:srgbClr val="FAF8F5"/>
           </a:solidFill>
           <a:ln>
             <a:noFill/>
@@ -8208,7 +8358,7 @@
         <p:spPr>
           <a:xfrm>
             <a:off x="731520" y="365760"/>
-            <a:ext cx="10698480" cy="365760"/>
+            <a:ext cx="10698480" cy="320040"/>
           </a:xfrm>
           <a:prstGeom prst="rect">
             <a:avLst/>
@@ -8224,7 +8374,7 @@
             <a:pPr>
               <a:defRPr sz="1000" b="1">
                 <a:solidFill>
-                  <a:srgbClr val="10B981"/>
+                  <a:srgbClr val="225E42"/>
                 </a:solidFill>
                 <a:latin typeface="Helvetica"/>
               </a:defRPr>
@@ -8260,9 +8410,9 @@
             <a:pPr>
               <a:defRPr sz="2400" b="1">
                 <a:solidFill>
-                  <a:srgbClr val="FFFFFF"/>
-                </a:solidFill>
-                <a:latin typeface="Helvetica"/>
+                  <a:srgbClr val="171717"/>
+                </a:solidFill>
+                <a:latin typeface="Georgia"/>
               </a:defRPr>
             </a:pPr>
             <a:r>
@@ -8271,9 +8421,9 @@
           </a:p>
           <a:p>
             <a:pPr>
-              <a:defRPr sz="1300">
-                <a:solidFill>
-                  <a:srgbClr val="94A3B8"/>
+              <a:defRPr sz="1200">
+                <a:solidFill>
+                  <a:srgbClr val="66625C"/>
                 </a:solidFill>
                 <a:latin typeface="Helvetica"/>
               </a:defRPr>
@@ -8299,11 +8449,11 @@
             <a:avLst/>
           </a:prstGeom>
           <a:solidFill>
-            <a:srgbClr val="131C2E"/>
+            <a:srgbClr val="FFFFFF"/>
           </a:solidFill>
           <a:ln w="12700">
             <a:solidFill>
-              <a:srgbClr val="1E293B"/>
+              <a:srgbClr val="E4E0D8"/>
             </a:solidFill>
           </a:ln>
         </p:spPr>
@@ -8326,10 +8476,11 @@
           <a:lstStyle/>
           <a:p>
             <a:pPr algn="ctr">
-              <a:defRPr sz="1200" b="1">
-                <a:solidFill>
-                  <a:srgbClr val="F59E0B"/>
-                </a:solidFill>
+              <a:defRPr sz="1100" b="1">
+                <a:solidFill>
+                  <a:srgbClr val="A65A24"/>
+                </a:solidFill>
+                <a:latin typeface="Helvetica"/>
               </a:defRPr>
             </a:pPr>
             <a:r>
@@ -8341,8 +8492,9 @@
             <a:pPr>
               <a:defRPr sz="1800" b="1">
                 <a:solidFill>
-                  <a:srgbClr val="FFFFFF"/>
-                </a:solidFill>
+                  <a:srgbClr val="171717"/>
+                </a:solidFill>
+                <a:latin typeface="Georgia"/>
               </a:defRPr>
             </a:pPr>
             <a:r>
@@ -8352,10 +8504,11 @@
           </a:p>
           <a:p>
             <a:pPr>
-              <a:defRPr sz="1200">
-                <a:solidFill>
-                  <a:srgbClr val="94A3B8"/>
-                </a:solidFill>
+              <a:defRPr sz="1150">
+                <a:solidFill>
+                  <a:srgbClr val="66625C"/>
+                </a:solidFill>
+                <a:latin typeface="Helvetica"/>
               </a:defRPr>
             </a:pPr>
             <a:r>
@@ -8367,8 +8520,9 @@
             <a:pPr>
               <a:defRPr sz="1100" b="1">
                 <a:solidFill>
-                  <a:srgbClr val="F59E0B"/>
-                </a:solidFill>
+                  <a:srgbClr val="A65A24"/>
+                </a:solidFill>
+                <a:latin typeface="Helvetica"/>
               </a:defRPr>
             </a:pPr>
             <a:r>
@@ -8392,11 +8546,11 @@
             <a:avLst/>
           </a:prstGeom>
           <a:solidFill>
-            <a:srgbClr val="131C2E"/>
+            <a:srgbClr val="FFFFFF"/>
           </a:solidFill>
           <a:ln w="12700">
             <a:solidFill>
-              <a:srgbClr val="10B981"/>
+              <a:srgbClr val="225E42"/>
             </a:solidFill>
           </a:ln>
         </p:spPr>
@@ -8419,10 +8573,11 @@
           <a:lstStyle/>
           <a:p>
             <a:pPr algn="ctr">
-              <a:defRPr sz="1200" b="1">
-                <a:solidFill>
-                  <a:srgbClr val="10B981"/>
-                </a:solidFill>
+              <a:defRPr sz="1100" b="1">
+                <a:solidFill>
+                  <a:srgbClr val="225E42"/>
+                </a:solidFill>
+                <a:latin typeface="Helvetica"/>
               </a:defRPr>
             </a:pPr>
             <a:r>
@@ -8434,8 +8589,9 @@
             <a:pPr>
               <a:defRPr sz="1800" b="1">
                 <a:solidFill>
-                  <a:srgbClr val="FFFFFF"/>
-                </a:solidFill>
+                  <a:srgbClr val="171717"/>
+                </a:solidFill>
+                <a:latin typeface="Georgia"/>
               </a:defRPr>
             </a:pPr>
             <a:r>
@@ -8445,10 +8601,11 @@
           </a:p>
           <a:p>
             <a:pPr>
-              <a:defRPr sz="1200">
-                <a:solidFill>
-                  <a:srgbClr val="94A3B8"/>
-                </a:solidFill>
+              <a:defRPr sz="1150">
+                <a:solidFill>
+                  <a:srgbClr val="66625C"/>
+                </a:solidFill>
+                <a:latin typeface="Helvetica"/>
               </a:defRPr>
             </a:pPr>
             <a:r>
@@ -8460,8 +8617,9 @@
             <a:pPr>
               <a:defRPr sz="1100" b="1">
                 <a:solidFill>
-                  <a:srgbClr val="10B981"/>
-                </a:solidFill>
+                  <a:srgbClr val="225E42"/>
+                </a:solidFill>
+                <a:latin typeface="Helvetica"/>
               </a:defRPr>
             </a:pPr>
             <a:r>
@@ -8485,11 +8643,11 @@
             <a:avLst/>
           </a:prstGeom>
           <a:solidFill>
-            <a:srgbClr val="131C2E"/>
+            <a:srgbClr val="F3F0EA"/>
           </a:solidFill>
           <a:ln w="12700">
             <a:solidFill>
-              <a:srgbClr val="1E293B"/>
+              <a:srgbClr val="E4E0D8"/>
             </a:solidFill>
           </a:ln>
         </p:spPr>
@@ -8512,10 +8670,11 @@
           <a:lstStyle/>
           <a:p>
             <a:pPr algn="ctr">
-              <a:defRPr sz="1200" b="1">
-                <a:solidFill>
-                  <a:srgbClr val="FFFFFF"/>
-                </a:solidFill>
+              <a:defRPr sz="1150" b="1">
+                <a:solidFill>
+                  <a:srgbClr val="171717"/>
+                </a:solidFill>
+                <a:latin typeface="Helvetica"/>
               </a:defRPr>
             </a:pPr>
             <a:r>
@@ -8557,7 +8716,7 @@
             <a:avLst/>
           </a:prstGeom>
           <a:solidFill>
-            <a:srgbClr val="0B0F19"/>
+            <a:srgbClr val="FAF8F5"/>
           </a:solidFill>
           <a:ln>
             <a:noFill/>
@@ -8594,7 +8753,7 @@
         <p:spPr>
           <a:xfrm>
             <a:off x="731520" y="365760"/>
-            <a:ext cx="10698480" cy="365760"/>
+            <a:ext cx="10698480" cy="320040"/>
           </a:xfrm>
           <a:prstGeom prst="rect">
             <a:avLst/>
@@ -8610,7 +8769,7 @@
             <a:pPr>
               <a:defRPr sz="1000" b="1">
                 <a:solidFill>
-                  <a:srgbClr val="10B981"/>
+                  <a:srgbClr val="225E42"/>
                 </a:solidFill>
                 <a:latin typeface="Helvetica"/>
               </a:defRPr>
@@ -8646,9 +8805,9 @@
             <a:pPr>
               <a:defRPr sz="2400" b="1">
                 <a:solidFill>
-                  <a:srgbClr val="FFFFFF"/>
-                </a:solidFill>
-                <a:latin typeface="Helvetica"/>
+                  <a:srgbClr val="171717"/>
+                </a:solidFill>
+                <a:latin typeface="Georgia"/>
               </a:defRPr>
             </a:pPr>
             <a:r>
@@ -8657,9 +8816,9 @@
           </a:p>
           <a:p>
             <a:pPr>
-              <a:defRPr sz="1300">
-                <a:solidFill>
-                  <a:srgbClr val="94A3B8"/>
+              <a:defRPr sz="1200">
+                <a:solidFill>
+                  <a:srgbClr val="66625C"/>
                 </a:solidFill>
                 <a:latin typeface="Helvetica"/>
               </a:defRPr>
@@ -8685,11 +8844,11 @@
             <a:avLst/>
           </a:prstGeom>
           <a:solidFill>
-            <a:srgbClr val="131C2E"/>
+            <a:srgbClr val="FFFFFF"/>
           </a:solidFill>
           <a:ln w="12700">
             <a:solidFill>
-              <a:srgbClr val="1E293B"/>
+              <a:srgbClr val="E4E0D8"/>
             </a:solidFill>
           </a:ln>
         </p:spPr>
@@ -8714,8 +8873,9 @@
             <a:pPr algn="ctr">
               <a:defRPr sz="2800" b="1">
                 <a:solidFill>
-                  <a:srgbClr val="10B981"/>
-                </a:solidFill>
+                  <a:srgbClr val="225E42"/>
+                </a:solidFill>
+                <a:latin typeface="Georgia"/>
               </a:defRPr>
             </a:pPr>
             <a:r>
@@ -8727,8 +8887,9 @@
             <a:pPr>
               <a:defRPr sz="1600" b="1">
                 <a:solidFill>
-                  <a:srgbClr val="FFFFFF"/>
-                </a:solidFill>
+                  <a:srgbClr val="171717"/>
+                </a:solidFill>
+                <a:latin typeface="Georgia"/>
               </a:defRPr>
             </a:pPr>
             <a:r>
@@ -8740,8 +8901,9 @@
             <a:pPr>
               <a:defRPr sz="1100">
                 <a:solidFill>
-                  <a:srgbClr val="94A3B8"/>
-                </a:solidFill>
+                  <a:srgbClr val="66625C"/>
+                </a:solidFill>
+                <a:latin typeface="Helvetica"/>
               </a:defRPr>
             </a:pPr>
             <a:r>
@@ -8753,8 +8915,9 @@
             <a:pPr>
               <a:defRPr sz="1100" b="1">
                 <a:solidFill>
-                  <a:srgbClr val="10B981"/>
-                </a:solidFill>
+                  <a:srgbClr val="225E42"/>
+                </a:solidFill>
+                <a:latin typeface="Helvetica"/>
               </a:defRPr>
             </a:pPr>
             <a:r>
@@ -8778,11 +8941,11 @@
             <a:avLst/>
           </a:prstGeom>
           <a:solidFill>
-            <a:srgbClr val="131C2E"/>
+            <a:srgbClr val="FFFFFF"/>
           </a:solidFill>
           <a:ln w="12700">
             <a:solidFill>
-              <a:srgbClr val="14B8A6"/>
+              <a:srgbClr val="225E42"/>
             </a:solidFill>
           </a:ln>
         </p:spPr>
@@ -8807,8 +8970,9 @@
             <a:pPr algn="ctr">
               <a:defRPr sz="2800" b="1">
                 <a:solidFill>
-                  <a:srgbClr val="14B8A6"/>
-                </a:solidFill>
+                  <a:srgbClr val="225E42"/>
+                </a:solidFill>
+                <a:latin typeface="Georgia"/>
               </a:defRPr>
             </a:pPr>
             <a:r>
@@ -8820,8 +8984,9 @@
             <a:pPr>
               <a:defRPr sz="1600" b="1">
                 <a:solidFill>
-                  <a:srgbClr val="FFFFFF"/>
-                </a:solidFill>
+                  <a:srgbClr val="171717"/>
+                </a:solidFill>
+                <a:latin typeface="Georgia"/>
               </a:defRPr>
             </a:pPr>
             <a:r>
@@ -8833,8 +8998,9 @@
             <a:pPr>
               <a:defRPr sz="1100">
                 <a:solidFill>
-                  <a:srgbClr val="94A3B8"/>
-                </a:solidFill>
+                  <a:srgbClr val="66625C"/>
+                </a:solidFill>
+                <a:latin typeface="Helvetica"/>
               </a:defRPr>
             </a:pPr>
             <a:r>
@@ -8846,8 +9012,9 @@
             <a:pPr>
               <a:defRPr sz="1100" b="1">
                 <a:solidFill>
-                  <a:srgbClr val="14B8A6"/>
-                </a:solidFill>
+                  <a:srgbClr val="225E42"/>
+                </a:solidFill>
+                <a:latin typeface="Helvetica"/>
               </a:defRPr>
             </a:pPr>
             <a:r>
@@ -8871,11 +9038,11 @@
             <a:avLst/>
           </a:prstGeom>
           <a:solidFill>
-            <a:srgbClr val="131C2E"/>
+            <a:srgbClr val="FFFFFF"/>
           </a:solidFill>
           <a:ln w="12700">
             <a:solidFill>
-              <a:srgbClr val="06B6D4"/>
+              <a:srgbClr val="A65A24"/>
             </a:solidFill>
           </a:ln>
         </p:spPr>
@@ -8900,8 +9067,9 @@
             <a:pPr algn="ctr">
               <a:defRPr sz="2800" b="1">
                 <a:solidFill>
-                  <a:srgbClr val="06B6D4"/>
-                </a:solidFill>
+                  <a:srgbClr val="A65A24"/>
+                </a:solidFill>
+                <a:latin typeface="Georgia"/>
               </a:defRPr>
             </a:pPr>
             <a:r>
@@ -8913,8 +9081,9 @@
             <a:pPr>
               <a:defRPr sz="1600" b="1">
                 <a:solidFill>
-                  <a:srgbClr val="FFFFFF"/>
-                </a:solidFill>
+                  <a:srgbClr val="171717"/>
+                </a:solidFill>
+                <a:latin typeface="Georgia"/>
               </a:defRPr>
             </a:pPr>
             <a:r>
@@ -8926,8 +9095,9 @@
             <a:pPr>
               <a:defRPr sz="1100">
                 <a:solidFill>
-                  <a:srgbClr val="94A3B8"/>
-                </a:solidFill>
+                  <a:srgbClr val="66625C"/>
+                </a:solidFill>
+                <a:latin typeface="Helvetica"/>
               </a:defRPr>
             </a:pPr>
             <a:r>
@@ -8939,8 +9109,9 @@
             <a:pPr>
               <a:defRPr sz="1100" b="1">
                 <a:solidFill>
-                  <a:srgbClr val="06B6D4"/>
-                </a:solidFill>
+                  <a:srgbClr val="A65A24"/>
+                </a:solidFill>
+                <a:latin typeface="Helvetica"/>
               </a:defRPr>
             </a:pPr>
             <a:r>
@@ -8964,11 +9135,11 @@
             <a:avLst/>
           </a:prstGeom>
           <a:solidFill>
-            <a:srgbClr val="131C2E"/>
+            <a:srgbClr val="F3F0EA"/>
           </a:solidFill>
           <a:ln w="12700">
             <a:solidFill>
-              <a:srgbClr val="1E293B"/>
+              <a:srgbClr val="E4E0D8"/>
             </a:solidFill>
           </a:ln>
         </p:spPr>
@@ -8993,8 +9164,9 @@
             <a:pPr algn="ctr">
               <a:defRPr sz="1100" b="1">
                 <a:solidFill>
-                  <a:srgbClr val="10B981"/>
-                </a:solidFill>
+                  <a:srgbClr val="171717"/>
+                </a:solidFill>
+                <a:latin typeface="Helvetica"/>
               </a:defRPr>
             </a:pPr>
             <a:r>
@@ -9036,7 +9208,7 @@
             <a:avLst/>
           </a:prstGeom>
           <a:solidFill>
-            <a:srgbClr val="0B0F19"/>
+            <a:srgbClr val="FAF8F5"/>
           </a:solidFill>
           <a:ln>
             <a:noFill/>
@@ -9073,7 +9245,7 @@
         <p:spPr>
           <a:xfrm>
             <a:off x="731520" y="365760"/>
-            <a:ext cx="10698480" cy="365760"/>
+            <a:ext cx="10698480" cy="320040"/>
           </a:xfrm>
           <a:prstGeom prst="rect">
             <a:avLst/>
@@ -9089,7 +9261,7 @@
             <a:pPr>
               <a:defRPr sz="1000" b="1">
                 <a:solidFill>
-                  <a:srgbClr val="10B981"/>
+                  <a:srgbClr val="225E42"/>
                 </a:solidFill>
                 <a:latin typeface="Helvetica"/>
               </a:defRPr>
@@ -9125,9 +9297,9 @@
             <a:pPr>
               <a:defRPr sz="2400" b="1">
                 <a:solidFill>
-                  <a:srgbClr val="FFFFFF"/>
-                </a:solidFill>
-                <a:latin typeface="Helvetica"/>
+                  <a:srgbClr val="171717"/>
+                </a:solidFill>
+                <a:latin typeface="Georgia"/>
               </a:defRPr>
             </a:pPr>
             <a:r>
@@ -9136,9 +9308,9 @@
           </a:p>
           <a:p>
             <a:pPr>
-              <a:defRPr sz="1300">
-                <a:solidFill>
-                  <a:srgbClr val="94A3B8"/>
+              <a:defRPr sz="1200">
+                <a:solidFill>
+                  <a:srgbClr val="66625C"/>
                 </a:solidFill>
                 <a:latin typeface="Helvetica"/>
               </a:defRPr>
@@ -9164,11 +9336,11 @@
             <a:avLst/>
           </a:prstGeom>
           <a:solidFill>
-            <a:srgbClr val="131C2E"/>
+            <a:srgbClr val="FFFFFF"/>
           </a:solidFill>
           <a:ln w="12700">
             <a:solidFill>
-              <a:srgbClr val="EF4444"/>
+              <a:srgbClr val="B91C1C"/>
             </a:solidFill>
           </a:ln>
         </p:spPr>
@@ -9193,8 +9365,9 @@
             <a:pPr algn="ctr">
               <a:defRPr sz="1300" b="1">
                 <a:solidFill>
-                  <a:srgbClr val="EF4444"/>
-                </a:solidFill>
+                  <a:srgbClr val="B91C1C"/>
+                </a:solidFill>
+                <a:latin typeface="Helvetica"/>
               </a:defRPr>
             </a:pPr>
             <a:r>
@@ -9206,8 +9379,9 @@
             <a:pPr>
               <a:defRPr sz="1200">
                 <a:solidFill>
-                  <a:srgbClr val="FFFFFF"/>
-                </a:solidFill>
+                  <a:srgbClr val="171717"/>
+                </a:solidFill>
+                <a:latin typeface="Helvetica"/>
               </a:defRPr>
             </a:pPr>
             <a:r>
@@ -9226,10 +9400,11 @@
           </a:p>
           <a:p>
             <a:pPr>
-              <a:defRPr sz="1600" b="1">
-                <a:solidFill>
-                  <a:srgbClr val="EF4444"/>
-                </a:solidFill>
+              <a:defRPr sz="1800" b="1">
+                <a:solidFill>
+                  <a:srgbClr val="B91C1C"/>
+                </a:solidFill>
+                <a:latin typeface="Georgia"/>
               </a:defRPr>
             </a:pPr>
             <a:r>
@@ -9242,8 +9417,9 @@
             <a:pPr>
               <a:defRPr sz="1100">
                 <a:solidFill>
-                  <a:srgbClr val="94A3B8"/>
-                </a:solidFill>
+                  <a:srgbClr val="66625C"/>
+                </a:solidFill>
+                <a:latin typeface="Helvetica"/>
               </a:defRPr>
             </a:pPr>
             <a:r>
@@ -9267,11 +9443,11 @@
             <a:avLst/>
           </a:prstGeom>
           <a:solidFill>
-            <a:srgbClr val="131C2E"/>
+            <a:srgbClr val="F1F7F3"/>
           </a:solidFill>
           <a:ln w="12700">
             <a:solidFill>
-              <a:srgbClr val="10B981"/>
+              <a:srgbClr val="225E42"/>
             </a:solidFill>
           </a:ln>
         </p:spPr>
@@ -9296,8 +9472,9 @@
             <a:pPr algn="ctr">
               <a:defRPr sz="1300" b="1">
                 <a:solidFill>
-                  <a:srgbClr val="10B981"/>
-                </a:solidFill>
+                  <a:srgbClr val="225E42"/>
+                </a:solidFill>
+                <a:latin typeface="Helvetica"/>
               </a:defRPr>
             </a:pPr>
             <a:r>
@@ -9309,8 +9486,9 @@
             <a:pPr>
               <a:defRPr sz="1200">
                 <a:solidFill>
-                  <a:srgbClr val="10B981"/>
-                </a:solidFill>
+                  <a:srgbClr val="225E42"/>
+                </a:solidFill>
+                <a:latin typeface="Helvetica"/>
               </a:defRPr>
             </a:pPr>
             <a:r>
@@ -9329,10 +9507,11 @@
           </a:p>
           <a:p>
             <a:pPr>
-              <a:defRPr sz="1600" b="1">
-                <a:solidFill>
-                  <a:srgbClr val="10B981"/>
-                </a:solidFill>
+              <a:defRPr sz="1800" b="1">
+                <a:solidFill>
+                  <a:srgbClr val="225E42"/>
+                </a:solidFill>
+                <a:latin typeface="Georgia"/>
               </a:defRPr>
             </a:pPr>
             <a:r>
@@ -9343,10 +9522,11 @@
           </a:p>
           <a:p>
             <a:pPr>
-              <a:defRPr sz="1100">
-                <a:solidFill>
-                  <a:srgbClr val="FFFFFF"/>
-                </a:solidFill>
+              <a:defRPr sz="1100" b="1">
+                <a:solidFill>
+                  <a:srgbClr val="171717"/>
+                </a:solidFill>
+                <a:latin typeface="Helvetica"/>
               </a:defRPr>
             </a:pPr>
             <a:r>
@@ -9388,7 +9568,7 @@
             <a:avLst/>
           </a:prstGeom>
           <a:solidFill>
-            <a:srgbClr val="0B0F19"/>
+            <a:srgbClr val="FAF8F5"/>
           </a:solidFill>
           <a:ln>
             <a:noFill/>
@@ -9425,7 +9605,7 @@
         <p:spPr>
           <a:xfrm>
             <a:off x="731520" y="365760"/>
-            <a:ext cx="10698480" cy="365760"/>
+            <a:ext cx="10698480" cy="320040"/>
           </a:xfrm>
           <a:prstGeom prst="rect">
             <a:avLst/>
@@ -9441,7 +9621,7 @@
             <a:pPr>
               <a:defRPr sz="1000" b="1">
                 <a:solidFill>
-                  <a:srgbClr val="10B981"/>
+                  <a:srgbClr val="225E42"/>
                 </a:solidFill>
                 <a:latin typeface="Helvetica"/>
               </a:defRPr>
@@ -9477,9 +9657,9 @@
             <a:pPr>
               <a:defRPr sz="2400" b="1">
                 <a:solidFill>
-                  <a:srgbClr val="FFFFFF"/>
-                </a:solidFill>
-                <a:latin typeface="Helvetica"/>
+                  <a:srgbClr val="171717"/>
+                </a:solidFill>
+                <a:latin typeface="Georgia"/>
               </a:defRPr>
             </a:pPr>
             <a:r>
@@ -9488,9 +9668,9 @@
           </a:p>
           <a:p>
             <a:pPr>
-              <a:defRPr sz="1300">
-                <a:solidFill>
-                  <a:srgbClr val="94A3B8"/>
+              <a:defRPr sz="1200">
+                <a:solidFill>
+                  <a:srgbClr val="66625C"/>
                 </a:solidFill>
                 <a:latin typeface="Helvetica"/>
               </a:defRPr>
@@ -9516,11 +9696,11 @@
             <a:avLst/>
           </a:prstGeom>
           <a:solidFill>
-            <a:srgbClr val="131C2E"/>
+            <a:srgbClr val="FFFFFF"/>
           </a:solidFill>
           <a:ln w="12700">
             <a:solidFill>
-              <a:srgbClr val="1E293B"/>
+              <a:srgbClr val="E4E0D8"/>
             </a:solidFill>
           </a:ln>
         </p:spPr>
@@ -9545,8 +9725,9 @@
             <a:pPr algn="ctr">
               <a:defRPr sz="1100" b="1">
                 <a:solidFill>
-                  <a:srgbClr val="FFFFFF"/>
-                </a:solidFill>
+                  <a:srgbClr val="171717"/>
+                </a:solidFill>
+                <a:latin typeface="Helvetica"/>
               </a:defRPr>
             </a:pPr>
             <a:r>
@@ -9558,8 +9739,9 @@
             <a:pPr>
               <a:defRPr sz="1400" b="1">
                 <a:solidFill>
-                  <a:srgbClr val="FFFFFF"/>
-                </a:solidFill>
+                  <a:srgbClr val="171717"/>
+                </a:solidFill>
+                <a:latin typeface="Georgia"/>
               </a:defRPr>
             </a:pPr>
             <a:r>
@@ -9572,8 +9754,9 @@
             <a:pPr>
               <a:defRPr sz="1050">
                 <a:solidFill>
-                  <a:srgbClr val="94A3B8"/>
-                </a:solidFill>
+                  <a:srgbClr val="66625C"/>
+                </a:solidFill>
+                <a:latin typeface="Helvetica"/>
               </a:defRPr>
             </a:pPr>
             <a:r>
@@ -9586,8 +9769,9 @@
             <a:pPr>
               <a:defRPr sz="1000" b="1">
                 <a:solidFill>
-                  <a:srgbClr val="FFFFFF"/>
-                </a:solidFill>
+                  <a:srgbClr val="171717"/>
+                </a:solidFill>
+                <a:latin typeface="Helvetica"/>
               </a:defRPr>
             </a:pPr>
             <a:r>
@@ -9611,11 +9795,11 @@
             <a:avLst/>
           </a:prstGeom>
           <a:solidFill>
-            <a:srgbClr val="131C2E"/>
+            <a:srgbClr val="FFFFFF"/>
           </a:solidFill>
           <a:ln w="12700">
             <a:solidFill>
-              <a:srgbClr val="14B8A6"/>
+              <a:srgbClr val="225E42"/>
             </a:solidFill>
           </a:ln>
         </p:spPr>
@@ -9640,8 +9824,9 @@
             <a:pPr algn="ctr">
               <a:defRPr sz="1100" b="1">
                 <a:solidFill>
-                  <a:srgbClr val="14B8A6"/>
-                </a:solidFill>
+                  <a:srgbClr val="225E42"/>
+                </a:solidFill>
+                <a:latin typeface="Helvetica"/>
               </a:defRPr>
             </a:pPr>
             <a:r>
@@ -9653,8 +9838,9 @@
             <a:pPr>
               <a:defRPr sz="1400" b="1">
                 <a:solidFill>
-                  <a:srgbClr val="FFFFFF"/>
-                </a:solidFill>
+                  <a:srgbClr val="171717"/>
+                </a:solidFill>
+                <a:latin typeface="Georgia"/>
               </a:defRPr>
             </a:pPr>
             <a:r>
@@ -9667,8 +9853,9 @@
             <a:pPr>
               <a:defRPr sz="1050">
                 <a:solidFill>
-                  <a:srgbClr val="94A3B8"/>
-                </a:solidFill>
+                  <a:srgbClr val="66625C"/>
+                </a:solidFill>
+                <a:latin typeface="Helvetica"/>
               </a:defRPr>
             </a:pPr>
             <a:r>
@@ -9681,8 +9868,9 @@
             <a:pPr>
               <a:defRPr sz="1000" b="1">
                 <a:solidFill>
-                  <a:srgbClr val="14B8A6"/>
-                </a:solidFill>
+                  <a:srgbClr val="225E42"/>
+                </a:solidFill>
+                <a:latin typeface="Helvetica"/>
               </a:defRPr>
             </a:pPr>
             <a:r>
@@ -9706,11 +9894,11 @@
             <a:avLst/>
           </a:prstGeom>
           <a:solidFill>
-            <a:srgbClr val="131C2E"/>
+            <a:srgbClr val="FFFFFF"/>
           </a:solidFill>
           <a:ln w="12700">
             <a:solidFill>
-              <a:srgbClr val="06B6D4"/>
+              <a:srgbClr val="A65A24"/>
             </a:solidFill>
           </a:ln>
         </p:spPr>
@@ -9735,8 +9923,9 @@
             <a:pPr algn="ctr">
               <a:defRPr sz="1100" b="1">
                 <a:solidFill>
-                  <a:srgbClr val="06B6D4"/>
-                </a:solidFill>
+                  <a:srgbClr val="A65A24"/>
+                </a:solidFill>
+                <a:latin typeface="Helvetica"/>
               </a:defRPr>
             </a:pPr>
             <a:r>
@@ -9748,8 +9937,9 @@
             <a:pPr>
               <a:defRPr sz="1400" b="1">
                 <a:solidFill>
-                  <a:srgbClr val="FFFFFF"/>
-                </a:solidFill>
+                  <a:srgbClr val="171717"/>
+                </a:solidFill>
+                <a:latin typeface="Georgia"/>
               </a:defRPr>
             </a:pPr>
             <a:r>
@@ -9762,8 +9952,9 @@
             <a:pPr>
               <a:defRPr sz="1050">
                 <a:solidFill>
-                  <a:srgbClr val="94A3B8"/>
-                </a:solidFill>
+                  <a:srgbClr val="66625C"/>
+                </a:solidFill>
+                <a:latin typeface="Helvetica"/>
               </a:defRPr>
             </a:pPr>
             <a:r>
@@ -9776,8 +9967,9 @@
             <a:pPr>
               <a:defRPr sz="1000" b="1">
                 <a:solidFill>
-                  <a:srgbClr val="06B6D4"/>
-                </a:solidFill>
+                  <a:srgbClr val="A65A24"/>
+                </a:solidFill>
+                <a:latin typeface="Helvetica"/>
               </a:defRPr>
             </a:pPr>
             <a:r>
@@ -9801,11 +9993,11 @@
             <a:avLst/>
           </a:prstGeom>
           <a:solidFill>
-            <a:srgbClr val="131C2E"/>
+            <a:srgbClr val="FFFFFF"/>
           </a:solidFill>
           <a:ln w="12700">
             <a:solidFill>
-              <a:srgbClr val="10B981"/>
+              <a:srgbClr val="225E42"/>
             </a:solidFill>
           </a:ln>
         </p:spPr>
@@ -9830,8 +10022,9 @@
             <a:pPr algn="ctr">
               <a:defRPr sz="1100" b="1">
                 <a:solidFill>
-                  <a:srgbClr val="10B981"/>
-                </a:solidFill>
+                  <a:srgbClr val="225E42"/>
+                </a:solidFill>
+                <a:latin typeface="Helvetica"/>
               </a:defRPr>
             </a:pPr>
             <a:r>
@@ -9843,8 +10036,9 @@
             <a:pPr>
               <a:defRPr sz="1400" b="1">
                 <a:solidFill>
-                  <a:srgbClr val="FFFFFF"/>
-                </a:solidFill>
+                  <a:srgbClr val="171717"/>
+                </a:solidFill>
+                <a:latin typeface="Georgia"/>
               </a:defRPr>
             </a:pPr>
             <a:r>
@@ -9857,8 +10051,9 @@
             <a:pPr>
               <a:defRPr sz="1050">
                 <a:solidFill>
-                  <a:srgbClr val="94A3B8"/>
-                </a:solidFill>
+                  <a:srgbClr val="66625C"/>
+                </a:solidFill>
+                <a:latin typeface="Helvetica"/>
               </a:defRPr>
             </a:pPr>
             <a:r>
@@ -9871,8 +10066,9 @@
             <a:pPr>
               <a:defRPr sz="1000" b="1">
                 <a:solidFill>
-                  <a:srgbClr val="10B981"/>
-                </a:solidFill>
+                  <a:srgbClr val="225E42"/>
+                </a:solidFill>
+                <a:latin typeface="Helvetica"/>
               </a:defRPr>
             </a:pPr>
             <a:r>
@@ -9896,11 +10092,11 @@
             <a:avLst/>
           </a:prstGeom>
           <a:solidFill>
-            <a:srgbClr val="131C2E"/>
+            <a:srgbClr val="F3F0EA"/>
           </a:solidFill>
           <a:ln w="12700">
             <a:solidFill>
-              <a:srgbClr val="1E293B"/>
+              <a:srgbClr val="E4E0D8"/>
             </a:solidFill>
           </a:ln>
         </p:spPr>
@@ -9925,8 +10121,9 @@
             <a:pPr algn="ctr">
               <a:defRPr sz="1100" b="1">
                 <a:solidFill>
-                  <a:srgbClr val="10B981"/>
-                </a:solidFill>
+                  <a:srgbClr val="225E42"/>
+                </a:solidFill>
+                <a:latin typeface="Helvetica"/>
               </a:defRPr>
             </a:pPr>
             <a:r>
@@ -9968,7 +10165,7 @@
             <a:avLst/>
           </a:prstGeom>
           <a:solidFill>
-            <a:srgbClr val="0B0F19"/>
+            <a:srgbClr val="FAF8F5"/>
           </a:solidFill>
           <a:ln>
             <a:noFill/>
@@ -10005,7 +10202,7 @@
         <p:spPr>
           <a:xfrm>
             <a:off x="731520" y="365760"/>
-            <a:ext cx="10698480" cy="365760"/>
+            <a:ext cx="10698480" cy="320040"/>
           </a:xfrm>
           <a:prstGeom prst="rect">
             <a:avLst/>
@@ -10021,7 +10218,7 @@
             <a:pPr>
               <a:defRPr sz="1000" b="1">
                 <a:solidFill>
-                  <a:srgbClr val="10B981"/>
+                  <a:srgbClr val="225E42"/>
                 </a:solidFill>
                 <a:latin typeface="Helvetica"/>
               </a:defRPr>
@@ -10057,9 +10254,9 @@
             <a:pPr>
               <a:defRPr sz="2400" b="1">
                 <a:solidFill>
-                  <a:srgbClr val="FFFFFF"/>
-                </a:solidFill>
-                <a:latin typeface="Helvetica"/>
+                  <a:srgbClr val="171717"/>
+                </a:solidFill>
+                <a:latin typeface="Georgia"/>
               </a:defRPr>
             </a:pPr>
             <a:r>
@@ -10068,9 +10265,9 @@
           </a:p>
           <a:p>
             <a:pPr>
-              <a:defRPr sz="1300">
-                <a:solidFill>
-                  <a:srgbClr val="94A3B8"/>
+              <a:defRPr sz="1200">
+                <a:solidFill>
+                  <a:srgbClr val="66625C"/>
                 </a:solidFill>
                 <a:latin typeface="Helvetica"/>
               </a:defRPr>
@@ -10096,11 +10293,11 @@
             <a:avLst/>
           </a:prstGeom>
           <a:solidFill>
-            <a:srgbClr val="131C2E"/>
+            <a:srgbClr val="FFFFFF"/>
           </a:solidFill>
           <a:ln w="12700">
             <a:solidFill>
-              <a:srgbClr val="1E293B"/>
+              <a:srgbClr val="E4E0D8"/>
             </a:solidFill>
           </a:ln>
         </p:spPr>
@@ -10123,10 +10320,11 @@
           <a:lstStyle/>
           <a:p>
             <a:pPr algn="ctr">
-              <a:defRPr sz="1200" b="1">
-                <a:solidFill>
-                  <a:srgbClr val="14B8A6"/>
-                </a:solidFill>
+              <a:defRPr sz="1100" b="1">
+                <a:solidFill>
+                  <a:srgbClr val="66625C"/>
+                </a:solidFill>
+                <a:latin typeface="Helvetica"/>
               </a:defRPr>
             </a:pPr>
             <a:r>
@@ -10138,8 +10336,9 @@
             <a:pPr>
               <a:defRPr sz="1800" b="1">
                 <a:solidFill>
-                  <a:srgbClr val="FFFFFF"/>
-                </a:solidFill>
+                  <a:srgbClr val="171717"/>
+                </a:solidFill>
+                <a:latin typeface="Georgia"/>
               </a:defRPr>
             </a:pPr>
             <a:r>
@@ -10149,10 +10348,11 @@
           </a:p>
           <a:p>
             <a:pPr>
-              <a:defRPr sz="1200">
-                <a:solidFill>
-                  <a:srgbClr val="94A3B8"/>
-                </a:solidFill>
+              <a:defRPr sz="1150">
+                <a:solidFill>
+                  <a:srgbClr val="66625C"/>
+                </a:solidFill>
+                <a:latin typeface="Helvetica"/>
               </a:defRPr>
             </a:pPr>
             <a:r>
@@ -10163,10 +10363,11 @@
           </a:p>
           <a:p>
             <a:pPr>
-              <a:defRPr sz="1200" b="1">
-                <a:solidFill>
-                  <a:srgbClr val="FFFFFF"/>
-                </a:solidFill>
+              <a:defRPr sz="1150" b="1">
+                <a:solidFill>
+                  <a:srgbClr val="171717"/>
+                </a:solidFill>
+                <a:latin typeface="Helvetica"/>
               </a:defRPr>
             </a:pPr>
             <a:r>
@@ -10190,11 +10391,11 @@
             <a:avLst/>
           </a:prstGeom>
           <a:solidFill>
-            <a:srgbClr val="131C2E"/>
+            <a:srgbClr val="FFFFFF"/>
           </a:solidFill>
           <a:ln w="12700">
             <a:solidFill>
-              <a:srgbClr val="10B981"/>
+              <a:srgbClr val="225E42"/>
             </a:solidFill>
           </a:ln>
         </p:spPr>
@@ -10217,10 +10418,11 @@
           <a:lstStyle/>
           <a:p>
             <a:pPr algn="ctr">
-              <a:defRPr sz="1200" b="1">
-                <a:solidFill>
-                  <a:srgbClr val="10B981"/>
-                </a:solidFill>
+              <a:defRPr sz="1100" b="1">
+                <a:solidFill>
+                  <a:srgbClr val="225E42"/>
+                </a:solidFill>
+                <a:latin typeface="Helvetica"/>
               </a:defRPr>
             </a:pPr>
             <a:r>
@@ -10232,8 +10434,9 @@
             <a:pPr>
               <a:defRPr sz="1800" b="1">
                 <a:solidFill>
-                  <a:srgbClr val="FFFFFF"/>
-                </a:solidFill>
+                  <a:srgbClr val="171717"/>
+                </a:solidFill>
+                <a:latin typeface="Georgia"/>
               </a:defRPr>
             </a:pPr>
             <a:r>
@@ -10243,14 +10446,15 @@
           </a:p>
           <a:p>
             <a:pPr>
-              <a:defRPr sz="1200">
-                <a:solidFill>
-                  <a:srgbClr val="94A3B8"/>
-                </a:solidFill>
-              </a:defRPr>
-            </a:pPr>
-            <a:r>
-              <a:t>Enterprise buyers (e.g. Skanska, Peab) currently earn ~2.5% in commercial bank deposits. By funding early payouts to their own verified suppliers, the Anchor earns a 1% discount on 15-day turnover:</a:t>
+              <a:defRPr sz="1150">
+                <a:solidFill>
+                  <a:srgbClr val="66625C"/>
+                </a:solidFill>
+                <a:latin typeface="Helvetica"/>
+              </a:defRPr>
+            </a:pPr>
+            <a:r>
+              <a:t>Enterprise buyers (e.g. Skanska, Peab, funded startups) currently earn ~2.5% in commercial bank deposits. By funding early payouts to their own verified suppliers, the Anchor earns a 1% discount on 15-day turnover:</a:t>
             </a:r>
             <a:br/>
             <a:br/>
@@ -10259,8 +10463,9 @@
             <a:pPr>
               <a:defRPr sz="1400" b="1">
                 <a:solidFill>
-                  <a:srgbClr val="10B981"/>
-                </a:solidFill>
+                  <a:srgbClr val="225E42"/>
+                </a:solidFill>
+                <a:latin typeface="Georgia"/>
               </a:defRPr>
             </a:pPr>
             <a:r>
@@ -10284,11 +10489,11 @@
             <a:avLst/>
           </a:prstGeom>
           <a:solidFill>
-            <a:srgbClr val="131C2E"/>
+            <a:srgbClr val="F3F0EA"/>
           </a:solidFill>
           <a:ln w="12700">
             <a:solidFill>
-              <a:srgbClr val="1E293B"/>
+              <a:srgbClr val="E4E0D8"/>
             </a:solidFill>
           </a:ln>
         </p:spPr>
@@ -10313,8 +10518,9 @@
             <a:pPr algn="ctr">
               <a:defRPr sz="1100" b="1">
                 <a:solidFill>
-                  <a:srgbClr val="10B981"/>
-                </a:solidFill>
+                  <a:srgbClr val="171717"/>
+                </a:solidFill>
+                <a:latin typeface="Helvetica"/>
               </a:defRPr>
             </a:pPr>
             <a:r>
@@ -10356,7 +10562,7 @@
             <a:avLst/>
           </a:prstGeom>
           <a:solidFill>
-            <a:srgbClr val="0B0F19"/>
+            <a:srgbClr val="FAF8F5"/>
           </a:solidFill>
           <a:ln>
             <a:noFill/>
@@ -10393,7 +10599,7 @@
         <p:spPr>
           <a:xfrm>
             <a:off x="731520" y="365760"/>
-            <a:ext cx="10698480" cy="365760"/>
+            <a:ext cx="10698480" cy="320040"/>
           </a:xfrm>
           <a:prstGeom prst="rect">
             <a:avLst/>
@@ -10409,7 +10615,7 @@
             <a:pPr>
               <a:defRPr sz="1000" b="1">
                 <a:solidFill>
-                  <a:srgbClr val="10B981"/>
+                  <a:srgbClr val="225E42"/>
                 </a:solidFill>
                 <a:latin typeface="Helvetica"/>
               </a:defRPr>
@@ -10445,9 +10651,9 @@
             <a:pPr>
               <a:defRPr sz="2400" b="1">
                 <a:solidFill>
-                  <a:srgbClr val="FFFFFF"/>
-                </a:solidFill>
-                <a:latin typeface="Helvetica"/>
+                  <a:srgbClr val="171717"/>
+                </a:solidFill>
+                <a:latin typeface="Georgia"/>
               </a:defRPr>
             </a:pPr>
             <a:r>
@@ -10456,9 +10662,9 @@
           </a:p>
           <a:p>
             <a:pPr>
-              <a:defRPr sz="1300">
-                <a:solidFill>
-                  <a:srgbClr val="94A3B8"/>
+              <a:defRPr sz="1200">
+                <a:solidFill>
+                  <a:srgbClr val="66625C"/>
                 </a:solidFill>
                 <a:latin typeface="Helvetica"/>
               </a:defRPr>
@@ -10484,11 +10690,11 @@
             <a:avLst/>
           </a:prstGeom>
           <a:solidFill>
-            <a:srgbClr val="131C2E"/>
+            <a:srgbClr val="FFFFFF"/>
           </a:solidFill>
           <a:ln w="12700">
             <a:solidFill>
-              <a:srgbClr val="1E293B"/>
+              <a:srgbClr val="E4E0D8"/>
             </a:solidFill>
           </a:ln>
         </p:spPr>
@@ -10513,8 +10719,9 @@
             <a:pPr algn="ctr">
               <a:defRPr sz="1300" b="1">
                 <a:solidFill>
-                  <a:srgbClr val="94A3B8"/>
-                </a:solidFill>
+                  <a:srgbClr val="171717"/>
+                </a:solidFill>
+                <a:latin typeface="Helvetica"/>
               </a:defRPr>
             </a:pPr>
             <a:r>
@@ -10526,8 +10733,9 @@
             <a:pPr>
               <a:defRPr sz="1100">
                 <a:solidFill>
-                  <a:srgbClr val="FFFFFF"/>
-                </a:solidFill>
+                  <a:srgbClr val="171717"/>
+                </a:solidFill>
+                <a:latin typeface="Helvetica"/>
               </a:defRPr>
             </a:pPr>
             <a:r>
@@ -10551,11 +10759,11 @@
             <a:avLst/>
           </a:prstGeom>
           <a:solidFill>
-            <a:srgbClr val="131C2E"/>
+            <a:srgbClr val="FFFFFF"/>
           </a:solidFill>
           <a:ln w="12700">
             <a:solidFill>
-              <a:srgbClr val="10B981"/>
+              <a:srgbClr val="225E42"/>
             </a:solidFill>
           </a:ln>
         </p:spPr>
@@ -10580,8 +10788,9 @@
             <a:pPr algn="ctr">
               <a:defRPr sz="1300" b="1">
                 <a:solidFill>
-                  <a:srgbClr val="10B981"/>
-                </a:solidFill>
+                  <a:srgbClr val="225E42"/>
+                </a:solidFill>
+                <a:latin typeface="Helvetica"/>
               </a:defRPr>
             </a:pPr>
             <a:r>
@@ -10593,8 +10802,9 @@
             <a:pPr>
               <a:defRPr sz="1100">
                 <a:solidFill>
-                  <a:srgbClr val="FFFFFF"/>
-                </a:solidFill>
+                  <a:srgbClr val="171717"/>
+                </a:solidFill>
+                <a:latin typeface="Helvetica"/>
               </a:defRPr>
             </a:pPr>
             <a:r>
@@ -10618,11 +10828,11 @@
             <a:avLst/>
           </a:prstGeom>
           <a:solidFill>
-            <a:srgbClr val="131C2E"/>
+            <a:srgbClr val="FFFFFF"/>
           </a:solidFill>
           <a:ln w="12700">
             <a:solidFill>
-              <a:srgbClr val="14B8A6"/>
+              <a:srgbClr val="A65A24"/>
             </a:solidFill>
           </a:ln>
         </p:spPr>
@@ -10647,8 +10857,9 @@
             <a:pPr algn="ctr">
               <a:defRPr sz="1300" b="1">
                 <a:solidFill>
-                  <a:srgbClr val="14B8A6"/>
-                </a:solidFill>
+                  <a:srgbClr val="A65A24"/>
+                </a:solidFill>
+                <a:latin typeface="Helvetica"/>
               </a:defRPr>
             </a:pPr>
             <a:r>
@@ -10660,8 +10871,9 @@
             <a:pPr>
               <a:defRPr sz="1100">
                 <a:solidFill>
-                  <a:srgbClr val="FFFFFF"/>
-                </a:solidFill>
+                  <a:srgbClr val="171717"/>
+                </a:solidFill>
+                <a:latin typeface="Helvetica"/>
               </a:defRPr>
             </a:pPr>
             <a:r>
@@ -10685,11 +10897,11 @@
             <a:avLst/>
           </a:prstGeom>
           <a:solidFill>
-            <a:srgbClr val="131C2E"/>
+            <a:srgbClr val="FFFFFF"/>
           </a:solidFill>
           <a:ln w="12700">
             <a:solidFill>
-              <a:srgbClr val="06B6D4"/>
+              <a:srgbClr val="E4E0D8"/>
             </a:solidFill>
           </a:ln>
         </p:spPr>
@@ -10714,8 +10926,9 @@
             <a:pPr algn="ctr">
               <a:defRPr sz="1300" b="1">
                 <a:solidFill>
-                  <a:srgbClr val="06B6D4"/>
-                </a:solidFill>
+                  <a:srgbClr val="66625C"/>
+                </a:solidFill>
+                <a:latin typeface="Helvetica"/>
               </a:defRPr>
             </a:pPr>
             <a:r>
@@ -10727,8 +10940,9 @@
             <a:pPr>
               <a:defRPr sz="1100">
                 <a:solidFill>
-                  <a:srgbClr val="FFFFFF"/>
-                </a:solidFill>
+                  <a:srgbClr val="171717"/>
+                </a:solidFill>
+                <a:latin typeface="Helvetica"/>
               </a:defRPr>
             </a:pPr>
             <a:r>

--- a/public/docs/accounted_network_pitch_deck.pptx
+++ b/public/docs/accounted_network_pitch_deck.pptx
@@ -21,6 +21,8 @@
     <p:sldId id="269" r:id="rId20"/>
     <p:sldId id="270" r:id="rId21"/>
     <p:sldId id="271" r:id="rId22"/>
+    <p:sldId id="272" r:id="rId23"/>
+    <p:sldId id="273" r:id="rId24"/>
   </p:sldIdLst>
   <p:sldSz cx="12191695" cy="6858000" type="screen4x3"/>
   <p:notesSz cx="6858000" cy="9144000"/>
@@ -3196,7 +3198,7 @@
               </a:defRPr>
             </a:pPr>
             <a:r>
-              <a:t>accounted. — B2B SETTLEMENT NETWORK</a:t>
+              <a:t>accounted. — B2B SETTLEMENT PROTOCOL</a:t>
             </a:r>
           </a:p>
         </p:txBody>
@@ -3245,7 +3247,7 @@
               </a:defRPr>
             </a:pPr>
             <a:r>
-              <a:t>Decoupling enterprise trade from 60-day debt gridlock through decentralized ERP clearing,</a:t>
+              <a:t>Decoupling enterprise commerce from 60-day debt gridlock through decentralized ERP clearing,</a:t>
             </a:r>
             <a:br/>
             <a:r>
@@ -3292,7 +3294,7 @@
           </a:fontRef>
         </p:style>
         <p:txBody>
-          <a:bodyPr rtlCol="0" anchor="ctr" lIns="228600" rIns="228600" tIns="228600" bIns="228600"/>
+          <a:bodyPr rtlCol="0" anchor="ctr" lIns="228600" rIns="228600" tIns="228600"/>
           <a:lstStyle/>
           <a:p>
             <a:pPr algn="ctr">
@@ -3300,7 +3302,6 @@
                 <a:solidFill>
                   <a:srgbClr val="66625C"/>
                 </a:solidFill>
-                <a:latin typeface="Helvetica"/>
               </a:defRPr>
             </a:pPr>
             <a:r>
@@ -3328,7 +3329,6 @@
                 <a:solidFill>
                   <a:srgbClr val="66625C"/>
                 </a:solidFill>
-                <a:latin typeface="Helvetica"/>
               </a:defRPr>
             </a:pPr>
             <a:r>
@@ -3375,7 +3375,7 @@
           </a:fontRef>
         </p:style>
         <p:txBody>
-          <a:bodyPr rtlCol="0" anchor="ctr" lIns="228600" rIns="228600" tIns="228600" bIns="228600"/>
+          <a:bodyPr rtlCol="0" anchor="ctr" lIns="228600" rIns="228600" tIns="228600"/>
           <a:lstStyle/>
           <a:p>
             <a:pPr algn="ctr">
@@ -3383,7 +3383,6 @@
                 <a:solidFill>
                   <a:srgbClr val="225E42"/>
                 </a:solidFill>
-                <a:latin typeface="Helvetica"/>
               </a:defRPr>
             </a:pPr>
             <a:r>
@@ -3411,7 +3410,6 @@
                 <a:solidFill>
                   <a:srgbClr val="66625C"/>
                 </a:solidFill>
-                <a:latin typeface="Helvetica"/>
               </a:defRPr>
             </a:pPr>
             <a:r>
@@ -3458,7 +3456,7 @@
           </a:fontRef>
         </p:style>
         <p:txBody>
-          <a:bodyPr rtlCol="0" anchor="ctr" lIns="228600" rIns="228600" tIns="228600" bIns="228600"/>
+          <a:bodyPr rtlCol="0" anchor="ctr" lIns="228600" rIns="228600" tIns="228600"/>
           <a:lstStyle/>
           <a:p>
             <a:pPr algn="ctr">
@@ -3466,7 +3464,6 @@
                 <a:solidFill>
                   <a:srgbClr val="A65A24"/>
                 </a:solidFill>
-                <a:latin typeface="Helvetica"/>
               </a:defRPr>
             </a:pPr>
             <a:r>
@@ -3494,7 +3491,6 @@
                 <a:solidFill>
                   <a:srgbClr val="66625C"/>
                 </a:solidFill>
-                <a:latin typeface="Helvetica"/>
               </a:defRPr>
             </a:pPr>
             <a:r>
@@ -3595,7 +3591,7 @@
               </a:defRPr>
             </a:pPr>
             <a:r>
-              <a:t>UNDERWRITING // STRUCTURAL MOAT</a:t>
+              <a:t>MECHANISM 04 // CAPITAL ARCHITECTURE</a:t>
             </a:r>
           </a:p>
         </p:txBody>
@@ -3608,7 +3604,7 @@
         </p:nvSpPr>
         <p:spPr>
           <a:xfrm>
-            <a:off x="731520" y="685800"/>
+            <a:off x="731520" y="658368"/>
             <a:ext cx="10698480" cy="640080"/>
           </a:xfrm>
           <a:prstGeom prst="rect">
@@ -3623,7 +3619,7 @@
           <a:lstStyle/>
           <a:p>
             <a:pPr>
-              <a:defRPr sz="2400" b="1">
+              <a:defRPr sz="2300" b="1">
                 <a:solidFill>
                   <a:srgbClr val="171717"/>
                 </a:solidFill>
@@ -3631,12 +3627,12 @@
               </a:defRPr>
             </a:pPr>
             <a:r>
-              <a:t>Why Our Default Loss Rate Approaches Zero</a:t>
-            </a:r>
-          </a:p>
-          <a:p>
-            <a:pPr>
-              <a:defRPr sz="1200">
+              <a:t>The 4-Layer Liquidity Waterfall</a:t>
+            </a:r>
+          </a:p>
+          <a:p>
+            <a:pPr>
+              <a:defRPr sz="1150">
                 <a:solidFill>
                   <a:srgbClr val="66625C"/>
                 </a:solidFill>
@@ -3644,7 +3640,7 @@
               </a:defRPr>
             </a:pPr>
             <a:r>
-              <a:t>How we offer 1.0% fees profitably while banks struggle to break even at 4.0%</a:t>
+              <a:t>Guaranteed 10-second cashouts with an ultra-low blended cost of capital</a:t>
             </a:r>
           </a:p>
         </p:txBody>
@@ -3658,7 +3654,7 @@
         <p:spPr>
           <a:xfrm>
             <a:off x="731520" y="1645920"/>
-            <a:ext cx="5120640" cy="1828800"/>
+            <a:ext cx="10607040" cy="1005840"/>
           </a:xfrm>
           <a:prstGeom prst="roundRect">
             <a:avLst/>
@@ -3687,33 +3683,31 @@
           </a:fontRef>
         </p:style>
         <p:txBody>
-          <a:bodyPr rtlCol="0" anchor="ctr" lIns="182880" rIns="182880" tIns="182880"/>
+          <a:bodyPr rtlCol="0" anchor="ctr" lIns="274320" tIns="182880"/>
           <a:lstStyle/>
           <a:p>
             <a:pPr algn="ctr">
-              <a:defRPr sz="1200" b="1">
-                <a:solidFill>
-                  <a:srgbClr val="225E42"/>
-                </a:solidFill>
-                <a:latin typeface="Helvetica"/>
-              </a:defRPr>
-            </a:pPr>
-            <a:r>
-              <a:t>01  Zero-Fraud Ledger Attestation</a:t>
-            </a:r>
-            <a:br/>
-          </a:p>
-          <a:p>
-            <a:pPr>
-              <a:defRPr sz="1050">
-                <a:solidFill>
-                  <a:srgbClr val="66625C"/>
-                </a:solidFill>
-                <a:latin typeface="Helvetica"/>
-              </a:defRPr>
-            </a:pPr>
-            <a:r>
-              <a:t>Invoices are only eligible for cash advances after the debtor has entered, matched, and approved them in their accounts payable ledger (supplierStatus === 'approved'). Fake invoices and invoice disputes are structurally impossible.</a:t>
+              <a:defRPr sz="1300" b="1">
+                <a:solidFill>
+                  <a:srgbClr val="171717"/>
+                </a:solidFill>
+              </a:defRPr>
+            </a:pPr>
+            <a:r>
+              <a:t>Layer 1: Multilateral Netting   |   Cost: 0.0% Capital Cost</a:t>
+            </a:r>
+            <a:br/>
+          </a:p>
+          <a:p>
+            <a:pPr>
+              <a:defRPr sz="1100">
+                <a:solidFill>
+                  <a:srgbClr val="171717"/>
+                </a:solidFill>
+              </a:defRPr>
+            </a:pPr>
+            <a:r>
+              <a:t>Extinguishes 40%–70% of gross liabilities mathematically with zero cash.  ($0 Cash Movement)</a:t>
             </a:r>
           </a:p>
         </p:txBody>
@@ -3726,8 +3720,142 @@
         </p:nvSpPr>
         <p:spPr>
           <a:xfrm>
-            <a:off x="6217920" y="1645920"/>
-            <a:ext cx="5120640" cy="1828800"/>
+            <a:off x="731520" y="2788920"/>
+            <a:ext cx="10607040" cy="1005840"/>
+          </a:xfrm>
+          <a:prstGeom prst="roundRect">
+            <a:avLst/>
+          </a:prstGeom>
+          <a:solidFill>
+            <a:srgbClr val="FFFFFF"/>
+          </a:solidFill>
+          <a:ln w="12700">
+            <a:solidFill>
+              <a:srgbClr val="225E42"/>
+            </a:solidFill>
+          </a:ln>
+        </p:spPr>
+        <p:style>
+          <a:lnRef idx="1">
+            <a:schemeClr val="accent1"/>
+          </a:lnRef>
+          <a:fillRef idx="3">
+            <a:schemeClr val="accent1"/>
+          </a:fillRef>
+          <a:effectRef idx="2">
+            <a:schemeClr val="accent1"/>
+          </a:effectRef>
+          <a:fontRef idx="minor">
+            <a:schemeClr val="lt1"/>
+          </a:fontRef>
+        </p:style>
+        <p:txBody>
+          <a:bodyPr rtlCol="0" anchor="ctr" lIns="274320" tIns="182880"/>
+          <a:lstStyle/>
+          <a:p>
+            <a:pPr algn="ctr">
+              <a:defRPr sz="1300" b="1">
+                <a:solidFill>
+                  <a:srgbClr val="225E42"/>
+                </a:solidFill>
+              </a:defRPr>
+            </a:pPr>
+            <a:r>
+              <a:t>Layer 2: Anchor Treasury Self-Funding   |   Cost: 0.0% Cost to Accounted</a:t>
+            </a:r>
+            <a:br/>
+          </a:p>
+          <a:p>
+            <a:pPr>
+              <a:defRPr sz="1100">
+                <a:solidFill>
+                  <a:srgbClr val="171717"/>
+                </a:solidFill>
+              </a:defRPr>
+            </a:pPr>
+            <a:r>
+              <a:t>Anchor buyer funds own verified suppliers for 8% APY treasury yield.  (Anchor Earns Fee)</a:t>
+            </a:r>
+          </a:p>
+        </p:txBody>
+      </p:sp>
+      <p:sp>
+        <p:nvSpPr>
+          <p:cNvPr id="7" name="Rounded Rectangle 6"/>
+          <p:cNvSpPr/>
+          <p:nvPr/>
+        </p:nvSpPr>
+        <p:spPr>
+          <a:xfrm>
+            <a:off x="731520" y="3931920"/>
+            <a:ext cx="10607040" cy="1005840"/>
+          </a:xfrm>
+          <a:prstGeom prst="roundRect">
+            <a:avLst/>
+          </a:prstGeom>
+          <a:solidFill>
+            <a:srgbClr val="FFFFFF"/>
+          </a:solidFill>
+          <a:ln w="12700">
+            <a:solidFill>
+              <a:srgbClr val="A65A24"/>
+            </a:solidFill>
+          </a:ln>
+        </p:spPr>
+        <p:style>
+          <a:lnRef idx="1">
+            <a:schemeClr val="accent1"/>
+          </a:lnRef>
+          <a:fillRef idx="3">
+            <a:schemeClr val="accent1"/>
+          </a:fillRef>
+          <a:effectRef idx="2">
+            <a:schemeClr val="accent1"/>
+          </a:effectRef>
+          <a:fontRef idx="minor">
+            <a:schemeClr val="lt1"/>
+          </a:fontRef>
+        </p:style>
+        <p:txBody>
+          <a:bodyPr rtlCol="0" anchor="ctr" lIns="274320" tIns="182880"/>
+          <a:lstStyle/>
+          <a:p>
+            <a:pPr algn="ctr">
+              <a:defRPr sz="1300" b="1">
+                <a:solidFill>
+                  <a:srgbClr val="A65A24"/>
+                </a:solidFill>
+              </a:defRPr>
+            </a:pPr>
+            <a:r>
+              <a:t>Layer 3: Network Pre-Payer Pool   |   Cost: ~1.5% Rebate Cost</a:t>
+            </a:r>
+            <a:br/>
+          </a:p>
+          <a:p>
+            <a:pPr>
+              <a:defRPr sz="1100">
+                <a:solidFill>
+                  <a:srgbClr val="171717"/>
+                </a:solidFill>
+              </a:defRPr>
+            </a:pPr>
+            <a:r>
+              <a:t>Net debtors receive fee rebates for settling 10 days early, funding outgoing advances.  (Funded by Float)</a:t>
+            </a:r>
+          </a:p>
+        </p:txBody>
+      </p:sp>
+      <p:sp>
+        <p:nvSpPr>
+          <p:cNvPr id="8" name="Rounded Rectangle 7"/>
+          <p:cNvSpPr/>
+          <p:nvPr/>
+        </p:nvSpPr>
+        <p:spPr>
+          <a:xfrm>
+            <a:off x="731520" y="5074920"/>
+            <a:ext cx="10607040" cy="1005840"/>
           </a:xfrm>
           <a:prstGeom prst="roundRect">
             <a:avLst/>
@@ -3756,226 +3884,31 @@
           </a:fontRef>
         </p:style>
         <p:txBody>
-          <a:bodyPr rtlCol="0" anchor="ctr" lIns="182880" rIns="182880" tIns="182880"/>
+          <a:bodyPr rtlCol="0" anchor="ctr" lIns="274320" tIns="182880"/>
           <a:lstStyle/>
           <a:p>
             <a:pPr algn="ctr">
-              <a:defRPr sz="1200" b="1">
-                <a:solidFill>
-                  <a:srgbClr val="225E42"/>
-                </a:solidFill>
-                <a:latin typeface="Helvetica"/>
-              </a:defRPr>
-            </a:pPr>
-            <a:r>
-              <a:t>02  Real-Time First-Party GL Telemetry</a:t>
-            </a:r>
-            <a:br/>
-          </a:p>
-          <a:p>
-            <a:pPr>
-              <a:defRPr sz="1050">
+              <a:defRPr sz="1300" b="1">
                 <a:solidFill>
                   <a:srgbClr val="66625C"/>
                 </a:solidFill>
-                <a:latin typeface="Helvetica"/>
-              </a:defRPr>
-            </a:pPr>
-            <a:r>
-              <a:t>Continuous read-access to live bank balances (PSD2 open banking), customer receivables aging (1510), and equity ratios (2080). Risk is assessed every 60 seconds, not once a year via outdated filed reports.</a:t>
-            </a:r>
-          </a:p>
-        </p:txBody>
-      </p:sp>
-      <p:sp>
-        <p:nvSpPr>
-          <p:cNvPr id="7" name="Rounded Rectangle 6"/>
-          <p:cNvSpPr/>
-          <p:nvPr/>
-        </p:nvSpPr>
-        <p:spPr>
-          <a:xfrm>
-            <a:off x="731520" y="3657600"/>
-            <a:ext cx="5120640" cy="1828800"/>
-          </a:xfrm>
-          <a:prstGeom prst="roundRect">
-            <a:avLst/>
-          </a:prstGeom>
-          <a:solidFill>
-            <a:srgbClr val="FFFFFF"/>
-          </a:solidFill>
-          <a:ln w="12700">
-            <a:solidFill>
-              <a:srgbClr val="E4E0D8"/>
-            </a:solidFill>
-          </a:ln>
-        </p:spPr>
-        <p:style>
-          <a:lnRef idx="1">
-            <a:schemeClr val="accent1"/>
-          </a:lnRef>
-          <a:fillRef idx="3">
-            <a:schemeClr val="accent1"/>
-          </a:fillRef>
-          <a:effectRef idx="2">
-            <a:schemeClr val="accent1"/>
-          </a:effectRef>
-          <a:fontRef idx="minor">
-            <a:schemeClr val="lt1"/>
-          </a:fontRef>
-        </p:style>
-        <p:txBody>
-          <a:bodyPr rtlCol="0" anchor="ctr" lIns="182880" rIns="182880" tIns="182880"/>
-          <a:lstStyle/>
-          <a:p>
-            <a:pPr algn="ctr">
-              <a:defRPr sz="1200" b="1">
-                <a:solidFill>
-                  <a:srgbClr val="225E42"/>
-                </a:solidFill>
-                <a:latin typeface="Helvetica"/>
-              </a:defRPr>
-            </a:pPr>
-            <a:r>
-              <a:t>03  Self-Collateralizing Trade Graph</a:t>
-            </a:r>
-            <a:br/>
-          </a:p>
-          <a:p>
-            <a:pPr>
-              <a:defRPr sz="1050">
-                <a:solidFill>
-                  <a:srgbClr val="66625C"/>
-                </a:solidFill>
-                <a:latin typeface="Helvetica"/>
-              </a:defRPr>
-            </a:pPr>
-            <a:r>
-              <a:t>In a two-way trading network, if a borrower delays repayment, subsequent incoming receivables from any network peer are automatically intercepted and offset before funds leave the system.</a:t>
-            </a:r>
-          </a:p>
-        </p:txBody>
-      </p:sp>
-      <p:sp>
-        <p:nvSpPr>
-          <p:cNvPr id="8" name="Rounded Rectangle 7"/>
-          <p:cNvSpPr/>
-          <p:nvPr/>
-        </p:nvSpPr>
-        <p:spPr>
-          <a:xfrm>
-            <a:off x="6217920" y="3657600"/>
-            <a:ext cx="5120640" cy="1828800"/>
-          </a:xfrm>
-          <a:prstGeom prst="roundRect">
-            <a:avLst/>
-          </a:prstGeom>
-          <a:solidFill>
-            <a:srgbClr val="FFFFFF"/>
-          </a:solidFill>
-          <a:ln w="12700">
-            <a:solidFill>
-              <a:srgbClr val="E4E0D8"/>
-            </a:solidFill>
-          </a:ln>
-        </p:spPr>
-        <p:style>
-          <a:lnRef idx="1">
-            <a:schemeClr val="accent1"/>
-          </a:lnRef>
-          <a:fillRef idx="3">
-            <a:schemeClr val="accent1"/>
-          </a:fillRef>
-          <a:effectRef idx="2">
-            <a:schemeClr val="accent1"/>
-          </a:effectRef>
-          <a:fontRef idx="minor">
-            <a:schemeClr val="lt1"/>
-          </a:fontRef>
-        </p:style>
-        <p:txBody>
-          <a:bodyPr rtlCol="0" anchor="ctr" lIns="182880" rIns="182880" tIns="182880"/>
-          <a:lstStyle/>
-          <a:p>
-            <a:pPr algn="ctr">
-              <a:defRPr sz="1200" b="1">
-                <a:solidFill>
-                  <a:srgbClr val="225E42"/>
-                </a:solidFill>
-                <a:latin typeface="Helvetica"/>
-              </a:defRPr>
-            </a:pPr>
-            <a:r>
-              <a:t>04  Skattekonto Early-Warning Radar</a:t>
-            </a:r>
-            <a:br/>
-          </a:p>
-          <a:p>
-            <a:pPr>
-              <a:defRPr sz="1050">
-                <a:solidFill>
-                  <a:srgbClr val="66625C"/>
-                </a:solidFill>
-                <a:latin typeface="Helvetica"/>
-              </a:defRPr>
-            </a:pPr>
-            <a:r>
-              <a:t>In Sweden &amp; Europe, unpaid tax on the government tax account (BAS 1630) is the #1 leading indicator of bankruptcy. We detect tax arrears weeks before external credit bureaus register a default.</a:t>
-            </a:r>
-          </a:p>
-        </p:txBody>
-      </p:sp>
-      <p:sp>
-        <p:nvSpPr>
-          <p:cNvPr id="9" name="Rounded Rectangle 8"/>
-          <p:cNvSpPr/>
-          <p:nvPr/>
-        </p:nvSpPr>
-        <p:spPr>
-          <a:xfrm>
-            <a:off x="731520" y="5760720"/>
-            <a:ext cx="10607040" cy="594360"/>
-          </a:xfrm>
-          <a:prstGeom prst="roundRect">
-            <a:avLst/>
-          </a:prstGeom>
-          <a:solidFill>
-            <a:srgbClr val="F3F0EA"/>
-          </a:solidFill>
-          <a:ln w="12700">
-            <a:solidFill>
-              <a:srgbClr val="E4E0D8"/>
-            </a:solidFill>
-          </a:ln>
-        </p:spPr>
-        <p:style>
-          <a:lnRef idx="1">
-            <a:schemeClr val="accent1"/>
-          </a:lnRef>
-          <a:fillRef idx="3">
-            <a:schemeClr val="accent1"/>
-          </a:fillRef>
-          <a:effectRef idx="2">
-            <a:schemeClr val="accent1"/>
-          </a:effectRef>
-          <a:fontRef idx="minor">
-            <a:schemeClr val="lt1"/>
-          </a:fontRef>
-        </p:style>
-        <p:txBody>
-          <a:bodyPr rtlCol="0" anchor="ctr" lIns="137160" tIns="137160"/>
-          <a:lstStyle/>
-          <a:p>
-            <a:pPr algn="ctr">
-              <a:defRPr sz="1150" b="1">
+              </a:defRPr>
+            </a:pPr>
+            <a:r>
+              <a:t>Layer 4: Institutional SPV Backstop   |   Cost: STIBOR + 350 bps</a:t>
+            </a:r>
+            <a:br/>
+          </a:p>
+          <a:p>
+            <a:pPr>
+              <a:defRPr sz="1100">
                 <a:solidFill>
                   <a:srgbClr val="171717"/>
                 </a:solidFill>
-                <a:latin typeface="Helvetica"/>
-              </a:defRPr>
-            </a:pPr>
-            <a:r>
-              <a:t>Traditional Factoring Loss Rate: 2.4%  vs  Accounted Expected Loss Rate: &lt; 0.05%</a:t>
+              </a:defRPr>
+            </a:pPr>
+            <a:r>
+              <a:t>Small high-velocity credit warehouse facility to guarantee 100% SLA uptime.  (100% SLA Guarantee)</a:t>
             </a:r>
           </a:p>
         </p:txBody>
@@ -4072,7 +4005,7 @@
               </a:defRPr>
             </a:pPr>
             <a:r>
-              <a:t>NETWORK EFFECTS // THE FLYWHEEL</a:t>
+              <a:t>UNDERWRITING // STRUCTURAL MOAT</a:t>
             </a:r>
           </a:p>
         </p:txBody>
@@ -4085,7 +4018,7 @@
         </p:nvSpPr>
         <p:spPr>
           <a:xfrm>
-            <a:off x="731520" y="685800"/>
+            <a:off x="731520" y="658368"/>
             <a:ext cx="10698480" cy="640080"/>
           </a:xfrm>
           <a:prstGeom prst="rect">
@@ -4100,7 +4033,7 @@
           <a:lstStyle/>
           <a:p>
             <a:pPr>
-              <a:defRPr sz="2400" b="1">
+              <a:defRPr sz="2300" b="1">
                 <a:solidFill>
                   <a:srgbClr val="171717"/>
                 </a:solidFill>
@@ -4108,12 +4041,12 @@
               </a:defRPr>
             </a:pPr>
             <a:r>
-              <a:t>The Dual-Role B2B Flywheel</a:t>
-            </a:r>
-          </a:p>
-          <a:p>
-            <a:pPr>
-              <a:defRPr sz="1200">
+              <a:t>Why Our Default Loss Rate Approaches Zero</a:t>
+            </a:r>
+          </a:p>
+          <a:p>
+            <a:pPr>
+              <a:defRPr sz="1150">
                 <a:solidFill>
                   <a:srgbClr val="66625C"/>
                 </a:solidFill>
@@ -4121,7 +4054,7 @@
               </a:defRPr>
             </a:pPr>
             <a:r>
-              <a:t>Why B2B network effects are exponentially more potent than B2C card networks</a:t>
+              <a:t>How we offer 1.0% fees profitably while banks struggle to break even at 4.0%</a:t>
             </a:r>
           </a:p>
         </p:txBody>
@@ -4135,7 +4068,7 @@
         <p:spPr>
           <a:xfrm>
             <a:off x="731520" y="1645920"/>
-            <a:ext cx="3383280" cy="3840480"/>
+            <a:ext cx="5120640" cy="1828800"/>
           </a:xfrm>
           <a:prstGeom prst="roundRect">
             <a:avLst/>
@@ -4145,7 +4078,7 @@
           </a:solidFill>
           <a:ln w="12700">
             <a:solidFill>
-              <a:srgbClr val="225E42"/>
+              <a:srgbClr val="E4E0D8"/>
             </a:solidFill>
           </a:ln>
         </p:spPr>
@@ -4164,48 +4097,31 @@
           </a:fontRef>
         </p:style>
         <p:txBody>
-          <a:bodyPr rtlCol="0" anchor="ctr" lIns="228600" rIns="228600" tIns="228600"/>
+          <a:bodyPr rtlCol="0" anchor="ctr" lIns="182880" rIns="182880" tIns="182880"/>
           <a:lstStyle/>
           <a:p>
             <a:pPr algn="ctr">
-              <a:defRPr sz="1100" b="1">
+              <a:defRPr sz="1200" b="1">
                 <a:solidFill>
                   <a:srgbClr val="225E42"/>
                 </a:solidFill>
-                <a:latin typeface="Helvetica"/>
-              </a:defRPr>
-            </a:pPr>
-            <a:r>
-              <a:t>ENGINE 01</a:t>
-            </a:r>
-            <a:br/>
-          </a:p>
-          <a:p>
-            <a:pPr>
-              <a:defRPr sz="1600" b="1">
-                <a:solidFill>
-                  <a:srgbClr val="171717"/>
-                </a:solidFill>
-                <a:latin typeface="Georgia"/>
-              </a:defRPr>
-            </a:pPr>
-            <a:r>
-              <a:t>The Dual-Role Asymmetry</a:t>
-            </a:r>
-            <a:br/>
-            <a:br/>
-          </a:p>
-          <a:p>
-            <a:pPr>
-              <a:defRPr sz="1100">
+              </a:defRPr>
+            </a:pPr>
+            <a:r>
+              <a:t>01  Zero-Fraud Ledger Attestation</a:t>
+            </a:r>
+            <a:br/>
+          </a:p>
+          <a:p>
+            <a:pPr>
+              <a:defRPr sz="1050">
                 <a:solidFill>
                   <a:srgbClr val="66625C"/>
                 </a:solidFill>
-                <a:latin typeface="Helvetica"/>
-              </a:defRPr>
-            </a:pPr>
-            <a:r>
-              <a:t>In B2C, consumers only buy; merchants only sell. In B2B, 100% of participants have both AR and AP. Every onboarded supplier brings 20 to 100 downstream vendors into the network.</a:t>
+              </a:defRPr>
+            </a:pPr>
+            <a:r>
+              <a:t>Invoices are only eligible for cash advances after the debtor has entered, matched, and approved them in their accounts payable ledger (supplierStatus === 'approved'). Fake invoices and invoice disputes are structurally impossible.</a:t>
             </a:r>
           </a:p>
         </p:txBody>
@@ -4218,8 +4134,8 @@
         </p:nvSpPr>
         <p:spPr>
           <a:xfrm>
-            <a:off x="4343400" y="1645920"/>
-            <a:ext cx="3383280" cy="3840480"/>
+            <a:off x="6217920" y="1645920"/>
+            <a:ext cx="5120640" cy="1828800"/>
           </a:xfrm>
           <a:prstGeom prst="roundRect">
             <a:avLst/>
@@ -4229,7 +4145,7 @@
           </a:solidFill>
           <a:ln w="12700">
             <a:solidFill>
-              <a:srgbClr val="A65A24"/>
+              <a:srgbClr val="E4E0D8"/>
             </a:solidFill>
           </a:ln>
         </p:spPr>
@@ -4248,48 +4164,31 @@
           </a:fontRef>
         </p:style>
         <p:txBody>
-          <a:bodyPr rtlCol="0" anchor="ctr" lIns="228600" rIns="228600" tIns="228600"/>
+          <a:bodyPr rtlCol="0" anchor="ctr" lIns="182880" rIns="182880" tIns="182880"/>
           <a:lstStyle/>
           <a:p>
             <a:pPr algn="ctr">
-              <a:defRPr sz="1100" b="1">
-                <a:solidFill>
-                  <a:srgbClr val="A65A24"/>
-                </a:solidFill>
-                <a:latin typeface="Helvetica"/>
-              </a:defRPr>
-            </a:pPr>
-            <a:r>
-              <a:t>ENGINE 02</a:t>
-            </a:r>
-            <a:br/>
-          </a:p>
-          <a:p>
-            <a:pPr>
-              <a:defRPr sz="1600" b="1">
-                <a:solidFill>
-                  <a:srgbClr val="171717"/>
-                </a:solidFill>
-                <a:latin typeface="Georgia"/>
-              </a:defRPr>
-            </a:pPr>
-            <a:r>
-              <a:t>Viral Bill-To-Join (Negative CAC)</a:t>
-            </a:r>
-            <a:br/>
-            <a:br/>
-          </a:p>
-          <a:p>
-            <a:pPr>
-              <a:defRPr sz="1100">
+              <a:defRPr sz="1200" b="1">
+                <a:solidFill>
+                  <a:srgbClr val="225E42"/>
+                </a:solidFill>
+              </a:defRPr>
+            </a:pPr>
+            <a:r>
+              <a:t>02  Real-Time First-Party GL Telemetry</a:t>
+            </a:r>
+            <a:br/>
+          </a:p>
+          <a:p>
+            <a:pPr>
+              <a:defRPr sz="1050">
                 <a:solidFill>
                   <a:srgbClr val="66625C"/>
                 </a:solidFill>
-                <a:latin typeface="Helvetica"/>
-              </a:defRPr>
-            </a:pPr>
-            <a:r>
-              <a:t>When Node A approves an invoice, Supplier B receives an alert: 'Your 100k SEK invoice is approved. Net it against your suppliers or withdraw cash in 10s.' Conversion exceeds 40%.</a:t>
+              </a:defRPr>
+            </a:pPr>
+            <a:r>
+              <a:t>Continuous read-access to live bank balances (PSD2 open banking), customer receivables aging (1510), and equity ratios (2080). Risk is assessed every 60 seconds, not once a year via outdated filed reports.</a:t>
             </a:r>
           </a:p>
         </p:txBody>
@@ -4302,8 +4201,8 @@
         </p:nvSpPr>
         <p:spPr>
           <a:xfrm>
-            <a:off x="7955280" y="1645920"/>
-            <a:ext cx="3383280" cy="3840480"/>
+            <a:off x="731520" y="3657600"/>
+            <a:ext cx="5120640" cy="1828800"/>
           </a:xfrm>
           <a:prstGeom prst="roundRect">
             <a:avLst/>
@@ -4313,7 +4212,7 @@
           </a:solidFill>
           <a:ln w="12700">
             <a:solidFill>
-              <a:srgbClr val="171717"/>
+              <a:srgbClr val="E4E0D8"/>
             </a:solidFill>
           </a:ln>
         </p:spPr>
@@ -4332,48 +4231,31 @@
           </a:fontRef>
         </p:style>
         <p:txBody>
-          <a:bodyPr rtlCol="0" anchor="ctr" lIns="228600" rIns="228600" tIns="228600"/>
+          <a:bodyPr rtlCol="0" anchor="ctr" lIns="182880" rIns="182880" tIns="182880"/>
           <a:lstStyle/>
           <a:p>
             <a:pPr algn="ctr">
-              <a:defRPr sz="1100" b="1">
-                <a:solidFill>
-                  <a:srgbClr val="171717"/>
-                </a:solidFill>
-                <a:latin typeface="Helvetica"/>
-              </a:defRPr>
-            </a:pPr>
-            <a:r>
-              <a:t>ENGINE 03</a:t>
-            </a:r>
-            <a:br/>
-          </a:p>
-          <a:p>
-            <a:pPr>
-              <a:defRPr sz="1600" b="1">
-                <a:solidFill>
-                  <a:srgbClr val="171717"/>
-                </a:solidFill>
-                <a:latin typeface="Georgia"/>
-              </a:defRPr>
-            </a:pPr>
-            <a:r>
-              <a:t>Liquidity Density (Metcalfe²)</a:t>
-            </a:r>
-            <a:br/>
-            <a:br/>
-          </a:p>
-          <a:p>
-            <a:pPr>
-              <a:defRPr sz="1100">
+              <a:defRPr sz="1200" b="1">
+                <a:solidFill>
+                  <a:srgbClr val="225E42"/>
+                </a:solidFill>
+              </a:defRPr>
+            </a:pPr>
+            <a:r>
+              <a:t>03  Self-Collateralizing Trade Graph</a:t>
+            </a:r>
+            <a:br/>
+          </a:p>
+          <a:p>
+            <a:pPr>
+              <a:defRPr sz="1050">
                 <a:solidFill>
                   <a:srgbClr val="66625C"/>
                 </a:solidFill>
-                <a:latin typeface="Helvetica"/>
-              </a:defRPr>
-            </a:pPr>
-            <a:r>
-              <a:t>At 10 nodes, 10% of trade is nettable. At 1,000 nodes, over 70% of trade clears with zero fiat cash. Staying outside the network imposes a 300 bps working capital penalty.</a:t>
+              </a:defRPr>
+            </a:pPr>
+            <a:r>
+              <a:t>In a two-way trading network, if a borrower delays repayment, subsequent incoming receivables from any network peer are automatically intercepted and offset before funds leave the system.</a:t>
             </a:r>
           </a:p>
         </p:txBody>
@@ -4386,8 +4268,75 @@
         </p:nvSpPr>
         <p:spPr>
           <a:xfrm>
-            <a:off x="731520" y="5669280"/>
-            <a:ext cx="10607040" cy="640080"/>
+            <a:off x="6217920" y="3657600"/>
+            <a:ext cx="5120640" cy="1828800"/>
+          </a:xfrm>
+          <a:prstGeom prst="roundRect">
+            <a:avLst/>
+          </a:prstGeom>
+          <a:solidFill>
+            <a:srgbClr val="FFFFFF"/>
+          </a:solidFill>
+          <a:ln w="12700">
+            <a:solidFill>
+              <a:srgbClr val="E4E0D8"/>
+            </a:solidFill>
+          </a:ln>
+        </p:spPr>
+        <p:style>
+          <a:lnRef idx="1">
+            <a:schemeClr val="accent1"/>
+          </a:lnRef>
+          <a:fillRef idx="3">
+            <a:schemeClr val="accent1"/>
+          </a:fillRef>
+          <a:effectRef idx="2">
+            <a:schemeClr val="accent1"/>
+          </a:effectRef>
+          <a:fontRef idx="minor">
+            <a:schemeClr val="lt1"/>
+          </a:fontRef>
+        </p:style>
+        <p:txBody>
+          <a:bodyPr rtlCol="0" anchor="ctr" lIns="182880" rIns="182880" tIns="182880"/>
+          <a:lstStyle/>
+          <a:p>
+            <a:pPr algn="ctr">
+              <a:defRPr sz="1200" b="1">
+                <a:solidFill>
+                  <a:srgbClr val="225E42"/>
+                </a:solidFill>
+              </a:defRPr>
+            </a:pPr>
+            <a:r>
+              <a:t>04  Skattekonto Early-Warning Radar</a:t>
+            </a:r>
+            <a:br/>
+          </a:p>
+          <a:p>
+            <a:pPr>
+              <a:defRPr sz="1050">
+                <a:solidFill>
+                  <a:srgbClr val="66625C"/>
+                </a:solidFill>
+              </a:defRPr>
+            </a:pPr>
+            <a:r>
+              <a:t>In Sweden &amp; Europe, unpaid tax on the government tax account (BAS 1630) is the #1 leading indicator of bankruptcy. We detect tax arrears weeks before external credit bureaus register a default.</a:t>
+            </a:r>
+          </a:p>
+        </p:txBody>
+      </p:sp>
+      <p:sp>
+        <p:nvSpPr>
+          <p:cNvPr id="9" name="Rounded Rectangle 8"/>
+          <p:cNvSpPr/>
+          <p:nvPr/>
+        </p:nvSpPr>
+        <p:spPr>
+          <a:xfrm>
+            <a:off x="731520" y="5760720"/>
+            <a:ext cx="10607040" cy="594360"/>
           </a:xfrm>
           <a:prstGeom prst="roundRect">
             <a:avLst/>
@@ -4420,15 +4369,14 @@
           <a:lstStyle/>
           <a:p>
             <a:pPr algn="ctr">
-              <a:defRPr sz="1100" b="1">
-                <a:solidFill>
-                  <a:srgbClr val="225E42"/>
-                </a:solidFill>
-                <a:latin typeface="Helvetica"/>
-              </a:defRPr>
-            </a:pPr>
-            <a:r>
-              <a:t>THE FLYWHEEL LOOP: Anchor Buyer Onboards -&gt; Subcontractors Join -&gt; Subcontractors Net Downstream -&gt; Viral K-Factor &gt; 2.4</a:t>
+              <a:defRPr sz="1150" b="1">
+                <a:solidFill>
+                  <a:srgbClr val="171717"/>
+                </a:solidFill>
+              </a:defRPr>
+            </a:pPr>
+            <a:r>
+              <a:t>Traditional Factoring Loss Rate: 2.4%  vs  Accounted Expected Loss Rate: &lt; 0.05%</a:t>
             </a:r>
           </a:p>
         </p:txBody>
@@ -4525,7 +4473,7 @@
               </a:defRPr>
             </a:pPr>
             <a:r>
-              <a:t>GO-TO-MARKET // STRATEGY</a:t>
+              <a:t>DEFENSIBILITY // NETWORK EFFECTS</a:t>
             </a:r>
           </a:p>
         </p:txBody>
@@ -4538,7 +4486,7 @@
         </p:nvSpPr>
         <p:spPr>
           <a:xfrm>
-            <a:off x="731520" y="685800"/>
+            <a:off x="731520" y="658368"/>
             <a:ext cx="10698480" cy="640080"/>
           </a:xfrm>
           <a:prstGeom prst="rect">
@@ -4553,7 +4501,7 @@
           <a:lstStyle/>
           <a:p>
             <a:pPr>
-              <a:defRPr sz="2400" b="1">
+              <a:defRPr sz="2300" b="1">
                 <a:solidFill>
                   <a:srgbClr val="171717"/>
                 </a:solidFill>
@@ -4561,12 +4509,12 @@
               </a:defRPr>
             </a:pPr>
             <a:r>
-              <a:t>The 3-Stage Trojan Horse</a:t>
-            </a:r>
-          </a:p>
-          <a:p>
-            <a:pPr>
-              <a:defRPr sz="1200">
+              <a:t>The Compounding Mathematical Moat</a:t>
+            </a:r>
+          </a:p>
+          <a:p>
+            <a:pPr>
+              <a:defRPr sz="1150">
                 <a:solidFill>
                   <a:srgbClr val="66625C"/>
                 </a:solidFill>
@@ -4574,7 +4522,7 @@
               </a:defRPr>
             </a:pPr>
             <a:r>
-              <a:t>Never ask a CFO to replace their accounting software on day one</a:t>
+              <a:t>Why leaving Accounted Network imposes an immediate working capital penalty</a:t>
             </a:r>
           </a:p>
         </p:txBody>
@@ -4598,7 +4546,7 @@
           </a:solidFill>
           <a:ln w="12700">
             <a:solidFill>
-              <a:srgbClr val="E4E0D8"/>
+              <a:srgbClr val="225E42"/>
             </a:solidFill>
           </a:ln>
         </p:spPr>
@@ -4625,11 +4573,10 @@
                 <a:solidFill>
                   <a:srgbClr val="225E42"/>
                 </a:solidFill>
-                <a:latin typeface="Helvetica"/>
-              </a:defRPr>
-            </a:pPr>
-            <a:r>
-              <a:t>STAGE 01 (DAY 1)</a:t>
+              </a:defRPr>
+            </a:pPr>
+            <a:r>
+              <a:t>ENGINE 01</a:t>
             </a:r>
             <a:br/>
           </a:p>
@@ -4643,7 +4590,7 @@
               </a:defRPr>
             </a:pPr>
             <a:r>
-              <a:t>The ERP Companion</a:t>
+              <a:t>Dual-Role Asymmetry</a:t>
             </a:r>
             <a:br/>
             <a:br/>
@@ -4654,64 +4601,10 @@
                 <a:solidFill>
                   <a:srgbClr val="66625C"/>
                 </a:solidFill>
-                <a:latin typeface="Helvetica"/>
-              </a:defRPr>
-            </a:pPr>
-            <a:r>
-              <a:t>• Keep Fortnox / Visma / Xero</a:t>
-            </a:r>
-          </a:p>
-          <a:p>
-            <a:pPr>
-              <a:defRPr sz="1100">
-                <a:solidFill>
-                  <a:srgbClr val="66625C"/>
-                </a:solidFill>
-                <a:latin typeface="Helvetica"/>
-              </a:defRPr>
-            </a:pPr>
-            <a:r>
-              <a:t>• Connect via OAuth in 60s</a:t>
-            </a:r>
-          </a:p>
-          <a:p>
-            <a:pPr>
-              <a:defRPr sz="1100">
-                <a:solidFill>
-                  <a:srgbClr val="66625C"/>
-                </a:solidFill>
-                <a:latin typeface="Helvetica"/>
-              </a:defRPr>
-            </a:pPr>
-            <a:r>
-              <a:t>• Zero behavioral disruption</a:t>
-            </a:r>
-          </a:p>
-          <a:p>
-            <a:pPr>
-              <a:defRPr sz="1100">
-                <a:solidFill>
-                  <a:srgbClr val="66625C"/>
-                </a:solidFill>
-                <a:latin typeface="Helvetica"/>
-              </a:defRPr>
-            </a:pPr>
-            <a:r>
-              <a:t>• Immediate netting &amp; liquidity</a:t>
-            </a:r>
-          </a:p>
-          <a:p>
-            <a:br/>
-            <a:pPr>
-              <a:defRPr sz="1100" b="1">
-                <a:solidFill>
-                  <a:srgbClr val="225E42"/>
-                </a:solidFill>
-                <a:latin typeface="Helvetica"/>
-              </a:defRPr>
-            </a:pPr>
-            <a:r>
-              <a:t>Zero Enterprise Sales Cycle</a:t>
+              </a:defRPr>
+            </a:pPr>
+            <a:r>
+              <a:t>In B2C, consumers only buy; merchants only sell. In B2B, 100% of participants have both AR and AP. Every onboarded supplier brings 20 to 100 downstream vendors into the network.</a:t>
             </a:r>
           </a:p>
         </p:txBody>
@@ -4735,7 +4628,7 @@
           </a:solidFill>
           <a:ln w="12700">
             <a:solidFill>
-              <a:srgbClr val="E4E0D8"/>
+              <a:srgbClr val="A65A24"/>
             </a:solidFill>
           </a:ln>
         </p:spPr>
@@ -4762,11 +4655,10 @@
                 <a:solidFill>
                   <a:srgbClr val="A65A24"/>
                 </a:solidFill>
-                <a:latin typeface="Helvetica"/>
-              </a:defRPr>
-            </a:pPr>
-            <a:r>
-              <a:t>STAGE 02 (DAY 90)</a:t>
+              </a:defRPr>
+            </a:pPr>
+            <a:r>
+              <a:t>ENGINE 02</a:t>
             </a:r>
             <a:br/>
           </a:p>
@@ -4780,7 +4672,7 @@
               </a:defRPr>
             </a:pPr>
             <a:r>
-              <a:t>The Clearing Routine</a:t>
+              <a:t>Viral Bill-To-Join (Negative CAC)</a:t>
             </a:r>
             <a:br/>
             <a:br/>
@@ -4791,64 +4683,10 @@
                 <a:solidFill>
                   <a:srgbClr val="66625C"/>
                 </a:solidFill>
-                <a:latin typeface="Helvetica"/>
-              </a:defRPr>
-            </a:pPr>
-            <a:r>
-              <a:t>• Automated 1st-of-month netting</a:t>
-            </a:r>
-          </a:p>
-          <a:p>
-            <a:pPr>
-              <a:defRPr sz="1100">
-                <a:solidFill>
-                  <a:srgbClr val="66625C"/>
-                </a:solidFill>
-                <a:latin typeface="Helvetica"/>
-              </a:defRPr>
-            </a:pPr>
-            <a:r>
-              <a:t>• Anchor Treasury dynamic yield</a:t>
-            </a:r>
-          </a:p>
-          <a:p>
-            <a:pPr>
-              <a:defRPr sz="1100">
-                <a:solidFill>
-                  <a:srgbClr val="66625C"/>
-                </a:solidFill>
-                <a:latin typeface="Helvetica"/>
-              </a:defRPr>
-            </a:pPr>
-            <a:r>
-              <a:t>• Multi-month installments (BAS 2840)</a:t>
-            </a:r>
-          </a:p>
-          <a:p>
-            <a:pPr>
-              <a:defRPr sz="1100">
-                <a:solidFill>
-                  <a:srgbClr val="66625C"/>
-                </a:solidFill>
-                <a:latin typeface="Helvetica"/>
-              </a:defRPr>
-            </a:pPr>
-            <a:r>
-              <a:t>• Counterparty viral invitations</a:t>
-            </a:r>
-          </a:p>
-          <a:p>
-            <a:br/>
-            <a:pPr>
-              <a:defRPr sz="1100" b="1">
-                <a:solidFill>
-                  <a:srgbClr val="A65A24"/>
-                </a:solidFill>
-                <a:latin typeface="Helvetica"/>
-              </a:defRPr>
-            </a:pPr>
-            <a:r>
-              <a:t>High Retention &amp; Habit</a:t>
+              </a:defRPr>
+            </a:pPr>
+            <a:r>
+              <a:t>When Node A approves an invoice, Supplier B receives an alert: 'Your 100k SEK invoice is approved. Net it against your suppliers or withdraw cash in 10s.' Conversion exceeds 40%.</a:t>
             </a:r>
           </a:p>
         </p:txBody>
@@ -4872,7 +4710,7 @@
           </a:solidFill>
           <a:ln w="12700">
             <a:solidFill>
-              <a:srgbClr val="E4E0D8"/>
+              <a:srgbClr val="171717"/>
             </a:solidFill>
           </a:ln>
         </p:spPr>
@@ -4899,11 +4737,10 @@
                 <a:solidFill>
                   <a:srgbClr val="171717"/>
                 </a:solidFill>
-                <a:latin typeface="Helvetica"/>
-              </a:defRPr>
-            </a:pPr>
-            <a:r>
-              <a:t>STAGE 03 (YEAR 2)</a:t>
+              </a:defRPr>
+            </a:pPr>
+            <a:r>
+              <a:t>ENGINE 03</a:t>
             </a:r>
             <a:br/>
           </a:p>
@@ -4917,7 +4754,7 @@
               </a:defRPr>
             </a:pPr>
             <a:r>
-              <a:t>The Full AI ERP Suite</a:t>
+              <a:t>Liquidity Density (Metcalfe²)</a:t>
             </a:r>
             <a:br/>
             <a:br/>
@@ -4928,64 +4765,10 @@
                 <a:solidFill>
                   <a:srgbClr val="66625C"/>
                 </a:solidFill>
-                <a:latin typeface="Helvetica"/>
-              </a:defRPr>
-            </a:pPr>
-            <a:r>
-              <a:t>• Upgrade to Accounted Core</a:t>
-            </a:r>
-          </a:p>
-          <a:p>
-            <a:pPr>
-              <a:defRPr sz="1100">
-                <a:solidFill>
-                  <a:srgbClr val="66625C"/>
-                </a:solidFill>
-                <a:latin typeface="Helvetica"/>
-              </a:defRPr>
-            </a:pPr>
-            <a:r>
-              <a:t>• Autonomous AI bookkeeping</a:t>
-            </a:r>
-          </a:p>
-          <a:p>
-            <a:pPr>
-              <a:defRPr sz="1100">
-                <a:solidFill>
-                  <a:srgbClr val="66625C"/>
-                </a:solidFill>
-                <a:latin typeface="Helvetica"/>
-              </a:defRPr>
-            </a:pPr>
-            <a:r>
-              <a:t>• Real-time bank integrations</a:t>
-            </a:r>
-          </a:p>
-          <a:p>
-            <a:pPr>
-              <a:defRPr sz="1100">
-                <a:solidFill>
-                  <a:srgbClr val="66625C"/>
-                </a:solidFill>
-                <a:latin typeface="Helvetica"/>
-              </a:defRPr>
-            </a:pPr>
-            <a:r>
-              <a:t>• Full displacement of legacy ERPs</a:t>
-            </a:r>
-          </a:p>
-          <a:p>
-            <a:br/>
-            <a:pPr>
-              <a:defRPr sz="1100" b="1">
-                <a:solidFill>
-                  <a:srgbClr val="171717"/>
-                </a:solidFill>
-                <a:latin typeface="Helvetica"/>
-              </a:defRPr>
-            </a:pPr>
-            <a:r>
-              <a:t>Maximum Enterprise LTV</a:t>
+              </a:defRPr>
+            </a:pPr>
+            <a:r>
+              <a:t>At 10 nodes, 10% of trade is nettable. At 1,000 nodes, over 70% of trade clears with zero fiat cash. Staying outside the network imposes a 300 bps working capital penalty.</a:t>
             </a:r>
           </a:p>
         </p:txBody>
@@ -5034,13 +4817,12 @@
             <a:pPr algn="ctr">
               <a:defRPr sz="1100" b="1">
                 <a:solidFill>
-                  <a:srgbClr val="171717"/>
-                </a:solidFill>
-                <a:latin typeface="Helvetica"/>
-              </a:defRPr>
-            </a:pPr>
-            <a:r>
-              <a:t>💡 Sales velocity is 10x faster because we sell working capital and instant liquidity, not an IT software migration project.</a:t>
+                  <a:srgbClr val="225E42"/>
+                </a:solidFill>
+              </a:defRPr>
+            </a:pPr>
+            <a:r>
+              <a:t>THE FLYWHEEL LOOP: Anchor Buyer Onboards -&gt; Subcontractors Join -&gt; Subcontractors Net Downstream -&gt; Viral K-Factor &gt; 2.4</a:t>
             </a:r>
           </a:p>
         </p:txBody>
@@ -5137,7 +4919,7 @@
               </a:defRPr>
             </a:pPr>
             <a:r>
-              <a:t>BUSINESS MODEL // MONETIZATION</a:t>
+              <a:t>GO-TO-MARKET // STRATEGY</a:t>
             </a:r>
           </a:p>
         </p:txBody>
@@ -5150,7 +4932,7 @@
         </p:nvSpPr>
         <p:spPr>
           <a:xfrm>
-            <a:off x="731520" y="685800"/>
+            <a:off x="731520" y="658368"/>
             <a:ext cx="10698480" cy="640080"/>
           </a:xfrm>
           <a:prstGeom prst="rect">
@@ -5165,7 +4947,7 @@
           <a:lstStyle/>
           <a:p>
             <a:pPr>
-              <a:defRPr sz="2400" b="1">
+              <a:defRPr sz="2300" b="1">
                 <a:solidFill>
                   <a:srgbClr val="171717"/>
                 </a:solidFill>
@@ -5173,12 +4955,12 @@
               </a:defRPr>
             </a:pPr>
             <a:r>
-              <a:t>High-Margin B2B 'Interchange'</a:t>
-            </a:r>
-          </a:p>
-          <a:p>
-            <a:pPr>
-              <a:defRPr sz="1200">
+              <a:t>The 3-Stage Trojan Horse</a:t>
+            </a:r>
+          </a:p>
+          <a:p>
+            <a:pPr>
+              <a:defRPr sz="1150">
                 <a:solidFill>
                   <a:srgbClr val="66625C"/>
                 </a:solidFill>
@@ -5186,7 +4968,7 @@
               </a:defRPr>
             </a:pPr>
             <a:r>
-              <a:t>5 synergistic revenue streams pairing SaaS with high-velocity clearing tolls</a:t>
+              <a:t>Never ask a CFO to replace their accounting software on day one</a:t>
             </a:r>
           </a:p>
         </p:txBody>
@@ -5200,7 +4982,7 @@
         <p:spPr>
           <a:xfrm>
             <a:off x="731520" y="1645920"/>
-            <a:ext cx="2011680" cy="3840480"/>
+            <a:ext cx="3383280" cy="3840480"/>
           </a:xfrm>
           <a:prstGeom prst="roundRect">
             <a:avLst/>
@@ -5229,62 +5011,95 @@
           </a:fontRef>
         </p:style>
         <p:txBody>
-          <a:bodyPr rtlCol="0" anchor="ctr" lIns="182880" rIns="182880" tIns="182880"/>
+          <a:bodyPr rtlCol="0" anchor="ctr" lIns="228600" rIns="228600" tIns="228600"/>
           <a:lstStyle/>
           <a:p>
             <a:pPr algn="ctr">
-              <a:defRPr sz="1000" b="1">
+              <a:defRPr sz="1100" b="1">
+                <a:solidFill>
+                  <a:srgbClr val="225E42"/>
+                </a:solidFill>
+              </a:defRPr>
+            </a:pPr>
+            <a:r>
+              <a:t>STAGE 01 (DAY 1)</a:t>
+            </a:r>
+            <a:br/>
+          </a:p>
+          <a:p>
+            <a:pPr>
+              <a:defRPr sz="1600" b="1">
+                <a:solidFill>
+                  <a:srgbClr val="171717"/>
+                </a:solidFill>
+                <a:latin typeface="Georgia"/>
+              </a:defRPr>
+            </a:pPr>
+            <a:r>
+              <a:t>The ERP Companion</a:t>
+            </a:r>
+            <a:br/>
+            <a:br/>
+          </a:p>
+          <a:p>
+            <a:pPr>
+              <a:defRPr sz="1100">
                 <a:solidFill>
                   <a:srgbClr val="66625C"/>
                 </a:solidFill>
-                <a:latin typeface="Helvetica"/>
-              </a:defRPr>
-            </a:pPr>
-            <a:r>
-              <a:t>Stream 1</a:t>
-            </a:r>
-            <a:br/>
-          </a:p>
-          <a:p>
-            <a:pPr>
-              <a:defRPr sz="2200" b="1">
+              </a:defRPr>
+            </a:pPr>
+            <a:r>
+              <a:t>• Keep Fortnox / Visma / Xero</a:t>
+            </a:r>
+          </a:p>
+          <a:p>
+            <a:pPr>
+              <a:defRPr sz="1100">
+                <a:solidFill>
+                  <a:srgbClr val="66625C"/>
+                </a:solidFill>
+              </a:defRPr>
+            </a:pPr>
+            <a:r>
+              <a:t>• Connect via OAuth in 60s</a:t>
+            </a:r>
+          </a:p>
+          <a:p>
+            <a:pPr>
+              <a:defRPr sz="1100">
+                <a:solidFill>
+                  <a:srgbClr val="66625C"/>
+                </a:solidFill>
+              </a:defRPr>
+            </a:pPr>
+            <a:r>
+              <a:t>• Zero behavioral disruption</a:t>
+            </a:r>
+          </a:p>
+          <a:p>
+            <a:pPr>
+              <a:defRPr sz="1100">
+                <a:solidFill>
+                  <a:srgbClr val="66625C"/>
+                </a:solidFill>
+              </a:defRPr>
+            </a:pPr>
+            <a:r>
+              <a:t>• Immediate netting &amp; liquidity</a:t>
+            </a:r>
+          </a:p>
+          <a:p>
+            <a:br/>
+            <a:pPr>
+              <a:defRPr sz="1100" b="1">
                 <a:solidFill>
                   <a:srgbClr val="225E42"/>
                 </a:solidFill>
-                <a:latin typeface="Georgia"/>
-              </a:defRPr>
-            </a:pPr>
-            <a:r>
-              <a:t>1.00%</a:t>
-            </a:r>
-            <a:br/>
-          </a:p>
-          <a:p>
-            <a:pPr>
-              <a:defRPr sz="1200" b="1">
-                <a:solidFill>
-                  <a:srgbClr val="171717"/>
-                </a:solidFill>
-                <a:latin typeface="Helvetica"/>
-              </a:defRPr>
-            </a:pPr>
-            <a:r>
-              <a:t>Drawdown Fee</a:t>
-            </a:r>
-            <a:br/>
-            <a:br/>
-          </a:p>
-          <a:p>
-            <a:pPr>
-              <a:defRPr sz="1000">
-                <a:solidFill>
-                  <a:srgbClr val="66625C"/>
-                </a:solidFill>
-                <a:latin typeface="Helvetica"/>
-              </a:defRPr>
-            </a:pPr>
-            <a:r>
-              <a:t>Flat fee on accelerated receivables (18%–24% annualized capital return).</a:t>
+              </a:defRPr>
+            </a:pPr>
+            <a:r>
+              <a:t>Zero Enterprise Sales Cycle</a:t>
             </a:r>
           </a:p>
         </p:txBody>
@@ -5297,8 +5112,8 @@
         </p:nvSpPr>
         <p:spPr>
           <a:xfrm>
-            <a:off x="2880360" y="1645920"/>
-            <a:ext cx="2011680" cy="3840480"/>
+            <a:off x="4343400" y="1645920"/>
+            <a:ext cx="3383280" cy="3840480"/>
           </a:xfrm>
           <a:prstGeom prst="roundRect">
             <a:avLst/>
@@ -5327,62 +5142,95 @@
           </a:fontRef>
         </p:style>
         <p:txBody>
-          <a:bodyPr rtlCol="0" anchor="ctr" lIns="182880" rIns="182880" tIns="182880"/>
+          <a:bodyPr rtlCol="0" anchor="ctr" lIns="228600" rIns="228600" tIns="228600"/>
           <a:lstStyle/>
           <a:p>
             <a:pPr algn="ctr">
-              <a:defRPr sz="1000" b="1">
+              <a:defRPr sz="1100" b="1">
+                <a:solidFill>
+                  <a:srgbClr val="A65A24"/>
+                </a:solidFill>
+              </a:defRPr>
+            </a:pPr>
+            <a:r>
+              <a:t>STAGE 02 (DAY 90)</a:t>
+            </a:r>
+            <a:br/>
+          </a:p>
+          <a:p>
+            <a:pPr>
+              <a:defRPr sz="1600" b="1">
+                <a:solidFill>
+                  <a:srgbClr val="171717"/>
+                </a:solidFill>
+                <a:latin typeface="Georgia"/>
+              </a:defRPr>
+            </a:pPr>
+            <a:r>
+              <a:t>The Clearing Routine</a:t>
+            </a:r>
+            <a:br/>
+            <a:br/>
+          </a:p>
+          <a:p>
+            <a:pPr>
+              <a:defRPr sz="1100">
                 <a:solidFill>
                   <a:srgbClr val="66625C"/>
                 </a:solidFill>
-                <a:latin typeface="Helvetica"/>
-              </a:defRPr>
-            </a:pPr>
-            <a:r>
-              <a:t>Stream 2</a:t>
-            </a:r>
-            <a:br/>
-          </a:p>
-          <a:p>
-            <a:pPr>
-              <a:defRPr sz="2200" b="1">
-                <a:solidFill>
-                  <a:srgbClr val="171717"/>
-                </a:solidFill>
-                <a:latin typeface="Georgia"/>
-              </a:defRPr>
-            </a:pPr>
-            <a:r>
-              <a:t>0.15%</a:t>
-            </a:r>
-            <a:br/>
-          </a:p>
-          <a:p>
-            <a:pPr>
-              <a:defRPr sz="1200" b="1">
-                <a:solidFill>
-                  <a:srgbClr val="171717"/>
-                </a:solidFill>
-                <a:latin typeface="Helvetica"/>
-              </a:defRPr>
-            </a:pPr>
-            <a:r>
-              <a:t>Netting Toll</a:t>
-            </a:r>
-            <a:br/>
-            <a:br/>
-          </a:p>
-          <a:p>
-            <a:pPr>
-              <a:defRPr sz="1000">
+              </a:defRPr>
+            </a:pPr>
+            <a:r>
+              <a:t>• Automated 1st-of-month netting</a:t>
+            </a:r>
+          </a:p>
+          <a:p>
+            <a:pPr>
+              <a:defRPr sz="1100">
                 <a:solidFill>
                   <a:srgbClr val="66625C"/>
                 </a:solidFill>
-                <a:latin typeface="Helvetica"/>
-              </a:defRPr>
-            </a:pPr>
-            <a:r>
-              <a:t>Fee on gross debt extinguished without cash movement. High pure-margin software toll.</a:t>
+              </a:defRPr>
+            </a:pPr>
+            <a:r>
+              <a:t>• Anchor Treasury dynamic yield</a:t>
+            </a:r>
+          </a:p>
+          <a:p>
+            <a:pPr>
+              <a:defRPr sz="1100">
+                <a:solidFill>
+                  <a:srgbClr val="66625C"/>
+                </a:solidFill>
+              </a:defRPr>
+            </a:pPr>
+            <a:r>
+              <a:t>• Multi-month installments (BAS 2840)</a:t>
+            </a:r>
+          </a:p>
+          <a:p>
+            <a:pPr>
+              <a:defRPr sz="1100">
+                <a:solidFill>
+                  <a:srgbClr val="66625C"/>
+                </a:solidFill>
+              </a:defRPr>
+            </a:pPr>
+            <a:r>
+              <a:t>• Counterparty viral invitations</a:t>
+            </a:r>
+          </a:p>
+          <a:p>
+            <a:br/>
+            <a:pPr>
+              <a:defRPr sz="1100" b="1">
+                <a:solidFill>
+                  <a:srgbClr val="A65A24"/>
+                </a:solidFill>
+              </a:defRPr>
+            </a:pPr>
+            <a:r>
+              <a:t>High Retention &amp; Habit</a:t>
             </a:r>
           </a:p>
         </p:txBody>
@@ -5395,8 +5243,8 @@
         </p:nvSpPr>
         <p:spPr>
           <a:xfrm>
-            <a:off x="5029200" y="1645920"/>
-            <a:ext cx="2011680" cy="3840480"/>
+            <a:off x="7955280" y="1645920"/>
+            <a:ext cx="3383280" cy="3840480"/>
           </a:xfrm>
           <a:prstGeom prst="roundRect">
             <a:avLst/>
@@ -5425,62 +5273,95 @@
           </a:fontRef>
         </p:style>
         <p:txBody>
-          <a:bodyPr rtlCol="0" anchor="ctr" lIns="182880" rIns="182880" tIns="182880"/>
+          <a:bodyPr rtlCol="0" anchor="ctr" lIns="228600" rIns="228600" tIns="228600"/>
           <a:lstStyle/>
           <a:p>
             <a:pPr algn="ctr">
-              <a:defRPr sz="1000" b="1">
+              <a:defRPr sz="1100" b="1">
+                <a:solidFill>
+                  <a:srgbClr val="171717"/>
+                </a:solidFill>
+              </a:defRPr>
+            </a:pPr>
+            <a:r>
+              <a:t>STAGE 03 (YEAR 2)</a:t>
+            </a:r>
+            <a:br/>
+          </a:p>
+          <a:p>
+            <a:pPr>
+              <a:defRPr sz="1600" b="1">
+                <a:solidFill>
+                  <a:srgbClr val="171717"/>
+                </a:solidFill>
+                <a:latin typeface="Georgia"/>
+              </a:defRPr>
+            </a:pPr>
+            <a:r>
+              <a:t>The Full AI ERP Suite</a:t>
+            </a:r>
+            <a:br/>
+            <a:br/>
+          </a:p>
+          <a:p>
+            <a:pPr>
+              <a:defRPr sz="1100">
                 <a:solidFill>
                   <a:srgbClr val="66625C"/>
                 </a:solidFill>
-                <a:latin typeface="Helvetica"/>
-              </a:defRPr>
-            </a:pPr>
-            <a:r>
-              <a:t>Stream 3 (New)</a:t>
-            </a:r>
-            <a:br/>
-          </a:p>
-          <a:p>
-            <a:pPr>
-              <a:defRPr sz="2200" b="1">
-                <a:solidFill>
-                  <a:srgbClr val="225E42"/>
-                </a:solidFill>
-                <a:latin typeface="Georgia"/>
-              </a:defRPr>
-            </a:pPr>
-            <a:r>
-              <a:t>3.25%</a:t>
-            </a:r>
-            <a:br/>
-          </a:p>
-          <a:p>
-            <a:pPr>
-              <a:defRPr sz="1200" b="1">
+              </a:defRPr>
+            </a:pPr>
+            <a:r>
+              <a:t>• Upgrade to Accounted Core</a:t>
+            </a:r>
+          </a:p>
+          <a:p>
+            <a:pPr>
+              <a:defRPr sz="1100">
+                <a:solidFill>
+                  <a:srgbClr val="66625C"/>
+                </a:solidFill>
+              </a:defRPr>
+            </a:pPr>
+            <a:r>
+              <a:t>• Autonomous AI bookkeeping</a:t>
+            </a:r>
+          </a:p>
+          <a:p>
+            <a:pPr>
+              <a:defRPr sz="1100">
+                <a:solidFill>
+                  <a:srgbClr val="66625C"/>
+                </a:solidFill>
+              </a:defRPr>
+            </a:pPr>
+            <a:r>
+              <a:t>• Real-time bank integrations</a:t>
+            </a:r>
+          </a:p>
+          <a:p>
+            <a:pPr>
+              <a:defRPr sz="1100">
+                <a:solidFill>
+                  <a:srgbClr val="66625C"/>
+                </a:solidFill>
+              </a:defRPr>
+            </a:pPr>
+            <a:r>
+              <a:t>• Full displacement of legacy ERPs</a:t>
+            </a:r>
+          </a:p>
+          <a:p>
+            <a:br/>
+            <a:pPr>
+              <a:defRPr sz="1100" b="1">
                 <a:solidFill>
                   <a:srgbClr val="171717"/>
                 </a:solidFill>
-                <a:latin typeface="Helvetica"/>
-              </a:defRPr>
-            </a:pPr>
-            <a:r>
-              <a:t>Escrow Float</a:t>
-            </a:r>
-            <a:br/>
-            <a:br/>
-          </a:p>
-          <a:p>
-            <a:pPr>
-              <a:defRPr sz="1000">
-                <a:solidFill>
-                  <a:srgbClr val="66625C"/>
-                </a:solidFill>
-                <a:latin typeface="Helvetica"/>
-              </a:defRPr>
-            </a:pPr>
-            <a:r>
-              <a:t>Risk-free central bank interest earned during 48–72h clearing buffer.</a:t>
+              </a:defRPr>
+            </a:pPr>
+            <a:r>
+              <a:t>Maximum Enterprise LTV</a:t>
             </a:r>
           </a:p>
         </p:txBody>
@@ -5488,202 +5369,6 @@
       <p:sp>
         <p:nvSpPr>
           <p:cNvPr id="8" name="Rounded Rectangle 7"/>
-          <p:cNvSpPr/>
-          <p:nvPr/>
-        </p:nvSpPr>
-        <p:spPr>
-          <a:xfrm>
-            <a:off x="7178040" y="1645920"/>
-            <a:ext cx="2011680" cy="3840480"/>
-          </a:xfrm>
-          <a:prstGeom prst="roundRect">
-            <a:avLst/>
-          </a:prstGeom>
-          <a:solidFill>
-            <a:srgbClr val="FFFFFF"/>
-          </a:solidFill>
-          <a:ln w="12700">
-            <a:solidFill>
-              <a:srgbClr val="E4E0D8"/>
-            </a:solidFill>
-          </a:ln>
-        </p:spPr>
-        <p:style>
-          <a:lnRef idx="1">
-            <a:schemeClr val="accent1"/>
-          </a:lnRef>
-          <a:fillRef idx="3">
-            <a:schemeClr val="accent1"/>
-          </a:fillRef>
-          <a:effectRef idx="2">
-            <a:schemeClr val="accent1"/>
-          </a:effectRef>
-          <a:fontRef idx="minor">
-            <a:schemeClr val="lt1"/>
-          </a:fontRef>
-        </p:style>
-        <p:txBody>
-          <a:bodyPr rtlCol="0" anchor="ctr" lIns="182880" rIns="182880" tIns="182880"/>
-          <a:lstStyle/>
-          <a:p>
-            <a:pPr algn="ctr">
-              <a:defRPr sz="1000" b="1">
-                <a:solidFill>
-                  <a:srgbClr val="66625C"/>
-                </a:solidFill>
-                <a:latin typeface="Helvetica"/>
-              </a:defRPr>
-            </a:pPr>
-            <a:r>
-              <a:t>Stream 4</a:t>
-            </a:r>
-            <a:br/>
-          </a:p>
-          <a:p>
-            <a:pPr>
-              <a:defRPr sz="2200" b="1">
-                <a:solidFill>
-                  <a:srgbClr val="A65A24"/>
-                </a:solidFill>
-                <a:latin typeface="Georgia"/>
-              </a:defRPr>
-            </a:pPr>
-            <a:r>
-              <a:t>1.25%–3.2%</a:t>
-            </a:r>
-            <a:br/>
-          </a:p>
-          <a:p>
-            <a:pPr>
-              <a:defRPr sz="1200" b="1">
-                <a:solidFill>
-                  <a:srgbClr val="171717"/>
-                </a:solidFill>
-                <a:latin typeface="Helvetica"/>
-              </a:defRPr>
-            </a:pPr>
-            <a:r>
-              <a:t>Installments</a:t>
-            </a:r>
-            <a:br/>
-            <a:br/>
-          </a:p>
-          <a:p>
-            <a:pPr>
-              <a:defRPr sz="1000">
-                <a:solidFill>
-                  <a:srgbClr val="66625C"/>
-                </a:solidFill>
-                <a:latin typeface="Helvetica"/>
-              </a:defRPr>
-            </a:pPr>
-            <a:r>
-              <a:t>2, 3, or 4-month installment financing fees on net payables (BAS 2840).</a:t>
-            </a:r>
-          </a:p>
-        </p:txBody>
-      </p:sp>
-      <p:sp>
-        <p:nvSpPr>
-          <p:cNvPr id="9" name="Rounded Rectangle 8"/>
-          <p:cNvSpPr/>
-          <p:nvPr/>
-        </p:nvSpPr>
-        <p:spPr>
-          <a:xfrm>
-            <a:off x="9326880" y="1645920"/>
-            <a:ext cx="2011680" cy="3840480"/>
-          </a:xfrm>
-          <a:prstGeom prst="roundRect">
-            <a:avLst/>
-          </a:prstGeom>
-          <a:solidFill>
-            <a:srgbClr val="FFFFFF"/>
-          </a:solidFill>
-          <a:ln w="12700">
-            <a:solidFill>
-              <a:srgbClr val="E4E0D8"/>
-            </a:solidFill>
-          </a:ln>
-        </p:spPr>
-        <p:style>
-          <a:lnRef idx="1">
-            <a:schemeClr val="accent1"/>
-          </a:lnRef>
-          <a:fillRef idx="3">
-            <a:schemeClr val="accent1"/>
-          </a:fillRef>
-          <a:effectRef idx="2">
-            <a:schemeClr val="accent1"/>
-          </a:effectRef>
-          <a:fontRef idx="minor">
-            <a:schemeClr val="lt1"/>
-          </a:fontRef>
-        </p:style>
-        <p:txBody>
-          <a:bodyPr rtlCol="0" anchor="ctr" lIns="182880" rIns="182880" tIns="182880"/>
-          <a:lstStyle/>
-          <a:p>
-            <a:pPr algn="ctr">
-              <a:defRPr sz="1000" b="1">
-                <a:solidFill>
-                  <a:srgbClr val="66625C"/>
-                </a:solidFill>
-                <a:latin typeface="Helvetica"/>
-              </a:defRPr>
-            </a:pPr>
-            <a:r>
-              <a:t>Stream 5</a:t>
-            </a:r>
-            <a:br/>
-          </a:p>
-          <a:p>
-            <a:pPr>
-              <a:defRPr sz="2200" b="1">
-                <a:solidFill>
-                  <a:srgbClr val="66625C"/>
-                </a:solidFill>
-                <a:latin typeface="Georgia"/>
-              </a:defRPr>
-            </a:pPr>
-            <a:r>
-              <a:t>€49–€499</a:t>
-            </a:r>
-            <a:br/>
-          </a:p>
-          <a:p>
-            <a:pPr>
-              <a:defRPr sz="1200" b="1">
-                <a:solidFill>
-                  <a:srgbClr val="171717"/>
-                </a:solidFill>
-                <a:latin typeface="Helvetica"/>
-              </a:defRPr>
-            </a:pPr>
-            <a:r>
-              <a:t>SaaS Sub</a:t>
-            </a:r>
-            <a:br/>
-            <a:br/>
-          </a:p>
-          <a:p>
-            <a:pPr>
-              <a:defRPr sz="1000">
-                <a:solidFill>
-                  <a:srgbClr val="66625C"/>
-                </a:solidFill>
-                <a:latin typeface="Helvetica"/>
-              </a:defRPr>
-            </a:pPr>
-            <a:r>
-              <a:t>Monthly tier for treasury automation and multi-entity ERP sync.</a:t>
-            </a:r>
-          </a:p>
-        </p:txBody>
-      </p:sp>
-      <p:sp>
-        <p:nvSpPr>
-          <p:cNvPr id="10" name="Rounded Rectangle 9"/>
           <p:cNvSpPr/>
           <p:nvPr/>
         </p:nvSpPr>
@@ -5725,13 +5410,12 @@
             <a:pPr algn="ctr">
               <a:defRPr sz="1100" b="1">
                 <a:solidFill>
-                  <a:srgbClr val="225E42"/>
-                </a:solidFill>
-                <a:latin typeface="Helvetica"/>
-              </a:defRPr>
-            </a:pPr>
-            <a:r>
-              <a:t>Blended Unit Economics: CAC &lt; $85  |  Payback &lt; 2 months  |  Gross Margin &gt; 85%  |  LTV / CAC &gt; 18x</a:t>
+                  <a:srgbClr val="171717"/>
+                </a:solidFill>
+              </a:defRPr>
+            </a:pPr>
+            <a:r>
+              <a:t>💡 Sales velocity is 10x faster because we sell working capital and instant liquidity, not an IT software migration project.</a:t>
             </a:r>
           </a:p>
         </p:txBody>
@@ -5828,7 +5512,7 @@
               </a:defRPr>
             </a:pPr>
             <a:r>
-              <a:t>MARKET SIZE // TAM SAM SOM</a:t>
+              <a:t>BUSINESS MODEL // SOFTWARE ECONOMICS</a:t>
             </a:r>
           </a:p>
         </p:txBody>
@@ -5841,7 +5525,7 @@
         </p:nvSpPr>
         <p:spPr>
           <a:xfrm>
-            <a:off x="731520" y="685800"/>
+            <a:off x="731520" y="658368"/>
             <a:ext cx="10698480" cy="640080"/>
           </a:xfrm>
           <a:prstGeom prst="rect">
@@ -5856,7 +5540,7 @@
           <a:lstStyle/>
           <a:p>
             <a:pPr>
-              <a:defRPr sz="2400" b="1">
+              <a:defRPr sz="2300" b="1">
                 <a:solidFill>
                   <a:srgbClr val="171717"/>
                 </a:solidFill>
@@ -5864,12 +5548,12 @@
               </a:defRPr>
             </a:pPr>
             <a:r>
-              <a:t>A Trillion-Dollar Global Settlement Pool</a:t>
-            </a:r>
-          </a:p>
-          <a:p>
-            <a:pPr>
-              <a:defRPr sz="1200">
+              <a:t>High-Margin B2B 'Interchange'</a:t>
+            </a:r>
+          </a:p>
+          <a:p>
+            <a:pPr>
+              <a:defRPr sz="1150">
                 <a:solidFill>
                   <a:srgbClr val="66625C"/>
                 </a:solidFill>
@@ -5877,7 +5561,7 @@
               </a:defRPr>
             </a:pPr>
             <a:r>
-              <a:t>Targeting the massive gap in enterprise B2B payments</a:t>
+              <a:t>5 synergistic revenue streams pairing SaaS with high-velocity clearing tolls</a:t>
             </a:r>
           </a:p>
         </p:txBody>
@@ -5891,7 +5575,7 @@
         <p:spPr>
           <a:xfrm>
             <a:off x="731520" y="1645920"/>
-            <a:ext cx="3383280" cy="3840480"/>
+            <a:ext cx="2011680" cy="3840480"/>
           </a:xfrm>
           <a:prstGeom prst="roundRect">
             <a:avLst/>
@@ -5920,62 +5604,59 @@
           </a:fontRef>
         </p:style>
         <p:txBody>
-          <a:bodyPr rtlCol="0" anchor="ctr" lIns="228600" rIns="228600" tIns="228600"/>
+          <a:bodyPr rtlCol="0" anchor="ctr" lIns="182880" rIns="182880" tIns="182880"/>
           <a:lstStyle/>
           <a:p>
             <a:pPr algn="ctr">
-              <a:defRPr sz="1100" b="1">
+              <a:defRPr sz="1000" b="1">
+                <a:solidFill>
+                  <a:srgbClr val="66625C"/>
+                </a:solidFill>
+              </a:defRPr>
+            </a:pPr>
+            <a:r>
+              <a:t>Stream 1</a:t>
+            </a:r>
+            <a:br/>
+          </a:p>
+          <a:p>
+            <a:pPr>
+              <a:defRPr sz="2200" b="1">
+                <a:solidFill>
+                  <a:srgbClr val="225E42"/>
+                </a:solidFill>
+                <a:latin typeface="Georgia"/>
+              </a:defRPr>
+            </a:pPr>
+            <a:r>
+              <a:t>1.00%</a:t>
+            </a:r>
+            <a:br/>
+          </a:p>
+          <a:p>
+            <a:pPr>
+              <a:defRPr sz="1200" b="1">
                 <a:solidFill>
                   <a:srgbClr val="171717"/>
                 </a:solidFill>
-                <a:latin typeface="Helvetica"/>
-              </a:defRPr>
-            </a:pPr>
-            <a:r>
-              <a:t>TAM</a:t>
-            </a:r>
-            <a:br/>
-          </a:p>
-          <a:p>
-            <a:pPr>
-              <a:defRPr sz="2800" b="1">
-                <a:solidFill>
-                  <a:srgbClr val="171717"/>
-                </a:solidFill>
-                <a:latin typeface="Georgia"/>
-              </a:defRPr>
-            </a:pPr>
-            <a:r>
-              <a:t>$120 Trillion</a:t>
-            </a:r>
-            <a:br/>
-          </a:p>
-          <a:p>
-            <a:pPr>
-              <a:defRPr sz="1600" b="1">
-                <a:solidFill>
-                  <a:srgbClr val="171717"/>
-                </a:solidFill>
-                <a:latin typeface="Georgia"/>
-              </a:defRPr>
-            </a:pPr>
-            <a:r>
-              <a:t>Global B2B Payments</a:t>
-            </a:r>
-            <a:br/>
-            <a:br/>
-          </a:p>
-          <a:p>
-            <a:pPr>
-              <a:defRPr sz="1100">
+              </a:defRPr>
+            </a:pPr>
+            <a:r>
+              <a:t>Drawdown Fee</a:t>
+            </a:r>
+            <a:br/>
+            <a:br/>
+          </a:p>
+          <a:p>
+            <a:pPr>
+              <a:defRPr sz="1000">
                 <a:solidFill>
                   <a:srgbClr val="66625C"/>
                 </a:solidFill>
-                <a:latin typeface="Helvetica"/>
-              </a:defRPr>
-            </a:pPr>
-            <a:r>
-              <a:t>The total annual volume of invoice payments between businesses worldwide across all sectors.</a:t>
+              </a:defRPr>
+            </a:pPr>
+            <a:r>
+              <a:t>Flat fee on accelerated receivables (18%–24% annualized capital return).</a:t>
             </a:r>
           </a:p>
         </p:txBody>
@@ -5988,8 +5669,8 @@
         </p:nvSpPr>
         <p:spPr>
           <a:xfrm>
-            <a:off x="4343400" y="1645920"/>
-            <a:ext cx="3383280" cy="3840480"/>
+            <a:off x="2880360" y="1645920"/>
+            <a:ext cx="2011680" cy="3840480"/>
           </a:xfrm>
           <a:prstGeom prst="roundRect">
             <a:avLst/>
@@ -6018,62 +5699,59 @@
           </a:fontRef>
         </p:style>
         <p:txBody>
-          <a:bodyPr rtlCol="0" anchor="ctr" lIns="228600" rIns="228600" tIns="228600"/>
+          <a:bodyPr rtlCol="0" anchor="ctr" lIns="182880" rIns="182880" tIns="182880"/>
           <a:lstStyle/>
           <a:p>
             <a:pPr algn="ctr">
-              <a:defRPr sz="1100" b="1">
-                <a:solidFill>
-                  <a:srgbClr val="A65A24"/>
-                </a:solidFill>
-                <a:latin typeface="Helvetica"/>
-              </a:defRPr>
-            </a:pPr>
-            <a:r>
-              <a:t>SAM</a:t>
-            </a:r>
-            <a:br/>
-          </a:p>
-          <a:p>
-            <a:pPr>
-              <a:defRPr sz="2800" b="1">
-                <a:solidFill>
-                  <a:srgbClr val="A65A24"/>
+              <a:defRPr sz="1000" b="1">
+                <a:solidFill>
+                  <a:srgbClr val="66625C"/>
+                </a:solidFill>
+              </a:defRPr>
+            </a:pPr>
+            <a:r>
+              <a:t>Stream 2</a:t>
+            </a:r>
+            <a:br/>
+          </a:p>
+          <a:p>
+            <a:pPr>
+              <a:defRPr sz="2200" b="1">
+                <a:solidFill>
+                  <a:srgbClr val="171717"/>
                 </a:solidFill>
                 <a:latin typeface="Georgia"/>
               </a:defRPr>
             </a:pPr>
             <a:r>
-              <a:t>$18 Trillion</a:t>
-            </a:r>
-            <a:br/>
-          </a:p>
-          <a:p>
-            <a:pPr>
-              <a:defRPr sz="1600" b="1">
+              <a:t>0.15%</a:t>
+            </a:r>
+            <a:br/>
+          </a:p>
+          <a:p>
+            <a:pPr>
+              <a:defRPr sz="1200" b="1">
                 <a:solidFill>
                   <a:srgbClr val="171717"/>
                 </a:solidFill>
-                <a:latin typeface="Georgia"/>
-              </a:defRPr>
-            </a:pPr>
-            <a:r>
-              <a:t>European SME B2B Trade</a:t>
-            </a:r>
-            <a:br/>
-            <a:br/>
-          </a:p>
-          <a:p>
-            <a:pPr>
-              <a:defRPr sz="1100">
+              </a:defRPr>
+            </a:pPr>
+            <a:r>
+              <a:t>Netting Toll</a:t>
+            </a:r>
+            <a:br/>
+            <a:br/>
+          </a:p>
+          <a:p>
+            <a:pPr>
+              <a:defRPr sz="1000">
                 <a:solidFill>
                   <a:srgbClr val="66625C"/>
                 </a:solidFill>
-                <a:latin typeface="Helvetica"/>
-              </a:defRPr>
-            </a:pPr>
-            <a:r>
-              <a:t>Annual trade credit flow between European SMEs, representing $450B in working capital financing demand.</a:t>
+              </a:defRPr>
+            </a:pPr>
+            <a:r>
+              <a:t>Fee on gross debt extinguished without cash movement. High pure-margin software toll.</a:t>
             </a:r>
           </a:p>
         </p:txBody>
@@ -6086,8 +5764,8 @@
         </p:nvSpPr>
         <p:spPr>
           <a:xfrm>
-            <a:off x="7955280" y="1645920"/>
-            <a:ext cx="3383280" cy="3840480"/>
+            <a:off x="5029200" y="1645920"/>
+            <a:ext cx="2011680" cy="3840480"/>
           </a:xfrm>
           <a:prstGeom prst="roundRect">
             <a:avLst/>
@@ -6116,69 +5794,256 @@
           </a:fontRef>
         </p:style>
         <p:txBody>
-          <a:bodyPr rtlCol="0" anchor="ctr" lIns="228600" rIns="228600" tIns="228600"/>
+          <a:bodyPr rtlCol="0" anchor="ctr" lIns="182880" rIns="182880" tIns="182880"/>
           <a:lstStyle/>
           <a:p>
             <a:pPr algn="ctr">
-              <a:defRPr sz="1100" b="1">
+              <a:defRPr sz="1000" b="1">
+                <a:solidFill>
+                  <a:srgbClr val="66625C"/>
+                </a:solidFill>
+              </a:defRPr>
+            </a:pPr>
+            <a:r>
+              <a:t>Stream 3 (New)</a:t>
+            </a:r>
+            <a:br/>
+          </a:p>
+          <a:p>
+            <a:pPr>
+              <a:defRPr sz="2200" b="1">
                 <a:solidFill>
                   <a:srgbClr val="225E42"/>
                 </a:solidFill>
-                <a:latin typeface="Helvetica"/>
-              </a:defRPr>
-            </a:pPr>
-            <a:r>
-              <a:t>INITIAL BEACHHEAD (SOM)</a:t>
-            </a:r>
-            <a:br/>
-          </a:p>
-          <a:p>
-            <a:pPr>
-              <a:defRPr sz="2800" b="1">
-                <a:solidFill>
-                  <a:srgbClr val="225E42"/>
-                </a:solidFill>
                 <a:latin typeface="Georgia"/>
               </a:defRPr>
             </a:pPr>
             <a:r>
-              <a:t>$320 Billion</a:t>
-            </a:r>
-            <a:br/>
-          </a:p>
-          <a:p>
-            <a:pPr>
-              <a:defRPr sz="1600" b="1">
+              <a:t>3.25%</a:t>
+            </a:r>
+            <a:br/>
+          </a:p>
+          <a:p>
+            <a:pPr>
+              <a:defRPr sz="1200" b="1">
                 <a:solidFill>
                   <a:srgbClr val="171717"/>
                 </a:solidFill>
+              </a:defRPr>
+            </a:pPr>
+            <a:r>
+              <a:t>Escrow Float</a:t>
+            </a:r>
+            <a:br/>
+            <a:br/>
+          </a:p>
+          <a:p>
+            <a:pPr>
+              <a:defRPr sz="1000">
+                <a:solidFill>
+                  <a:srgbClr val="66625C"/>
+                </a:solidFill>
+              </a:defRPr>
+            </a:pPr>
+            <a:r>
+              <a:t>Risk-free central bank interest earned during 48–72h clearing buffer.</a:t>
+            </a:r>
+          </a:p>
+        </p:txBody>
+      </p:sp>
+      <p:sp>
+        <p:nvSpPr>
+          <p:cNvPr id="8" name="Rounded Rectangle 7"/>
+          <p:cNvSpPr/>
+          <p:nvPr/>
+        </p:nvSpPr>
+        <p:spPr>
+          <a:xfrm>
+            <a:off x="7178040" y="1645920"/>
+            <a:ext cx="2011680" cy="3840480"/>
+          </a:xfrm>
+          <a:prstGeom prst="roundRect">
+            <a:avLst/>
+          </a:prstGeom>
+          <a:solidFill>
+            <a:srgbClr val="FFFFFF"/>
+          </a:solidFill>
+          <a:ln w="12700">
+            <a:solidFill>
+              <a:srgbClr val="E4E0D8"/>
+            </a:solidFill>
+          </a:ln>
+        </p:spPr>
+        <p:style>
+          <a:lnRef idx="1">
+            <a:schemeClr val="accent1"/>
+          </a:lnRef>
+          <a:fillRef idx="3">
+            <a:schemeClr val="accent1"/>
+          </a:fillRef>
+          <a:effectRef idx="2">
+            <a:schemeClr val="accent1"/>
+          </a:effectRef>
+          <a:fontRef idx="minor">
+            <a:schemeClr val="lt1"/>
+          </a:fontRef>
+        </p:style>
+        <p:txBody>
+          <a:bodyPr rtlCol="0" anchor="ctr" lIns="182880" rIns="182880" tIns="182880"/>
+          <a:lstStyle/>
+          <a:p>
+            <a:pPr algn="ctr">
+              <a:defRPr sz="1000" b="1">
+                <a:solidFill>
+                  <a:srgbClr val="66625C"/>
+                </a:solidFill>
+              </a:defRPr>
+            </a:pPr>
+            <a:r>
+              <a:t>Stream 4</a:t>
+            </a:r>
+            <a:br/>
+          </a:p>
+          <a:p>
+            <a:pPr>
+              <a:defRPr sz="2200" b="1">
+                <a:solidFill>
+                  <a:srgbClr val="A65A24"/>
+                </a:solidFill>
                 <a:latin typeface="Georgia"/>
               </a:defRPr>
             </a:pPr>
             <a:r>
-              <a:t>Nordic B2B Ecosystem</a:t>
-            </a:r>
-            <a:br/>
-            <a:br/>
-          </a:p>
-          <a:p>
-            <a:pPr>
-              <a:defRPr sz="1100">
+              <a:t>1.25%–3.2%</a:t>
+            </a:r>
+            <a:br/>
+          </a:p>
+          <a:p>
+            <a:pPr>
+              <a:defRPr sz="1200" b="1">
+                <a:solidFill>
+                  <a:srgbClr val="171717"/>
+                </a:solidFill>
+              </a:defRPr>
+            </a:pPr>
+            <a:r>
+              <a:t>Installments</a:t>
+            </a:r>
+            <a:br/>
+            <a:br/>
+          </a:p>
+          <a:p>
+            <a:pPr>
+              <a:defRPr sz="1000">
                 <a:solidFill>
                   <a:srgbClr val="66625C"/>
                 </a:solidFill>
-                <a:latin typeface="Helvetica"/>
-              </a:defRPr>
-            </a:pPr>
-            <a:r>
-              <a:t>Sweden, Norway, Denmark, Finland. 1.2M registered businesses with 70%+ concentrated on Fortnox and Visma.</a:t>
-            </a:r>
-          </a:p>
-        </p:txBody>
-      </p:sp>
-      <p:sp>
-        <p:nvSpPr>
-          <p:cNvPr id="8" name="Rounded Rectangle 7"/>
+              </a:defRPr>
+            </a:pPr>
+            <a:r>
+              <a:t>2, 3, or 4-month installment financing fees on net payables (BAS 2840).</a:t>
+            </a:r>
+          </a:p>
+        </p:txBody>
+      </p:sp>
+      <p:sp>
+        <p:nvSpPr>
+          <p:cNvPr id="9" name="Rounded Rectangle 8"/>
+          <p:cNvSpPr/>
+          <p:nvPr/>
+        </p:nvSpPr>
+        <p:spPr>
+          <a:xfrm>
+            <a:off x="9326880" y="1645920"/>
+            <a:ext cx="2011680" cy="3840480"/>
+          </a:xfrm>
+          <a:prstGeom prst="roundRect">
+            <a:avLst/>
+          </a:prstGeom>
+          <a:solidFill>
+            <a:srgbClr val="FFFFFF"/>
+          </a:solidFill>
+          <a:ln w="12700">
+            <a:solidFill>
+              <a:srgbClr val="E4E0D8"/>
+            </a:solidFill>
+          </a:ln>
+        </p:spPr>
+        <p:style>
+          <a:lnRef idx="1">
+            <a:schemeClr val="accent1"/>
+          </a:lnRef>
+          <a:fillRef idx="3">
+            <a:schemeClr val="accent1"/>
+          </a:fillRef>
+          <a:effectRef idx="2">
+            <a:schemeClr val="accent1"/>
+          </a:effectRef>
+          <a:fontRef idx="minor">
+            <a:schemeClr val="lt1"/>
+          </a:fontRef>
+        </p:style>
+        <p:txBody>
+          <a:bodyPr rtlCol="0" anchor="ctr" lIns="182880" rIns="182880" tIns="182880"/>
+          <a:lstStyle/>
+          <a:p>
+            <a:pPr algn="ctr">
+              <a:defRPr sz="1000" b="1">
+                <a:solidFill>
+                  <a:srgbClr val="66625C"/>
+                </a:solidFill>
+              </a:defRPr>
+            </a:pPr>
+            <a:r>
+              <a:t>Stream 5</a:t>
+            </a:r>
+            <a:br/>
+          </a:p>
+          <a:p>
+            <a:pPr>
+              <a:defRPr sz="2200" b="1">
+                <a:solidFill>
+                  <a:srgbClr val="66625C"/>
+                </a:solidFill>
+                <a:latin typeface="Georgia"/>
+              </a:defRPr>
+            </a:pPr>
+            <a:r>
+              <a:t>€49–€499</a:t>
+            </a:r>
+            <a:br/>
+          </a:p>
+          <a:p>
+            <a:pPr>
+              <a:defRPr sz="1200" b="1">
+                <a:solidFill>
+                  <a:srgbClr val="171717"/>
+                </a:solidFill>
+              </a:defRPr>
+            </a:pPr>
+            <a:r>
+              <a:t>SaaS Sub</a:t>
+            </a:r>
+            <a:br/>
+            <a:br/>
+          </a:p>
+          <a:p>
+            <a:pPr>
+              <a:defRPr sz="1000">
+                <a:solidFill>
+                  <a:srgbClr val="66625C"/>
+                </a:solidFill>
+              </a:defRPr>
+            </a:pPr>
+            <a:r>
+              <a:t>Monthly tier for treasury automation and multi-entity ERP sync.</a:t>
+            </a:r>
+          </a:p>
+        </p:txBody>
+      </p:sp>
+      <p:sp>
+        <p:nvSpPr>
+          <p:cNvPr id="10" name="Rounded Rectangle 9"/>
           <p:cNvSpPr/>
           <p:nvPr/>
         </p:nvSpPr>
@@ -6218,15 +6083,14 @@
           <a:lstStyle/>
           <a:p>
             <a:pPr algn="ctr">
-              <a:defRPr sz="1100">
-                <a:solidFill>
-                  <a:srgbClr val="66625C"/>
-                </a:solidFill>
-                <a:latin typeface="Helvetica"/>
-              </a:defRPr>
-            </a:pPr>
-            <a:r>
-              <a:t>📍 Nordic Advantage: 100% digital business registries, BankID identity, standard BAS chart of accounts, and high ERP digital maturity.</a:t>
+              <a:defRPr sz="1100" b="1">
+                <a:solidFill>
+                  <a:srgbClr val="225E42"/>
+                </a:solidFill>
+              </a:defRPr>
+            </a:pPr>
+            <a:r>
+              <a:t>Blended Unit Economics: CAC &lt; $85  |  Payback &lt; 2 months  |  Gross Margin &gt; 85%  |  LTV / CAC &gt; 18x</a:t>
             </a:r>
           </a:p>
         </p:txBody>
@@ -6323,7 +6187,7 @@
               </a:defRPr>
             </a:pPr>
             <a:r>
-              <a:t>COMPETITION // DIFFERENTIATION</a:t>
+              <a:t>MARKET SIZE // TAM SAM SOM</a:t>
             </a:r>
           </a:p>
         </p:txBody>
@@ -6336,7 +6200,7 @@
         </p:nvSpPr>
         <p:spPr>
           <a:xfrm>
-            <a:off x="731520" y="685800"/>
+            <a:off x="731520" y="658368"/>
             <a:ext cx="10698480" cy="640080"/>
           </a:xfrm>
           <a:prstGeom prst="rect">
@@ -6351,7 +6215,7 @@
           <a:lstStyle/>
           <a:p>
             <a:pPr>
-              <a:defRPr sz="2400" b="1">
+              <a:defRPr sz="2300" b="1">
                 <a:solidFill>
                   <a:srgbClr val="171717"/>
                 </a:solidFill>
@@ -6359,12 +6223,500 @@
               </a:defRPr>
             </a:pPr>
             <a:r>
+              <a:t>A Trillion-Dollar Global Settlement Pool</a:t>
+            </a:r>
+          </a:p>
+          <a:p>
+            <a:pPr>
+              <a:defRPr sz="1150">
+                <a:solidFill>
+                  <a:srgbClr val="66625C"/>
+                </a:solidFill>
+                <a:latin typeface="Helvetica"/>
+              </a:defRPr>
+            </a:pPr>
+            <a:r>
+              <a:t>Targeting the massive gap in enterprise B2B payments</a:t>
+            </a:r>
+          </a:p>
+        </p:txBody>
+      </p:sp>
+      <p:sp>
+        <p:nvSpPr>
+          <p:cNvPr id="5" name="Rounded Rectangle 4"/>
+          <p:cNvSpPr/>
+          <p:nvPr/>
+        </p:nvSpPr>
+        <p:spPr>
+          <a:xfrm>
+            <a:off x="731520" y="1645920"/>
+            <a:ext cx="3383280" cy="3840480"/>
+          </a:xfrm>
+          <a:prstGeom prst="roundRect">
+            <a:avLst/>
+          </a:prstGeom>
+          <a:solidFill>
+            <a:srgbClr val="FFFFFF"/>
+          </a:solidFill>
+          <a:ln w="12700">
+            <a:solidFill>
+              <a:srgbClr val="E4E0D8"/>
+            </a:solidFill>
+          </a:ln>
+        </p:spPr>
+        <p:style>
+          <a:lnRef idx="1">
+            <a:schemeClr val="accent1"/>
+          </a:lnRef>
+          <a:fillRef idx="3">
+            <a:schemeClr val="accent1"/>
+          </a:fillRef>
+          <a:effectRef idx="2">
+            <a:schemeClr val="accent1"/>
+          </a:effectRef>
+          <a:fontRef idx="minor">
+            <a:schemeClr val="lt1"/>
+          </a:fontRef>
+        </p:style>
+        <p:txBody>
+          <a:bodyPr rtlCol="0" anchor="ctr" lIns="228600" rIns="228600" tIns="228600"/>
+          <a:lstStyle/>
+          <a:p>
+            <a:pPr algn="ctr">
+              <a:defRPr sz="1100" b="1">
+                <a:solidFill>
+                  <a:srgbClr val="171717"/>
+                </a:solidFill>
+              </a:defRPr>
+            </a:pPr>
+            <a:r>
+              <a:t>TAM</a:t>
+            </a:r>
+            <a:br/>
+          </a:p>
+          <a:p>
+            <a:pPr>
+              <a:defRPr sz="2800" b="1">
+                <a:solidFill>
+                  <a:srgbClr val="171717"/>
+                </a:solidFill>
+                <a:latin typeface="Georgia"/>
+              </a:defRPr>
+            </a:pPr>
+            <a:r>
+              <a:t>$120 Trillion</a:t>
+            </a:r>
+            <a:br/>
+          </a:p>
+          <a:p>
+            <a:pPr>
+              <a:defRPr sz="1600" b="1">
+                <a:solidFill>
+                  <a:srgbClr val="171717"/>
+                </a:solidFill>
+                <a:latin typeface="Georgia"/>
+              </a:defRPr>
+            </a:pPr>
+            <a:r>
+              <a:t>Global B2B Payments</a:t>
+            </a:r>
+            <a:br/>
+            <a:br/>
+          </a:p>
+          <a:p>
+            <a:pPr>
+              <a:defRPr sz="1100">
+                <a:solidFill>
+                  <a:srgbClr val="66625C"/>
+                </a:solidFill>
+              </a:defRPr>
+            </a:pPr>
+            <a:r>
+              <a:t>The total annual volume of invoice payments between businesses worldwide across all sectors.</a:t>
+            </a:r>
+          </a:p>
+        </p:txBody>
+      </p:sp>
+      <p:sp>
+        <p:nvSpPr>
+          <p:cNvPr id="6" name="Rounded Rectangle 5"/>
+          <p:cNvSpPr/>
+          <p:nvPr/>
+        </p:nvSpPr>
+        <p:spPr>
+          <a:xfrm>
+            <a:off x="4343400" y="1645920"/>
+            <a:ext cx="3383280" cy="3840480"/>
+          </a:xfrm>
+          <a:prstGeom prst="roundRect">
+            <a:avLst/>
+          </a:prstGeom>
+          <a:solidFill>
+            <a:srgbClr val="FFFFFF"/>
+          </a:solidFill>
+          <a:ln w="12700">
+            <a:solidFill>
+              <a:srgbClr val="E4E0D8"/>
+            </a:solidFill>
+          </a:ln>
+        </p:spPr>
+        <p:style>
+          <a:lnRef idx="1">
+            <a:schemeClr val="accent1"/>
+          </a:lnRef>
+          <a:fillRef idx="3">
+            <a:schemeClr val="accent1"/>
+          </a:fillRef>
+          <a:effectRef idx="2">
+            <a:schemeClr val="accent1"/>
+          </a:effectRef>
+          <a:fontRef idx="minor">
+            <a:schemeClr val="lt1"/>
+          </a:fontRef>
+        </p:style>
+        <p:txBody>
+          <a:bodyPr rtlCol="0" anchor="ctr" lIns="228600" rIns="228600" tIns="228600"/>
+          <a:lstStyle/>
+          <a:p>
+            <a:pPr algn="ctr">
+              <a:defRPr sz="1100" b="1">
+                <a:solidFill>
+                  <a:srgbClr val="A65A24"/>
+                </a:solidFill>
+              </a:defRPr>
+            </a:pPr>
+            <a:r>
+              <a:t>SAM</a:t>
+            </a:r>
+            <a:br/>
+          </a:p>
+          <a:p>
+            <a:pPr>
+              <a:defRPr sz="2800" b="1">
+                <a:solidFill>
+                  <a:srgbClr val="A65A24"/>
+                </a:solidFill>
+                <a:latin typeface="Georgia"/>
+              </a:defRPr>
+            </a:pPr>
+            <a:r>
+              <a:t>$18 Trillion</a:t>
+            </a:r>
+            <a:br/>
+          </a:p>
+          <a:p>
+            <a:pPr>
+              <a:defRPr sz="1600" b="1">
+                <a:solidFill>
+                  <a:srgbClr val="171717"/>
+                </a:solidFill>
+                <a:latin typeface="Georgia"/>
+              </a:defRPr>
+            </a:pPr>
+            <a:r>
+              <a:t>European SME B2B Trade</a:t>
+            </a:r>
+            <a:br/>
+            <a:br/>
+          </a:p>
+          <a:p>
+            <a:pPr>
+              <a:defRPr sz="1100">
+                <a:solidFill>
+                  <a:srgbClr val="66625C"/>
+                </a:solidFill>
+              </a:defRPr>
+            </a:pPr>
+            <a:r>
+              <a:t>Annual trade credit flow between European SMEs, representing $450B in working capital financing demand.</a:t>
+            </a:r>
+          </a:p>
+        </p:txBody>
+      </p:sp>
+      <p:sp>
+        <p:nvSpPr>
+          <p:cNvPr id="7" name="Rounded Rectangle 6"/>
+          <p:cNvSpPr/>
+          <p:nvPr/>
+        </p:nvSpPr>
+        <p:spPr>
+          <a:xfrm>
+            <a:off x="7955280" y="1645920"/>
+            <a:ext cx="3383280" cy="3840480"/>
+          </a:xfrm>
+          <a:prstGeom prst="roundRect">
+            <a:avLst/>
+          </a:prstGeom>
+          <a:solidFill>
+            <a:srgbClr val="FFFFFF"/>
+          </a:solidFill>
+          <a:ln w="12700">
+            <a:solidFill>
+              <a:srgbClr val="E4E0D8"/>
+            </a:solidFill>
+          </a:ln>
+        </p:spPr>
+        <p:style>
+          <a:lnRef idx="1">
+            <a:schemeClr val="accent1"/>
+          </a:lnRef>
+          <a:fillRef idx="3">
+            <a:schemeClr val="accent1"/>
+          </a:fillRef>
+          <a:effectRef idx="2">
+            <a:schemeClr val="accent1"/>
+          </a:effectRef>
+          <a:fontRef idx="minor">
+            <a:schemeClr val="lt1"/>
+          </a:fontRef>
+        </p:style>
+        <p:txBody>
+          <a:bodyPr rtlCol="0" anchor="ctr" lIns="228600" rIns="228600" tIns="228600"/>
+          <a:lstStyle/>
+          <a:p>
+            <a:pPr algn="ctr">
+              <a:defRPr sz="1100" b="1">
+                <a:solidFill>
+                  <a:srgbClr val="225E42"/>
+                </a:solidFill>
+              </a:defRPr>
+            </a:pPr>
+            <a:r>
+              <a:t>INITIAL BEACHHEAD (SOM)</a:t>
+            </a:r>
+            <a:br/>
+          </a:p>
+          <a:p>
+            <a:pPr>
+              <a:defRPr sz="2800" b="1">
+                <a:solidFill>
+                  <a:srgbClr val="225E42"/>
+                </a:solidFill>
+                <a:latin typeface="Georgia"/>
+              </a:defRPr>
+            </a:pPr>
+            <a:r>
+              <a:t>$320 Billion</a:t>
+            </a:r>
+            <a:br/>
+          </a:p>
+          <a:p>
+            <a:pPr>
+              <a:defRPr sz="1600" b="1">
+                <a:solidFill>
+                  <a:srgbClr val="171717"/>
+                </a:solidFill>
+                <a:latin typeface="Georgia"/>
+              </a:defRPr>
+            </a:pPr>
+            <a:r>
+              <a:t>Nordic B2B Ecosystem</a:t>
+            </a:r>
+            <a:br/>
+            <a:br/>
+          </a:p>
+          <a:p>
+            <a:pPr>
+              <a:defRPr sz="1100">
+                <a:solidFill>
+                  <a:srgbClr val="66625C"/>
+                </a:solidFill>
+              </a:defRPr>
+            </a:pPr>
+            <a:r>
+              <a:t>Sweden, Norway, Denmark, Finland. 1.2M registered businesses with 70%+ concentrated on Fortnox and Visma.</a:t>
+            </a:r>
+          </a:p>
+        </p:txBody>
+      </p:sp>
+      <p:sp>
+        <p:nvSpPr>
+          <p:cNvPr id="8" name="Rounded Rectangle 7"/>
+          <p:cNvSpPr/>
+          <p:nvPr/>
+        </p:nvSpPr>
+        <p:spPr>
+          <a:xfrm>
+            <a:off x="731520" y="5669280"/>
+            <a:ext cx="10607040" cy="640080"/>
+          </a:xfrm>
+          <a:prstGeom prst="roundRect">
+            <a:avLst/>
+          </a:prstGeom>
+          <a:solidFill>
+            <a:srgbClr val="F3F0EA"/>
+          </a:solidFill>
+          <a:ln w="12700">
+            <a:solidFill>
+              <a:srgbClr val="E4E0D8"/>
+            </a:solidFill>
+          </a:ln>
+        </p:spPr>
+        <p:style>
+          <a:lnRef idx="1">
+            <a:schemeClr val="accent1"/>
+          </a:lnRef>
+          <a:fillRef idx="3">
+            <a:schemeClr val="accent1"/>
+          </a:fillRef>
+          <a:effectRef idx="2">
+            <a:schemeClr val="accent1"/>
+          </a:effectRef>
+          <a:fontRef idx="minor">
+            <a:schemeClr val="lt1"/>
+          </a:fontRef>
+        </p:style>
+        <p:txBody>
+          <a:bodyPr rtlCol="0" anchor="ctr" lIns="137160" tIns="137160"/>
+          <a:lstStyle/>
+          <a:p>
+            <a:pPr algn="ctr">
+              <a:defRPr sz="1100">
+                <a:solidFill>
+                  <a:srgbClr val="66625C"/>
+                </a:solidFill>
+              </a:defRPr>
+            </a:pPr>
+            <a:r>
+              <a:t>📍 Nordic Advantage: 100% digital business registries, BankID identity, standard BAS chart of accounts, and high ERP digital maturity.</a:t>
+            </a:r>
+          </a:p>
+        </p:txBody>
+      </p:sp>
+    </p:spTree>
+  </p:cSld>
+  <p:clrMapOvr>
+    <a:masterClrMapping/>
+  </p:clrMapOvr>
+</p:sld>
+</file>
+
+<file path=ppt/slides/slide16.xml><?xml version="1.0" encoding="utf-8"?>
+<p:sld xmlns:a="http://schemas.openxmlformats.org/drawingml/2006/main" xmlns:p="http://schemas.openxmlformats.org/presentationml/2006/main" xmlns:r="http://schemas.openxmlformats.org/officeDocument/2006/relationships">
+  <p:cSld>
+    <p:spTree>
+      <p:nvGrpSpPr>
+        <p:cNvPr id="1" name=""/>
+        <p:cNvGrpSpPr/>
+        <p:nvPr/>
+      </p:nvGrpSpPr>
+      <p:grpSpPr/>
+      <p:sp>
+        <p:nvSpPr>
+          <p:cNvPr id="2" name="Rectangle 1"/>
+          <p:cNvSpPr/>
+          <p:nvPr/>
+        </p:nvSpPr>
+        <p:spPr>
+          <a:xfrm>
+            <a:off x="0" y="0"/>
+            <a:ext cx="12191695" cy="6858000"/>
+          </a:xfrm>
+          <a:prstGeom prst="rect">
+            <a:avLst/>
+          </a:prstGeom>
+          <a:solidFill>
+            <a:srgbClr val="FAF8F5"/>
+          </a:solidFill>
+          <a:ln>
+            <a:noFill/>
+          </a:ln>
+        </p:spPr>
+        <p:style>
+          <a:lnRef idx="1">
+            <a:schemeClr val="accent1"/>
+          </a:lnRef>
+          <a:fillRef idx="3">
+            <a:schemeClr val="accent1"/>
+          </a:fillRef>
+          <a:effectRef idx="2">
+            <a:schemeClr val="accent1"/>
+          </a:effectRef>
+          <a:fontRef idx="minor">
+            <a:schemeClr val="lt1"/>
+          </a:fontRef>
+        </p:style>
+        <p:txBody>
+          <a:bodyPr rtlCol="0" anchor="ctr"/>
+          <a:lstStyle/>
+          <a:p>
+            <a:pPr algn="ctr"/>
+          </a:p>
+        </p:txBody>
+      </p:sp>
+      <p:sp>
+        <p:nvSpPr>
+          <p:cNvPr id="3" name="TextBox 2"/>
+          <p:cNvSpPr txBox="1"/>
+          <p:nvPr/>
+        </p:nvSpPr>
+        <p:spPr>
+          <a:xfrm>
+            <a:off x="731520" y="365760"/>
+            <a:ext cx="10698480" cy="320040"/>
+          </a:xfrm>
+          <a:prstGeom prst="rect">
+            <a:avLst/>
+          </a:prstGeom>
+          <a:noFill/>
+        </p:spPr>
+        <p:txBody>
+          <a:bodyPr wrap="square" lIns="0" tIns="0" rIns="0" bIns="0">
+            <a:spAutoFit/>
+          </a:bodyPr>
+          <a:lstStyle/>
+          <a:p>
+            <a:pPr>
+              <a:defRPr sz="1000" b="1">
+                <a:solidFill>
+                  <a:srgbClr val="225E42"/>
+                </a:solidFill>
+                <a:latin typeface="Helvetica"/>
+              </a:defRPr>
+            </a:pPr>
+            <a:r>
+              <a:t>COMPETITION // DEFENSIBILITY</a:t>
+            </a:r>
+          </a:p>
+        </p:txBody>
+      </p:sp>
+      <p:sp>
+        <p:nvSpPr>
+          <p:cNvPr id="4" name="TextBox 3"/>
+          <p:cNvSpPr txBox="1"/>
+          <p:nvPr/>
+        </p:nvSpPr>
+        <p:spPr>
+          <a:xfrm>
+            <a:off x="731520" y="658368"/>
+            <a:ext cx="10698480" cy="640080"/>
+          </a:xfrm>
+          <a:prstGeom prst="rect">
+            <a:avLst/>
+          </a:prstGeom>
+          <a:noFill/>
+        </p:spPr>
+        <p:txBody>
+          <a:bodyPr wrap="square" lIns="0" tIns="0" rIns="0" bIns="0">
+            <a:spAutoFit/>
+          </a:bodyPr>
+          <a:lstStyle/>
+          <a:p>
+            <a:pPr>
+              <a:defRPr sz="2300" b="1">
+                <a:solidFill>
+                  <a:srgbClr val="171717"/>
+                </a:solidFill>
+                <a:latin typeface="Georgia"/>
+              </a:defRPr>
+            </a:pPr>
+            <a:r>
               <a:t>Why Incumbents Cannot Replicate Us</a:t>
             </a:r>
           </a:p>
           <a:p>
             <a:pPr>
-              <a:defRPr sz="1200">
+              <a:defRPr sz="1150">
                 <a:solidFill>
                   <a:srgbClr val="66625C"/>
                 </a:solidFill>
@@ -6372,7 +6724,7 @@
               </a:defRPr>
             </a:pPr>
             <a:r>
-              <a:t>Comparing settlement mechanisms across financial rails</a:t>
+              <a:t>The 'Switzerland Protocol' advantage over siloed ERPs and legacy banks</a:t>
             </a:r>
           </a:p>
         </p:txBody>
@@ -7026,7 +7378,7 @@
 </p:sld>
 </file>
 
-<file path=ppt/slides/slide16.xml><?xml version="1.0" encoding="utf-8"?>
+<file path=ppt/slides/slide17.xml><?xml version="1.0" encoding="utf-8"?>
 <p:sld xmlns:a="http://schemas.openxmlformats.org/drawingml/2006/main" xmlns:p="http://schemas.openxmlformats.org/presentationml/2006/main" xmlns:r="http://schemas.openxmlformats.org/officeDocument/2006/relationships">
   <p:cSld>
     <p:spTree>
@@ -7110,7 +7462,7 @@
               </a:defRPr>
             </a:pPr>
             <a:r>
-              <a:t>INVESTMENT // THE OFFERING</a:t>
+              <a:t>EXECUTION // REAL-WORLD TRACTION</a:t>
             </a:r>
           </a:p>
         </p:txBody>
@@ -7123,7 +7475,7 @@
         </p:nvSpPr>
         <p:spPr>
           <a:xfrm>
-            <a:off x="731520" y="685800"/>
+            <a:off x="731520" y="658368"/>
             <a:ext cx="10698480" cy="640080"/>
           </a:xfrm>
           <a:prstGeom prst="rect">
@@ -7138,7 +7490,7 @@
           <a:lstStyle/>
           <a:p>
             <a:pPr>
-              <a:defRPr sz="2400" b="1">
+              <a:defRPr sz="2300" b="1">
                 <a:solidFill>
                   <a:srgbClr val="171717"/>
                 </a:solidFill>
@@ -7146,12 +7498,12 @@
               </a:defRPr>
             </a:pPr>
             <a:r>
-              <a:t>The Ask: $4.0M Seed / Series A</a:t>
-            </a:r>
-          </a:p>
-          <a:p>
-            <a:pPr>
-              <a:defRPr sz="1200">
+              <a:t>Live in Production Today</a:t>
+            </a:r>
+          </a:p>
+          <a:p>
+            <a:pPr>
+              <a:defRPr sz="1150">
                 <a:solidFill>
                   <a:srgbClr val="66625C"/>
                 </a:solidFill>
@@ -7159,7 +7511,7 @@
               </a:defRPr>
             </a:pPr>
             <a:r>
-              <a:t>High capital efficiency: equity funds software &amp; distribution, not expensive debt facilities</a:t>
+              <a:t>De-risked software architecture actively deployed on production infrastructure</a:t>
             </a:r>
           </a:p>
         </p:txBody>
@@ -7206,127 +7558,66 @@
           <a:lstStyle/>
           <a:p>
             <a:pPr algn="ctr">
-              <a:defRPr sz="1400" b="1">
+              <a:defRPr sz="1200" b="1">
                 <a:solidFill>
                   <a:srgbClr val="171717"/>
                 </a:solidFill>
-                <a:latin typeface="Georgia"/>
-              </a:defRPr>
-            </a:pPr>
-            <a:r>
-              <a:t>USE OF PROCEEDS</a:t>
-            </a:r>
-            <a:br/>
-          </a:p>
-          <a:p>
-            <a:pPr>
-              <a:defRPr sz="1200" b="1">
-                <a:solidFill>
-                  <a:srgbClr val="225E42"/>
-                </a:solidFill>
-                <a:latin typeface="Helvetica"/>
-              </a:defRPr>
-            </a:pPr>
-            <a:r>
-              <a:t>40% ($1.6M) — ERP Connector Engineering</a:t>
-            </a:r>
-            <a:br/>
-          </a:p>
-          <a:p>
-            <a:pPr>
-              <a:defRPr sz="1050">
-                <a:solidFill>
-                  <a:srgbClr val="66625C"/>
-                </a:solidFill>
-                <a:latin typeface="Helvetica"/>
-              </a:defRPr>
-            </a:pPr>
-            <a:r>
-              <a:t>Visma, Xero, QuickBooks, SAP certified integrations</a:t>
-            </a:r>
-            <a:br/>
-          </a:p>
-          <a:p>
-            <a:pPr>
-              <a:defRPr sz="1200" b="1">
-                <a:solidFill>
-                  <a:srgbClr val="225E42"/>
-                </a:solidFill>
-                <a:latin typeface="Helvetica"/>
-              </a:defRPr>
-            </a:pPr>
-            <a:r>
-              <a:t>30% ($1.2M) — Anchor Enterprise Acquisition &amp; GTM</a:t>
-            </a:r>
-            <a:br/>
-          </a:p>
-          <a:p>
-            <a:pPr>
-              <a:defRPr sz="1050">
-                <a:solidFill>
-                  <a:srgbClr val="66625C"/>
-                </a:solidFill>
-                <a:latin typeface="Helvetica"/>
-              </a:defRPr>
-            </a:pPr>
-            <a:r>
-              <a:t>Contractor clusters and supply chain virality engine</a:t>
-            </a:r>
-            <a:br/>
-          </a:p>
-          <a:p>
-            <a:pPr>
-              <a:defRPr sz="1200" b="1">
-                <a:solidFill>
-                  <a:srgbClr val="225E42"/>
-                </a:solidFill>
-                <a:latin typeface="Helvetica"/>
-              </a:defRPr>
-            </a:pPr>
-            <a:r>
-              <a:t>18% ($720k) — SPV Warehouse Backstop &amp; Buffer</a:t>
-            </a:r>
-            <a:br/>
-          </a:p>
-          <a:p>
-            <a:pPr>
-              <a:defRPr sz="1050">
-                <a:solidFill>
-                  <a:srgbClr val="66625C"/>
-                </a:solidFill>
-                <a:latin typeface="Helvetica"/>
-              </a:defRPr>
-            </a:pPr>
-            <a:r>
-              <a:t>High-velocity debt facility for 100% SLA guarantee</a:t>
-            </a:r>
-            <a:br/>
-          </a:p>
-          <a:p>
-            <a:pPr>
-              <a:defRPr sz="1200" b="1">
-                <a:solidFill>
-                  <a:srgbClr val="225E42"/>
-                </a:solidFill>
-                <a:latin typeface="Helvetica"/>
-              </a:defRPr>
-            </a:pPr>
-            <a:r>
-              <a:t>12% ($480k) — Regulatory &amp; Escrow Compliance</a:t>
-            </a:r>
-            <a:br/>
-          </a:p>
-          <a:p>
-            <a:pPr>
-              <a:defRPr sz="1050">
-                <a:solidFill>
-                  <a:srgbClr val="66625C"/>
-                </a:solidFill>
-                <a:latin typeface="Helvetica"/>
-              </a:defRPr>
-            </a:pPr>
-            <a:r>
-              <a:t>Authorized segregated escrow custody under Swedish Lag 1944:181</a:t>
+              </a:defRPr>
+            </a:pPr>
+            <a:r>
+              <a:t>PRODUCTION MILESTONES DEPLOYED</a:t>
+            </a:r>
+            <a:br/>
+          </a:p>
+          <a:p>
+            <a:pPr>
+              <a:defRPr sz="1100">
+                <a:solidFill>
+                  <a:srgbClr val="171717"/>
+                </a:solidFill>
+              </a:defRPr>
+            </a:pPr>
+            <a:r>
+              <a:t>• Production URL Live: Deployed globally on Vercel at accounted-production.vercel.app.</a:t>
+            </a:r>
+            <a:br/>
+          </a:p>
+          <a:p>
+            <a:pPr>
+              <a:defRPr sz="1100">
+                <a:solidFill>
+                  <a:srgbClr val="171717"/>
+                </a:solidFill>
+              </a:defRPr>
+            </a:pPr>
+            <a:r>
+              <a:t>• Interactive Fortnox Companion: Public endpoint at /demo/fortnox-companion demonstrating live Fortnox API sync, working capital cards, and instant drawdowns.</a:t>
+            </a:r>
+            <a:br/>
+          </a:p>
+          <a:p>
+            <a:pPr>
+              <a:defRPr sz="1100">
+                <a:solidFill>
+                  <a:srgbClr val="171717"/>
+                </a:solidFill>
+              </a:defRPr>
+            </a:pPr>
+            <a:r>
+              <a:t>• BAS Double-Entry Engine: Auto-generates balanced Serie A verifikation vouchers (1510, 2440, 1930, 2890) with 0.00 kr difference.</a:t>
+            </a:r>
+            <a:br/>
+          </a:p>
+          <a:p>
+            <a:pPr>
+              <a:defRPr sz="1100">
+                <a:solidFill>
+                  <a:srgbClr val="171717"/>
+                </a:solidFill>
+              </a:defRPr>
+            </a:pPr>
+            <a:r>
+              <a:t>• Stockholm Startup Cohort: Actively testing with B2B tech startups in Stockholm to validate rapid BankID attestation and inter-tenant OrgNr routing.</a:t>
             </a:r>
             <a:br/>
           </a:p>
@@ -7374,14 +7665,440 @@
           <a:lstStyle/>
           <a:p>
             <a:pPr algn="ctr">
+              <a:defRPr sz="1200" b="1">
+                <a:solidFill>
+                  <a:srgbClr val="225E42"/>
+                </a:solidFill>
+              </a:defRPr>
+            </a:pPr>
+            <a:r>
+              <a:t>LIVE TESTED UNDERWRITING TELEMETRY</a:t>
+            </a:r>
+            <a:br/>
+          </a:p>
+          <a:p>
+            <a:pPr>
+              <a:defRPr sz="2000" b="1">
+                <a:solidFill>
+                  <a:srgbClr val="171717"/>
+                </a:solidFill>
+                <a:latin typeface="Georgia"/>
+              </a:defRPr>
+            </a:pPr>
+            <a:r>
+              <a:t>Accounted Network Score (ANS)</a:t>
+            </a:r>
+            <a:br/>
+            <a:br/>
+          </a:p>
+          <a:p>
+            <a:pPr>
+              <a:defRPr sz="1100">
+                <a:solidFill>
+                  <a:srgbClr val="171717"/>
+                </a:solidFill>
+              </a:defRPr>
+            </a:pPr>
+            <a:r>
+              <a:t>Underwriting pipeline active with:</a:t>
+            </a:r>
+            <a:br/>
+            <a:r>
+              <a:t>• Quick Ratio (Kassalikviditet) &amp; Equity monitoring</a:t>
+            </a:r>
+            <a:br/>
+            <a:r>
+              <a:t>• Skattekonto (BAS 1630) tax arrears radar</a:t>
+            </a:r>
+            <a:br/>
+            <a:r>
+              <a:t>• Live Open Banking bank balance verification via PSD2</a:t>
+            </a:r>
+            <a:br/>
+            <a:r>
+              <a:t>• Counterparty trade reciprocity scoring</a:t>
+            </a:r>
+            <a:br/>
+            <a:br/>
+          </a:p>
+          <a:p>
+            <a:pPr>
               <a:defRPr sz="1100" b="1">
                 <a:solidFill>
                   <a:srgbClr val="225E42"/>
                 </a:solidFill>
+              </a:defRPr>
+            </a:pPr>
+            <a:r>
+              <a:t>Result: Eliminates 95% of manual factoring ops costs.</a:t>
+            </a:r>
+          </a:p>
+        </p:txBody>
+      </p:sp>
+    </p:spTree>
+  </p:cSld>
+  <p:clrMapOvr>
+    <a:masterClrMapping/>
+  </p:clrMapOvr>
+</p:sld>
+</file>
+
+<file path=ppt/slides/slide18.xml><?xml version="1.0" encoding="utf-8"?>
+<p:sld xmlns:a="http://schemas.openxmlformats.org/drawingml/2006/main" xmlns:p="http://schemas.openxmlformats.org/presentationml/2006/main" xmlns:r="http://schemas.openxmlformats.org/officeDocument/2006/relationships">
+  <p:cSld>
+    <p:spTree>
+      <p:nvGrpSpPr>
+        <p:cNvPr id="1" name=""/>
+        <p:cNvGrpSpPr/>
+        <p:nvPr/>
+      </p:nvGrpSpPr>
+      <p:grpSpPr/>
+      <p:sp>
+        <p:nvSpPr>
+          <p:cNvPr id="2" name="Rectangle 1"/>
+          <p:cNvSpPr/>
+          <p:nvPr/>
+        </p:nvSpPr>
+        <p:spPr>
+          <a:xfrm>
+            <a:off x="0" y="0"/>
+            <a:ext cx="12191695" cy="6858000"/>
+          </a:xfrm>
+          <a:prstGeom prst="rect">
+            <a:avLst/>
+          </a:prstGeom>
+          <a:solidFill>
+            <a:srgbClr val="FAF8F5"/>
+          </a:solidFill>
+          <a:ln>
+            <a:noFill/>
+          </a:ln>
+        </p:spPr>
+        <p:style>
+          <a:lnRef idx="1">
+            <a:schemeClr val="accent1"/>
+          </a:lnRef>
+          <a:fillRef idx="3">
+            <a:schemeClr val="accent1"/>
+          </a:fillRef>
+          <a:effectRef idx="2">
+            <a:schemeClr val="accent1"/>
+          </a:effectRef>
+          <a:fontRef idx="minor">
+            <a:schemeClr val="lt1"/>
+          </a:fontRef>
+        </p:style>
+        <p:txBody>
+          <a:bodyPr rtlCol="0" anchor="ctr"/>
+          <a:lstStyle/>
+          <a:p>
+            <a:pPr algn="ctr"/>
+          </a:p>
+        </p:txBody>
+      </p:sp>
+      <p:sp>
+        <p:nvSpPr>
+          <p:cNvPr id="3" name="TextBox 2"/>
+          <p:cNvSpPr txBox="1"/>
+          <p:nvPr/>
+        </p:nvSpPr>
+        <p:spPr>
+          <a:xfrm>
+            <a:off x="731520" y="365760"/>
+            <a:ext cx="10698480" cy="320040"/>
+          </a:xfrm>
+          <a:prstGeom prst="rect">
+            <a:avLst/>
+          </a:prstGeom>
+          <a:noFill/>
+        </p:spPr>
+        <p:txBody>
+          <a:bodyPr wrap="square" lIns="0" tIns="0" rIns="0" bIns="0">
+            <a:spAutoFit/>
+          </a:bodyPr>
+          <a:lstStyle/>
+          <a:p>
+            <a:pPr>
+              <a:defRPr sz="1000" b="1">
+                <a:solidFill>
+                  <a:srgbClr val="225E42"/>
+                </a:solidFill>
                 <a:latin typeface="Helvetica"/>
               </a:defRPr>
             </a:pPr>
             <a:r>
+              <a:t>INVESTMENT // THE OFFERING</a:t>
+            </a:r>
+          </a:p>
+        </p:txBody>
+      </p:sp>
+      <p:sp>
+        <p:nvSpPr>
+          <p:cNvPr id="4" name="TextBox 3"/>
+          <p:cNvSpPr txBox="1"/>
+          <p:nvPr/>
+        </p:nvSpPr>
+        <p:spPr>
+          <a:xfrm>
+            <a:off x="731520" y="658368"/>
+            <a:ext cx="10698480" cy="640080"/>
+          </a:xfrm>
+          <a:prstGeom prst="rect">
+            <a:avLst/>
+          </a:prstGeom>
+          <a:noFill/>
+        </p:spPr>
+        <p:txBody>
+          <a:bodyPr wrap="square" lIns="0" tIns="0" rIns="0" bIns="0">
+            <a:spAutoFit/>
+          </a:bodyPr>
+          <a:lstStyle/>
+          <a:p>
+            <a:pPr>
+              <a:defRPr sz="2300" b="1">
+                <a:solidFill>
+                  <a:srgbClr val="171717"/>
+                </a:solidFill>
+                <a:latin typeface="Georgia"/>
+              </a:defRPr>
+            </a:pPr>
+            <a:r>
+              <a:t>The Ask: $4.0M Seed / Series A</a:t>
+            </a:r>
+          </a:p>
+          <a:p>
+            <a:pPr>
+              <a:defRPr sz="1150">
+                <a:solidFill>
+                  <a:srgbClr val="66625C"/>
+                </a:solidFill>
+                <a:latin typeface="Helvetica"/>
+              </a:defRPr>
+            </a:pPr>
+            <a:r>
+              <a:t>High capital efficiency: equity funds software &amp; distribution, not expensive debt facilities</a:t>
+            </a:r>
+          </a:p>
+        </p:txBody>
+      </p:sp>
+      <p:sp>
+        <p:nvSpPr>
+          <p:cNvPr id="5" name="Rounded Rectangle 4"/>
+          <p:cNvSpPr/>
+          <p:nvPr/>
+        </p:nvSpPr>
+        <p:spPr>
+          <a:xfrm>
+            <a:off x="731520" y="1645920"/>
+            <a:ext cx="5120640" cy="4389120"/>
+          </a:xfrm>
+          <a:prstGeom prst="roundRect">
+            <a:avLst/>
+          </a:prstGeom>
+          <a:solidFill>
+            <a:srgbClr val="FFFFFF"/>
+          </a:solidFill>
+          <a:ln w="12700">
+            <a:solidFill>
+              <a:srgbClr val="E4E0D8"/>
+            </a:solidFill>
+          </a:ln>
+        </p:spPr>
+        <p:style>
+          <a:lnRef idx="1">
+            <a:schemeClr val="accent1"/>
+          </a:lnRef>
+          <a:fillRef idx="3">
+            <a:schemeClr val="accent1"/>
+          </a:fillRef>
+          <a:effectRef idx="2">
+            <a:schemeClr val="accent1"/>
+          </a:effectRef>
+          <a:fontRef idx="minor">
+            <a:schemeClr val="lt1"/>
+          </a:fontRef>
+        </p:style>
+        <p:txBody>
+          <a:bodyPr rtlCol="0" anchor="ctr" lIns="274320" rIns="274320" tIns="274320"/>
+          <a:lstStyle/>
+          <a:p>
+            <a:pPr algn="ctr">
+              <a:defRPr sz="1400" b="1">
+                <a:solidFill>
+                  <a:srgbClr val="171717"/>
+                </a:solidFill>
+                <a:latin typeface="Georgia"/>
+              </a:defRPr>
+            </a:pPr>
+            <a:r>
+              <a:t>USE OF PROCEEDS</a:t>
+            </a:r>
+            <a:br/>
+          </a:p>
+          <a:p>
+            <a:pPr>
+              <a:defRPr sz="1200" b="1">
+                <a:solidFill>
+                  <a:srgbClr val="225E42"/>
+                </a:solidFill>
+                <a:latin typeface="Helvetica"/>
+              </a:defRPr>
+            </a:pPr>
+            <a:r>
+              <a:t>40% ($1.6M) — ERP Connector Engineering</a:t>
+            </a:r>
+            <a:br/>
+          </a:p>
+          <a:p>
+            <a:pPr>
+              <a:defRPr sz="1050">
+                <a:solidFill>
+                  <a:srgbClr val="66625C"/>
+                </a:solidFill>
+                <a:latin typeface="Helvetica"/>
+              </a:defRPr>
+            </a:pPr>
+            <a:r>
+              <a:t>Visma, Xero, QuickBooks, SAP certified integrations</a:t>
+            </a:r>
+            <a:br/>
+          </a:p>
+          <a:p>
+            <a:pPr>
+              <a:defRPr sz="1200" b="1">
+                <a:solidFill>
+                  <a:srgbClr val="225E42"/>
+                </a:solidFill>
+                <a:latin typeface="Helvetica"/>
+              </a:defRPr>
+            </a:pPr>
+            <a:r>
+              <a:t>30% ($1.2M) — Anchor Enterprise Acquisition &amp; GTM</a:t>
+            </a:r>
+            <a:br/>
+          </a:p>
+          <a:p>
+            <a:pPr>
+              <a:defRPr sz="1050">
+                <a:solidFill>
+                  <a:srgbClr val="66625C"/>
+                </a:solidFill>
+                <a:latin typeface="Helvetica"/>
+              </a:defRPr>
+            </a:pPr>
+            <a:r>
+              <a:t>Contractor clusters and supply chain virality engine</a:t>
+            </a:r>
+            <a:br/>
+          </a:p>
+          <a:p>
+            <a:pPr>
+              <a:defRPr sz="1200" b="1">
+                <a:solidFill>
+                  <a:srgbClr val="225E42"/>
+                </a:solidFill>
+                <a:latin typeface="Helvetica"/>
+              </a:defRPr>
+            </a:pPr>
+            <a:r>
+              <a:t>18% ($720k) — SPV Warehouse Backstop &amp; Buffer</a:t>
+            </a:r>
+            <a:br/>
+          </a:p>
+          <a:p>
+            <a:pPr>
+              <a:defRPr sz="1050">
+                <a:solidFill>
+                  <a:srgbClr val="66625C"/>
+                </a:solidFill>
+                <a:latin typeface="Helvetica"/>
+              </a:defRPr>
+            </a:pPr>
+            <a:r>
+              <a:t>High-velocity debt facility for 100% SLA guarantee</a:t>
+            </a:r>
+            <a:br/>
+          </a:p>
+          <a:p>
+            <a:pPr>
+              <a:defRPr sz="1200" b="1">
+                <a:solidFill>
+                  <a:srgbClr val="225E42"/>
+                </a:solidFill>
+                <a:latin typeface="Helvetica"/>
+              </a:defRPr>
+            </a:pPr>
+            <a:r>
+              <a:t>12% ($480k) — Regulatory &amp; Escrow Compliance</a:t>
+            </a:r>
+            <a:br/>
+          </a:p>
+          <a:p>
+            <a:pPr>
+              <a:defRPr sz="1050">
+                <a:solidFill>
+                  <a:srgbClr val="66625C"/>
+                </a:solidFill>
+                <a:latin typeface="Helvetica"/>
+              </a:defRPr>
+            </a:pPr>
+            <a:r>
+              <a:t>Authorized segregated escrow custody under Swedish Lag 1944:181</a:t>
+            </a:r>
+            <a:br/>
+          </a:p>
+        </p:txBody>
+      </p:sp>
+      <p:sp>
+        <p:nvSpPr>
+          <p:cNvPr id="6" name="Rounded Rectangle 5"/>
+          <p:cNvSpPr/>
+          <p:nvPr/>
+        </p:nvSpPr>
+        <p:spPr>
+          <a:xfrm>
+            <a:off x="6217920" y="1645920"/>
+            <a:ext cx="5120640" cy="4389120"/>
+          </a:xfrm>
+          <a:prstGeom prst="roundRect">
+            <a:avLst/>
+          </a:prstGeom>
+          <a:solidFill>
+            <a:srgbClr val="F1F7F3"/>
+          </a:solidFill>
+          <a:ln w="12700">
+            <a:solidFill>
+              <a:srgbClr val="225E42"/>
+            </a:solidFill>
+          </a:ln>
+        </p:spPr>
+        <p:style>
+          <a:lnRef idx="1">
+            <a:schemeClr val="accent1"/>
+          </a:lnRef>
+          <a:fillRef idx="3">
+            <a:schemeClr val="accent1"/>
+          </a:fillRef>
+          <a:effectRef idx="2">
+            <a:schemeClr val="accent1"/>
+          </a:effectRef>
+          <a:fontRef idx="minor">
+            <a:schemeClr val="lt1"/>
+          </a:fontRef>
+        </p:style>
+        <p:txBody>
+          <a:bodyPr rtlCol="0" anchor="ctr" lIns="274320" rIns="274320" tIns="274320"/>
+          <a:lstStyle/>
+          <a:p>
+            <a:pPr algn="ctr">
+              <a:defRPr sz="1100" b="1">
+                <a:solidFill>
+                  <a:srgbClr val="225E42"/>
+                </a:solidFill>
+                <a:latin typeface="Helvetica"/>
+              </a:defRPr>
+            </a:pPr>
+            <a:r>
               <a:t>18-MONTH TARGET OUTCOMES</a:t>
             </a:r>
             <a:br/>
@@ -7407,7 +8124,6 @@
                 <a:solidFill>
                   <a:srgbClr val="66625C"/>
                 </a:solidFill>
-                <a:latin typeface="Helvetica"/>
               </a:defRPr>
             </a:pPr>
             <a:r>
@@ -7536,7 +8252,7 @@
               </a:defRPr>
             </a:pPr>
             <a:r>
-              <a:t>PROBLEM 01 // MACRO CRISIS</a:t>
+              <a:t>MACRO REALITY // MARKET SCALE</a:t>
             </a:r>
           </a:p>
         </p:txBody>
@@ -7549,7 +8265,7 @@
         </p:nvSpPr>
         <p:spPr>
           <a:xfrm>
-            <a:off x="731520" y="685800"/>
+            <a:off x="731520" y="658368"/>
             <a:ext cx="10698480" cy="640080"/>
           </a:xfrm>
           <a:prstGeom prst="rect">
@@ -7564,7 +8280,7 @@
           <a:lstStyle/>
           <a:p>
             <a:pPr>
-              <a:defRPr sz="2400" b="1">
+              <a:defRPr sz="2300" b="1">
                 <a:solidFill>
                   <a:srgbClr val="171717"/>
                 </a:solidFill>
@@ -7577,7 +8293,7 @@
           </a:p>
           <a:p>
             <a:pPr>
-              <a:defRPr sz="1200">
+              <a:defRPr sz="1150">
                 <a:solidFill>
                   <a:srgbClr val="66625C"/>
                 </a:solidFill>
@@ -7585,7 +8301,7 @@
               </a:defRPr>
             </a:pPr>
             <a:r>
-              <a:t>How 54-day payment cycles paralyze global enterprise supply chains</a:t>
+              <a:t>3x larger than all consumer card payments combined, yet running on 1970s primitives</a:t>
             </a:r>
           </a:p>
         </p:txBody>
@@ -7650,7 +8366,6 @@
                 <a:solidFill>
                   <a:srgbClr val="171717"/>
                 </a:solidFill>
-                <a:latin typeface="Helvetica"/>
               </a:defRPr>
             </a:pPr>
             <a:r>
@@ -7664,7 +8379,6 @@
                 <a:solidFill>
                   <a:srgbClr val="66625C"/>
                 </a:solidFill>
-                <a:latin typeface="Helvetica"/>
               </a:defRPr>
             </a:pPr>
             <a:r>
@@ -7733,7 +8447,6 @@
                 <a:solidFill>
                   <a:srgbClr val="171717"/>
                 </a:solidFill>
-                <a:latin typeface="Helvetica"/>
               </a:defRPr>
             </a:pPr>
             <a:r>
@@ -7747,7 +8460,6 @@
                 <a:solidFill>
                   <a:srgbClr val="66625C"/>
                 </a:solidFill>
-                <a:latin typeface="Helvetica"/>
               </a:defRPr>
             </a:pPr>
             <a:r>
@@ -7816,7 +8528,6 @@
                 <a:solidFill>
                   <a:srgbClr val="171717"/>
                 </a:solidFill>
-                <a:latin typeface="Helvetica"/>
               </a:defRPr>
             </a:pPr>
             <a:r>
@@ -7830,11 +8541,10 @@
                 <a:solidFill>
                   <a:srgbClr val="66625C"/>
                 </a:solidFill>
-                <a:latin typeface="Helvetica"/>
-              </a:defRPr>
-            </a:pPr>
-            <a:r>
-              <a:t>Consumer commerce moved to instant card clearing in seconds. B2B payments still run on static PDFs, manual IBAN wires, and email chasing.</a:t>
+              </a:defRPr>
+            </a:pPr>
+            <a:r>
+              <a:t>Consumer payments moved to instant card clearing in seconds. B2B payments still run on static PDFs, manual IBAN wires, and email chasing.</a:t>
             </a:r>
           </a:p>
         </p:txBody>
@@ -7885,7 +8595,6 @@
                 <a:solidFill>
                   <a:srgbClr val="B91C1C"/>
                 </a:solidFill>
-                <a:latin typeface="Helvetica"/>
               </a:defRPr>
             </a:pPr>
             <a:r>
@@ -7899,7 +8608,6 @@
                 <a:solidFill>
                   <a:srgbClr val="171717"/>
                 </a:solidFill>
-                <a:latin typeface="Helvetica"/>
               </a:defRPr>
             </a:pPr>
             <a:r>
@@ -8000,7 +8708,7 @@
               </a:defRPr>
             </a:pPr>
             <a:r>
-              <a:t>PROBLEM 02 // MARKET FAILURE</a:t>
+              <a:t>CORE THESIS // NON-CONSENSUS INSIGHT</a:t>
             </a:r>
           </a:p>
         </p:txBody>
@@ -8013,7 +8721,7 @@
         </p:nvSpPr>
         <p:spPr>
           <a:xfrm>
-            <a:off x="731520" y="685800"/>
+            <a:off x="731520" y="658368"/>
             <a:ext cx="10698480" cy="640080"/>
           </a:xfrm>
           <a:prstGeom prst="rect">
@@ -8028,7 +8736,7 @@
           <a:lstStyle/>
           <a:p>
             <a:pPr>
-              <a:defRPr sz="2400" b="1">
+              <a:defRPr sz="2300" b="1">
                 <a:solidFill>
                   <a:srgbClr val="171717"/>
                 </a:solidFill>
@@ -8036,12 +8744,12 @@
               </a:defRPr>
             </a:pPr>
             <a:r>
-              <a:t>Traditional Factoring is Broken &amp; Predatory</a:t>
-            </a:r>
-          </a:p>
-          <a:p>
-            <a:pPr>
-              <a:defRPr sz="1200">
+              <a:t>The Non-Consensus Secret</a:t>
+            </a:r>
+          </a:p>
+          <a:p>
+            <a:pPr>
+              <a:defRPr sz="1150">
                 <a:solidFill>
                   <a:srgbClr val="66625C"/>
                 </a:solidFill>
@@ -8049,7 +8757,7 @@
               </a:defRPr>
             </a:pPr>
             <a:r>
-              <a:t>Why traditional financial institutions fail SMEs</a:t>
+              <a:t>What we understand about B2B settlement that the rest of fintech misses</a:t>
             </a:r>
           </a:p>
         </p:txBody>
@@ -8096,73 +8804,47 @@
           <a:lstStyle/>
           <a:p>
             <a:pPr algn="ctr">
-              <a:defRPr sz="1300" b="1">
-                <a:solidFill>
-                  <a:srgbClr val="B91C1C"/>
-                </a:solidFill>
-                <a:latin typeface="Helvetica"/>
-              </a:defRPr>
-            </a:pPr>
-            <a:r>
-              <a:t>❌ THE FACTORING FAILURE MODES</a:t>
-            </a:r>
-            <a:br/>
-          </a:p>
-          <a:p>
-            <a:pPr>
-              <a:defRPr sz="1150">
+              <a:defRPr sz="1100" b="1">
+                <a:solidFill>
+                  <a:srgbClr val="66625C"/>
+                </a:solidFill>
+              </a:defRPr>
+            </a:pPr>
+            <a:r>
+              <a:t>THE CONSENSUS VIEW (WHERE OTHERS PLAY)</a:t>
+            </a:r>
+            <a:br/>
+          </a:p>
+          <a:p>
+            <a:pPr>
+              <a:defRPr sz="1800" b="1">
                 <a:solidFill>
                   <a:srgbClr val="171717"/>
                 </a:solidFill>
-                <a:latin typeface="Helvetica"/>
-              </a:defRPr>
-            </a:pPr>
-            <a:r>
-              <a:t>• Usurious Cost: 2.5% to 5.0% per 30-day invoice translates to an annualized 30% to 60% APR.</a:t>
-            </a:r>
-            <a:br/>
-          </a:p>
-          <a:p>
-            <a:pPr>
-              <a:defRPr sz="1150">
-                <a:solidFill>
-                  <a:srgbClr val="171717"/>
-                </a:solidFill>
-                <a:latin typeface="Helvetica"/>
-              </a:defRPr>
-            </a:pPr>
-            <a:r>
-              <a:t>• Blind Underwriting: Lenders rely on 12–18 month old filed annual reports and stale credit bureau scores.</a:t>
-            </a:r>
-            <a:br/>
-          </a:p>
-          <a:p>
-            <a:pPr>
-              <a:defRPr sz="1150">
-                <a:solidFill>
-                  <a:srgbClr val="171717"/>
-                </a:solidFill>
-                <a:latin typeface="Helvetica"/>
-              </a:defRPr>
-            </a:pPr>
-            <a:r>
-              <a:t>• Massive Fraud Vulnerability: Financiers cannot see inside the buyer's ledger, leading to fake invoices, circular billing, and Greensill-style collapses.</a:t>
-            </a:r>
-            <a:br/>
-          </a:p>
-          <a:p>
-            <a:pPr>
-              <a:defRPr sz="1150">
-                <a:solidFill>
-                  <a:srgbClr val="171717"/>
-                </a:solidFill>
-                <a:latin typeface="Helvetica"/>
-              </a:defRPr>
-            </a:pPr>
-            <a:r>
-              <a:t>• Customer Stigma &amp; Friction: Demands embarrassing debtor notification letters, phone verification calls, and invasive lien filings.</a:t>
-            </a:r>
-            <a:br/>
+                <a:latin typeface="Georgia"/>
+              </a:defRPr>
+            </a:pPr>
+            <a:r>
+              <a:t>'B2B Payments is a Wire Speed Problem'</a:t>
+            </a:r>
+            <a:br/>
+          </a:p>
+          <a:p>
+            <a:pPr>
+              <a:defRPr sz="1200">
+                <a:solidFill>
+                  <a:srgbClr val="66625C"/>
+                </a:solidFill>
+              </a:defRPr>
+            </a:pPr>
+            <a:r>
+              <a:t>Legacy fintech startups focus on building faster payment pipes: virtual cards, invoice OCR scanning, cross-border remittance, and invoice factoring.</a:t>
+            </a:r>
+            <a:br/>
+            <a:br/>
+            <a:r>
+              <a:t>They accept the premise that every invoice must result in a gross fiat bank wire from Buyer to Seller.</a:t>
+            </a:r>
           </a:p>
         </p:txBody>
       </p:sp>
@@ -8185,7 +8867,7 @@
           </a:solidFill>
           <a:ln w="12700">
             <a:solidFill>
-              <a:srgbClr val="A65A24"/>
+              <a:srgbClr val="225E42"/>
             </a:solidFill>
           </a:ln>
         </p:spPr>
@@ -8208,82 +8890,46 @@
           <a:lstStyle/>
           <a:p>
             <a:pPr algn="ctr">
-              <a:defRPr sz="1300" b="1">
-                <a:solidFill>
-                  <a:srgbClr val="A65A24"/>
-                </a:solidFill>
-                <a:latin typeface="Helvetica"/>
-              </a:defRPr>
-            </a:pPr>
-            <a:r>
-              <a:t>🏛️ THE STRUCTURAL FLAW: OUTSIDE THE LEDGER</a:t>
-            </a:r>
-            <a:br/>
-          </a:p>
-          <a:p>
-            <a:pPr>
-              <a:defRPr sz="1150">
-                <a:solidFill>
-                  <a:srgbClr val="66625C"/>
-                </a:solidFill>
-                <a:latin typeface="Helvetica"/>
-              </a:defRPr>
-            </a:pPr>
-            <a:r>
-              <a:t>Traditional financiers sit outside the company. Because they lack real-time write-access to the ERP, they have zero visibility into:</a:t>
-            </a:r>
-            <a:br/>
-          </a:p>
-          <a:p>
-            <a:pPr>
-              <a:defRPr sz="1150" b="1">
+              <a:defRPr sz="1100" b="1">
+                <a:solidFill>
+                  <a:srgbClr val="225E42"/>
+                </a:solidFill>
+              </a:defRPr>
+            </a:pPr>
+            <a:r>
+              <a:t>ACCOUNTED'S NON-CONSENSUS TRUTH</a:t>
+            </a:r>
+            <a:br/>
+          </a:p>
+          <a:p>
+            <a:pPr>
+              <a:defRPr sz="1800" b="1">
                 <a:solidFill>
                   <a:srgbClr val="171717"/>
                 </a:solidFill>
-                <a:latin typeface="Helvetica"/>
-              </a:defRPr>
-            </a:pPr>
-            <a:r>
-              <a:t>  1. No real-time bank cash balance (PSD2 Open Banking)</a:t>
-            </a:r>
-          </a:p>
-          <a:p>
-            <a:pPr>
-              <a:defRPr sz="1150" b="1">
+                <a:latin typeface="Georgia"/>
+              </a:defRPr>
+            </a:pPr>
+            <a:r>
+              <a:t>Moving Cash is an Architectural Failure Mode</a:t>
+            </a:r>
+            <a:br/>
+          </a:p>
+          <a:p>
+            <a:pPr>
+              <a:defRPr sz="1200">
                 <a:solidFill>
                   <a:srgbClr val="171717"/>
                 </a:solidFill>
-                <a:latin typeface="Helvetica"/>
-              </a:defRPr>
-            </a:pPr>
-            <a:r>
-              <a:t>  2. No direct buyer accounts payable attestation</a:t>
-            </a:r>
-          </a:p>
-          <a:p>
-            <a:pPr>
-              <a:defRPr sz="1150" b="1">
-                <a:solidFill>
-                  <a:srgbClr val="171717"/>
-                </a:solidFill>
-                <a:latin typeface="Helvetica"/>
-              </a:defRPr>
-            </a:pPr>
-            <a:r>
-              <a:t>  3. No live government tax arrears telemetry (Skattekonto)</a:t>
-            </a:r>
-          </a:p>
-          <a:p>
-            <a:pPr>
-              <a:defRPr sz="1150" b="1">
-                <a:solidFill>
-                  <a:srgbClr val="171717"/>
-                </a:solidFill>
-                <a:latin typeface="Helvetica"/>
-              </a:defRPr>
-            </a:pPr>
-            <a:r>
-              <a:t>  4. No multi-party supply chain trade netting</a:t>
+              </a:defRPr>
+            </a:pPr>
+            <a:r>
+              <a:t>In an economy of interconnected ERPs, 60% of B2B liabilities can be mathematically cancelled through multilateral graph netting before fiat cash ever moves.</a:t>
+            </a:r>
+            <a:br/>
+            <a:br/>
+            <a:r>
+              <a:t>Furthermore, the cheapest liquidity in the world isn't bank debt—it is the $1.8T in idle corporate cash already sitting on buyer balance sheets earning near-zero returns.</a:t>
             </a:r>
           </a:p>
         </p:txBody>
@@ -8380,7 +9026,7 @@
               </a:defRPr>
             </a:pPr>
             <a:r>
-              <a:t>THESIS // HISTORICAL PARALLEL</a:t>
+              <a:t>MACRO TIMING // WHY NOW?</a:t>
             </a:r>
           </a:p>
         </p:txBody>
@@ -8393,7 +9039,7 @@
         </p:nvSpPr>
         <p:spPr>
           <a:xfrm>
-            <a:off x="731520" y="685800"/>
+            <a:off x="731520" y="658368"/>
             <a:ext cx="10698480" cy="640080"/>
           </a:xfrm>
           <a:prstGeom prst="rect">
@@ -8408,7 +9054,7 @@
           <a:lstStyle/>
           <a:p>
             <a:pPr>
-              <a:defRPr sz="2400" b="1">
+              <a:defRPr sz="2300" b="1">
                 <a:solidFill>
                   <a:srgbClr val="171717"/>
                 </a:solidFill>
@@ -8416,12 +9062,12 @@
               </a:defRPr>
             </a:pPr>
             <a:r>
-              <a:t>What Dee Hock Built for Consumer Retail in 1958</a:t>
-            </a:r>
-          </a:p>
-          <a:p>
-            <a:pPr>
-              <a:defRPr sz="1200">
+              <a:t>The 4 Irreversible Macro Catalysts</a:t>
+            </a:r>
+          </a:p>
+          <a:p>
+            <a:pPr>
+              <a:defRPr sz="1150">
                 <a:solidFill>
                   <a:srgbClr val="66625C"/>
                 </a:solidFill>
@@ -8429,7 +9075,7 @@
               </a:defRPr>
             </a:pPr>
             <a:r>
-              <a:t>Consumer commerce had the exact same gridlock 65 years ago</a:t>
+              <a:t>Why this breakthrough could not have been built 5 years ago</a:t>
             </a:r>
           </a:p>
         </p:txBody>
@@ -8443,7 +9089,7 @@
         <p:spPr>
           <a:xfrm>
             <a:off x="731520" y="1645920"/>
-            <a:ext cx="5120640" cy="3657600"/>
+            <a:ext cx="5120640" cy="1920240"/>
           </a:xfrm>
           <a:prstGeom prst="roundRect">
             <a:avLst/>
@@ -8453,7 +9099,7 @@
           </a:solidFill>
           <a:ln w="12700">
             <a:solidFill>
-              <a:srgbClr val="E4E0D8"/>
+              <a:srgbClr val="A65A24"/>
             </a:solidFill>
           </a:ln>
         </p:spPr>
@@ -8472,61 +9118,31 @@
           </a:fontRef>
         </p:style>
         <p:txBody>
-          <a:bodyPr rtlCol="0" anchor="ctr" lIns="320040" rIns="320040" tIns="320040"/>
+          <a:bodyPr rtlCol="0" anchor="ctr" lIns="228600" rIns="228600" tIns="228600"/>
           <a:lstStyle/>
           <a:p>
             <a:pPr algn="ctr">
-              <a:defRPr sz="1100" b="1">
+              <a:defRPr sz="1200" b="1">
                 <a:solidFill>
                   <a:srgbClr val="A65A24"/>
                 </a:solidFill>
-                <a:latin typeface="Helvetica"/>
-              </a:defRPr>
-            </a:pPr>
-            <a:r>
-              <a:t>1950s: BILATERAL STORE CREDIT</a:t>
-            </a:r>
-            <a:br/>
-          </a:p>
-          <a:p>
-            <a:pPr>
-              <a:defRPr sz="1800" b="1">
-                <a:solidFill>
-                  <a:srgbClr val="171717"/>
-                </a:solidFill>
-                <a:latin typeface="Georgia"/>
-              </a:defRPr>
-            </a:pPr>
-            <a:r>
-              <a:t>Fragmented, High-Risk Store Books</a:t>
-            </a:r>
-            <a:br/>
-          </a:p>
-          <a:p>
-            <a:pPr>
-              <a:defRPr sz="1150">
+              </a:defRPr>
+            </a:pPr>
+            <a:r>
+              <a:t>01  High-For-Longer Base Rates (3.5%–5%)</a:t>
+            </a:r>
+            <a:br/>
+          </a:p>
+          <a:p>
+            <a:pPr>
+              <a:defRPr sz="1100">
                 <a:solidFill>
                   <a:srgbClr val="66625C"/>
                 </a:solidFill>
-                <a:latin typeface="Helvetica"/>
-              </a:defRPr>
-            </a:pPr>
-            <a:r>
-              <a:t>Every merchant (Sears, local grocers, gas stations) maintained individual customer ledgers. Merchants took 100% of customer default risk, and consumers carried dozens of separate credit cards.</a:t>
-            </a:r>
-            <a:br/>
-          </a:p>
-          <a:p>
-            <a:pPr>
-              <a:defRPr sz="1100" b="1">
-                <a:solidFill>
-                  <a:srgbClr val="A65A24"/>
-                </a:solidFill>
-                <a:latin typeface="Helvetica"/>
-              </a:defRPr>
-            </a:pPr>
-            <a:r>
-              <a:t>Outcome: Inefficient, localized, high default rate, zero scale.</a:t>
+              </a:defRPr>
+            </a:pPr>
+            <a:r>
+              <a:t>In a zero-interest-rate world (ZIRP), CFOs ignored 60-day DSO. At 4%+ base rates, working capital drag is suddenly the board's #1 existential priority.</a:t>
             </a:r>
           </a:p>
         </p:txBody>
@@ -8540,7 +9156,7 @@
         <p:spPr>
           <a:xfrm>
             <a:off x="6217920" y="1645920"/>
-            <a:ext cx="5120640" cy="3657600"/>
+            <a:ext cx="5120640" cy="1920240"/>
           </a:xfrm>
           <a:prstGeom prst="roundRect">
             <a:avLst/>
@@ -8569,61 +9185,31 @@
           </a:fontRef>
         </p:style>
         <p:txBody>
-          <a:bodyPr rtlCol="0" anchor="ctr" lIns="320040" rIns="320040" tIns="320040"/>
+          <a:bodyPr rtlCol="0" anchor="ctr" lIns="228600" rIns="228600" tIns="228600"/>
           <a:lstStyle/>
           <a:p>
             <a:pPr algn="ctr">
-              <a:defRPr sz="1100" b="1">
+              <a:defRPr sz="1200" b="1">
                 <a:solidFill>
                   <a:srgbClr val="225E42"/>
                 </a:solidFill>
-                <a:latin typeface="Helvetica"/>
-              </a:defRPr>
-            </a:pPr>
-            <a:r>
-              <a:t>1970+: VISA MULTILATERAL CLEARING</a:t>
-            </a:r>
-            <a:br/>
-          </a:p>
-          <a:p>
-            <a:pPr>
-              <a:defRPr sz="1800" b="1">
-                <a:solidFill>
-                  <a:srgbClr val="171717"/>
-                </a:solidFill>
-                <a:latin typeface="Georgia"/>
-              </a:defRPr>
-            </a:pPr>
-            <a:r>
-              <a:t>The Universal Settlement Protocol</a:t>
-            </a:r>
-            <a:br/>
-          </a:p>
-          <a:p>
-            <a:pPr>
-              <a:defRPr sz="1150">
+              </a:defRPr>
+            </a:pPr>
+            <a:r>
+              <a:t>02  Cloud ERP API Standardization</a:t>
+            </a:r>
+            <a:br/>
+          </a:p>
+          <a:p>
+            <a:pPr>
+              <a:defRPr sz="1100">
                 <a:solidFill>
                   <a:srgbClr val="66625C"/>
                 </a:solidFill>
-                <a:latin typeface="Helvetica"/>
-              </a:defRPr>
-            </a:pPr>
-            <a:r>
-              <a:t>BankAmericard (VISA) unified all merchants and consumers into a single clearinghouse. Credit was decoupled from individual merchants; transactions were netted multilaterally; settlements cleared in seconds.</a:t>
-            </a:r>
-            <a:br/>
-          </a:p>
-          <a:p>
-            <a:pPr>
-              <a:defRPr sz="1100" b="1">
-                <a:solidFill>
-                  <a:srgbClr val="225E42"/>
-                </a:solidFill>
-                <a:latin typeface="Helvetica"/>
-              </a:defRPr>
-            </a:pPr>
-            <a:r>
-              <a:t>Outcome: A $14 Trillion/year network with 50%+ operating margins.</a:t>
+              </a:defRPr>
+            </a:pPr>
+            <a:r>
+              <a:t>Accounting data shifted permanently from isolated on-premise desktop files (.SIE) into continuous REST APIs (Fortnox, Visma, Xero, NetSuite).</a:t>
             </a:r>
           </a:p>
         </p:txBody>
@@ -8636,18 +9222,18 @@
         </p:nvSpPr>
         <p:spPr>
           <a:xfrm>
-            <a:off x="731520" y="5486400"/>
-            <a:ext cx="10607040" cy="822960"/>
+            <a:off x="731520" y="3840480"/>
+            <a:ext cx="5120640" cy="1920240"/>
           </a:xfrm>
           <a:prstGeom prst="roundRect">
             <a:avLst/>
           </a:prstGeom>
           <a:solidFill>
-            <a:srgbClr val="F3F0EA"/>
+            <a:srgbClr val="FFFFFF"/>
           </a:solidFill>
           <a:ln w="12700">
             <a:solidFill>
-              <a:srgbClr val="E4E0D8"/>
+              <a:srgbClr val="171717"/>
             </a:solidFill>
           </a:ln>
         </p:spPr>
@@ -8666,19 +9252,98 @@
           </a:fontRef>
         </p:style>
         <p:txBody>
-          <a:bodyPr rtlCol="0" anchor="ctr" lIns="182880" tIns="182880"/>
+          <a:bodyPr rtlCol="0" anchor="ctr" lIns="228600" rIns="228600" tIns="228600"/>
           <a:lstStyle/>
           <a:p>
             <a:pPr algn="ctr">
-              <a:defRPr sz="1150" b="1">
+              <a:defRPr sz="1200" b="1">
                 <a:solidFill>
                   <a:srgbClr val="171717"/>
                 </a:solidFill>
-                <a:latin typeface="Helvetica"/>
-              </a:defRPr>
-            </a:pPr>
-            <a:r>
-              <a:t>Why didn't B2B get its VISA? Because 2.5% card fees are impossible on $100k orders, and companies cannot migrate ERPs. Accounted solves both.</a:t>
+              </a:defRPr>
+            </a:pPr>
+            <a:r>
+              <a:t>03  PSD2 Open Banking Maturity</a:t>
+            </a:r>
+            <a:br/>
+          </a:p>
+          <a:p>
+            <a:pPr>
+              <a:defRPr sz="1100">
+                <a:solidFill>
+                  <a:srgbClr val="66625C"/>
+                </a:solidFill>
+              </a:defRPr>
+            </a:pPr>
+            <a:r>
+              <a:t>Programmatic read/write access to commercial bank accounts (Enable Banking / SEPA Instant / Autogiro) is finally stable and standardized across Europe.</a:t>
+            </a:r>
+          </a:p>
+        </p:txBody>
+      </p:sp>
+      <p:sp>
+        <p:nvSpPr>
+          <p:cNvPr id="8" name="Rounded Rectangle 7"/>
+          <p:cNvSpPr/>
+          <p:nvPr/>
+        </p:nvSpPr>
+        <p:spPr>
+          <a:xfrm>
+            <a:off x="6217920" y="3840480"/>
+            <a:ext cx="5120640" cy="1920240"/>
+          </a:xfrm>
+          <a:prstGeom prst="roundRect">
+            <a:avLst/>
+          </a:prstGeom>
+          <a:solidFill>
+            <a:srgbClr val="FFFFFF"/>
+          </a:solidFill>
+          <a:ln w="12700">
+            <a:solidFill>
+              <a:srgbClr val="225E42"/>
+            </a:solidFill>
+          </a:ln>
+        </p:spPr>
+        <p:style>
+          <a:lnRef idx="1">
+            <a:schemeClr val="accent1"/>
+          </a:lnRef>
+          <a:fillRef idx="3">
+            <a:schemeClr val="accent1"/>
+          </a:fillRef>
+          <a:effectRef idx="2">
+            <a:schemeClr val="accent1"/>
+          </a:effectRef>
+          <a:fontRef idx="minor">
+            <a:schemeClr val="lt1"/>
+          </a:fontRef>
+        </p:style>
+        <p:txBody>
+          <a:bodyPr rtlCol="0" anchor="ctr" lIns="228600" rIns="228600" tIns="228600"/>
+          <a:lstStyle/>
+          <a:p>
+            <a:pPr algn="ctr">
+              <a:defRPr sz="1200" b="1">
+                <a:solidFill>
+                  <a:srgbClr val="225E42"/>
+                </a:solidFill>
+              </a:defRPr>
+            </a:pPr>
+            <a:r>
+              <a:t>04  The Autonomous Agentic Wave</a:t>
+            </a:r>
+            <a:br/>
+          </a:p>
+          <a:p>
+            <a:pPr>
+              <a:defRPr sz="1100">
+                <a:solidFill>
+                  <a:srgbClr val="66625C"/>
+                </a:solidFill>
+              </a:defRPr>
+            </a:pPr>
+            <a:r>
+              <a:t>AI software agents are taking over corporate finance. Autonomous agents cannot write checks or call factoring brokers; they need an API-native settlement protocol.</a:t>
             </a:r>
           </a:p>
         </p:txBody>
@@ -8775,7 +9440,7 @@
               </a:defRPr>
             </a:pPr>
             <a:r>
-              <a:t>SOLUTION // THE PROTOCOL</a:t>
+              <a:t>HISTORICAL ANALOGY // THE BLUEPRINT</a:t>
             </a:r>
           </a:p>
         </p:txBody>
@@ -8788,7 +9453,7 @@
         </p:nvSpPr>
         <p:spPr>
           <a:xfrm>
-            <a:off x="731520" y="685800"/>
+            <a:off x="731520" y="658368"/>
             <a:ext cx="10698480" cy="640080"/>
           </a:xfrm>
           <a:prstGeom prst="rect">
@@ -8803,7 +9468,7 @@
           <a:lstStyle/>
           <a:p>
             <a:pPr>
-              <a:defRPr sz="2400" b="1">
+              <a:defRPr sz="2300" b="1">
                 <a:solidFill>
                   <a:srgbClr val="171717"/>
                 </a:solidFill>
@@ -8811,12 +9476,12 @@
               </a:defRPr>
             </a:pPr>
             <a:r>
-              <a:t>Accounted Network: The Ledger-Native Rail</a:t>
-            </a:r>
-          </a:p>
-          <a:p>
-            <a:pPr>
-              <a:defRPr sz="1200">
+              <a:t>What Dee Hock Built for Consumer Retail in 1958</a:t>
+            </a:r>
+          </a:p>
+          <a:p>
+            <a:pPr>
+              <a:defRPr sz="1150">
                 <a:solidFill>
                   <a:srgbClr val="66625C"/>
                 </a:solidFill>
@@ -8824,7 +9489,7 @@
               </a:defRPr>
             </a:pPr>
             <a:r>
-              <a:t>Turning existing ERPs into connected VISA terminals</a:t>
+              <a:t>Consumer commerce had the exact same gridlock 65 years ago</a:t>
             </a:r>
           </a:p>
         </p:txBody>
@@ -8838,7 +9503,7 @@
         <p:spPr>
           <a:xfrm>
             <a:off x="731520" y="1645920"/>
-            <a:ext cx="3291840" cy="3840480"/>
+            <a:ext cx="5120640" cy="3657600"/>
           </a:xfrm>
           <a:prstGeom prst="roundRect">
             <a:avLst/>
@@ -8867,47 +9532,45 @@
           </a:fontRef>
         </p:style>
         <p:txBody>
-          <a:bodyPr rtlCol="0" anchor="ctr" lIns="274320" rIns="274320" tIns="274320"/>
+          <a:bodyPr rtlCol="0" anchor="ctr" lIns="320040" rIns="320040" tIns="320040"/>
           <a:lstStyle/>
           <a:p>
             <a:pPr algn="ctr">
-              <a:defRPr sz="2800" b="1">
-                <a:solidFill>
-                  <a:srgbClr val="225E42"/>
+              <a:defRPr sz="1100" b="1">
+                <a:solidFill>
+                  <a:srgbClr val="A65A24"/>
+                </a:solidFill>
+              </a:defRPr>
+            </a:pPr>
+            <a:r>
+              <a:t>1950s: BILATERAL STORE CREDIT</a:t>
+            </a:r>
+            <a:br/>
+          </a:p>
+          <a:p>
+            <a:pPr>
+              <a:defRPr sz="1800" b="1">
+                <a:solidFill>
+                  <a:srgbClr val="171717"/>
                 </a:solidFill>
                 <a:latin typeface="Georgia"/>
               </a:defRPr>
             </a:pPr>
             <a:r>
-              <a:t>01</a:t>
-            </a:r>
-            <a:br/>
-          </a:p>
-          <a:p>
-            <a:pPr>
-              <a:defRPr sz="1600" b="1">
-                <a:solidFill>
-                  <a:srgbClr val="171717"/>
-                </a:solidFill>
-                <a:latin typeface="Georgia"/>
-              </a:defRPr>
-            </a:pPr>
-            <a:r>
-              <a:t>Zero-Migration Companion</a:t>
-            </a:r>
-            <a:br/>
-          </a:p>
-          <a:p>
-            <a:pPr>
-              <a:defRPr sz="1100">
+              <a:t>Fragmented, High-Risk Store Books</a:t>
+            </a:r>
+            <a:br/>
+          </a:p>
+          <a:p>
+            <a:pPr>
+              <a:defRPr sz="1150">
                 <a:solidFill>
                   <a:srgbClr val="66625C"/>
                 </a:solidFill>
-                <a:latin typeface="Helvetica"/>
-              </a:defRPr>
-            </a:pPr>
-            <a:r>
-              <a:t>Plugs via OAuth API directly into existing ERPs (Fortnox, Visma, Xero, NetSuite) in 60 seconds. CFOs change zero daily habits.</a:t>
+              </a:defRPr>
+            </a:pPr>
+            <a:r>
+              <a:t>Every merchant (Sears, local grocers, gas stations) maintained individual customer ledgers. Merchants took 100% of customer default risk, and consumers carried dozens of separate credit cards.</a:t>
             </a:r>
             <a:br/>
           </a:p>
@@ -8915,13 +9578,12 @@
             <a:pPr>
               <a:defRPr sz="1100" b="1">
                 <a:solidFill>
-                  <a:srgbClr val="225E42"/>
-                </a:solidFill>
-                <a:latin typeface="Helvetica"/>
-              </a:defRPr>
-            </a:pPr>
-            <a:r>
-              <a:t>Live BAS 1510 / 2440 Sync</a:t>
+                  <a:srgbClr val="A65A24"/>
+                </a:solidFill>
+              </a:defRPr>
+            </a:pPr>
+            <a:r>
+              <a:t>Outcome: Inefficient, localized, high default rate, zero scale.</a:t>
             </a:r>
           </a:p>
         </p:txBody>
@@ -8934,8 +9596,8 @@
         </p:nvSpPr>
         <p:spPr>
           <a:xfrm>
-            <a:off x="4389120" y="1645920"/>
-            <a:ext cx="3291840" cy="3840480"/>
+            <a:off x="6217920" y="1645920"/>
+            <a:ext cx="5120640" cy="3657600"/>
           </a:xfrm>
           <a:prstGeom prst="roundRect">
             <a:avLst/>
@@ -8964,47 +9626,45 @@
           </a:fontRef>
         </p:style>
         <p:txBody>
-          <a:bodyPr rtlCol="0" anchor="ctr" lIns="274320" rIns="274320" tIns="274320"/>
+          <a:bodyPr rtlCol="0" anchor="ctr" lIns="320040" rIns="320040" tIns="320040"/>
           <a:lstStyle/>
           <a:p>
             <a:pPr algn="ctr">
-              <a:defRPr sz="2800" b="1">
+              <a:defRPr sz="1100" b="1">
                 <a:solidFill>
                   <a:srgbClr val="225E42"/>
                 </a:solidFill>
+              </a:defRPr>
+            </a:pPr>
+            <a:r>
+              <a:t>1970+: VISA MULTILATERAL CLEARING</a:t>
+            </a:r>
+            <a:br/>
+          </a:p>
+          <a:p>
+            <a:pPr>
+              <a:defRPr sz="1800" b="1">
+                <a:solidFill>
+                  <a:srgbClr val="171717"/>
+                </a:solidFill>
                 <a:latin typeface="Georgia"/>
               </a:defRPr>
             </a:pPr>
             <a:r>
-              <a:t>02</a:t>
-            </a:r>
-            <a:br/>
-          </a:p>
-          <a:p>
-            <a:pPr>
-              <a:defRPr sz="1600" b="1">
-                <a:solidFill>
-                  <a:srgbClr val="171717"/>
-                </a:solidFill>
-                <a:latin typeface="Georgia"/>
-              </a:defRPr>
-            </a:pPr>
-            <a:r>
-              <a:t>Multilateral Netting Engine</a:t>
-            </a:r>
-            <a:br/>
-          </a:p>
-          <a:p>
-            <a:pPr>
-              <a:defRPr sz="1100">
+              <a:t>The Universal Settlement Protocol</a:t>
+            </a:r>
+            <a:br/>
+          </a:p>
+          <a:p>
+            <a:pPr>
+              <a:defRPr sz="1150">
                 <a:solidFill>
                   <a:srgbClr val="66625C"/>
                 </a:solidFill>
-                <a:latin typeface="Helvetica"/>
-              </a:defRPr>
-            </a:pPr>
-            <a:r>
-              <a:t>Graph algorithm detects circular debt loops (A -&gt; B -&gt; C -&gt; A) and instantly cancels gross liabilities without cash leaving the bank.</a:t>
+              </a:defRPr>
+            </a:pPr>
+            <a:r>
+              <a:t>BankAmericard (VISA) unified all merchants and consumers into a single clearinghouse. Credit was decoupled from individual merchants; transactions were netted multilaterally; settlements cleared in seconds.</a:t>
             </a:r>
             <a:br/>
           </a:p>
@@ -9014,11 +9674,10 @@
                 <a:solidFill>
                   <a:srgbClr val="225E42"/>
                 </a:solidFill>
-                <a:latin typeface="Helvetica"/>
-              </a:defRPr>
-            </a:pPr>
-            <a:r>
-              <a:t>Up to 70% Debt Cancelled</a:t>
+              </a:defRPr>
+            </a:pPr>
+            <a:r>
+              <a:t>Outcome: A $14 Trillion/year network with 50%+ operating margins.</a:t>
             </a:r>
           </a:p>
         </p:txBody>
@@ -9031,105 +9690,8 @@
         </p:nvSpPr>
         <p:spPr>
           <a:xfrm>
-            <a:off x="8046720" y="1645920"/>
-            <a:ext cx="3291840" cy="3840480"/>
-          </a:xfrm>
-          <a:prstGeom prst="roundRect">
-            <a:avLst/>
-          </a:prstGeom>
-          <a:solidFill>
-            <a:srgbClr val="FFFFFF"/>
-          </a:solidFill>
-          <a:ln w="12700">
-            <a:solidFill>
-              <a:srgbClr val="A65A24"/>
-            </a:solidFill>
-          </a:ln>
-        </p:spPr>
-        <p:style>
-          <a:lnRef idx="1">
-            <a:schemeClr val="accent1"/>
-          </a:lnRef>
-          <a:fillRef idx="3">
-            <a:schemeClr val="accent1"/>
-          </a:fillRef>
-          <a:effectRef idx="2">
-            <a:schemeClr val="accent1"/>
-          </a:effectRef>
-          <a:fontRef idx="minor">
-            <a:schemeClr val="lt1"/>
-          </a:fontRef>
-        </p:style>
-        <p:txBody>
-          <a:bodyPr rtlCol="0" anchor="ctr" lIns="274320" rIns="274320" tIns="274320"/>
-          <a:lstStyle/>
-          <a:p>
-            <a:pPr algn="ctr">
-              <a:defRPr sz="2800" b="1">
-                <a:solidFill>
-                  <a:srgbClr val="A65A24"/>
-                </a:solidFill>
-                <a:latin typeface="Georgia"/>
-              </a:defRPr>
-            </a:pPr>
-            <a:r>
-              <a:t>03</a:t>
-            </a:r>
-            <a:br/>
-          </a:p>
-          <a:p>
-            <a:pPr>
-              <a:defRPr sz="1600" b="1">
-                <a:solidFill>
-                  <a:srgbClr val="171717"/>
-                </a:solidFill>
-                <a:latin typeface="Georgia"/>
-              </a:defRPr>
-            </a:pPr>
-            <a:r>
-              <a:t>Anchor Treasury Liquidity</a:t>
-            </a:r>
-            <a:br/>
-          </a:p>
-          <a:p>
-            <a:pPr>
-              <a:defRPr sz="1100">
-                <a:solidFill>
-                  <a:srgbClr val="66625C"/>
-                </a:solidFill>
-                <a:latin typeface="Helvetica"/>
-              </a:defRPr>
-            </a:pPr>
-            <a:r>
-              <a:t>Instant 10-second cash advances funded directly by enterprise buyer corporate treasuries, earning 8% APY with zero platform debt.</a:t>
-            </a:r>
-            <a:br/>
-          </a:p>
-          <a:p>
-            <a:pPr>
-              <a:defRPr sz="1100" b="1">
-                <a:solidFill>
-                  <a:srgbClr val="A65A24"/>
-                </a:solidFill>
-                <a:latin typeface="Helvetica"/>
-              </a:defRPr>
-            </a:pPr>
-            <a:r>
-              <a:t>Self-Funding Supply Chains</a:t>
-            </a:r>
-          </a:p>
-        </p:txBody>
-      </p:sp>
-      <p:sp>
-        <p:nvSpPr>
-          <p:cNvPr id="8" name="Rounded Rectangle 7"/>
-          <p:cNvSpPr/>
-          <p:nvPr/>
-        </p:nvSpPr>
-        <p:spPr>
-          <a:xfrm>
-            <a:off x="731520" y="5669280"/>
-            <a:ext cx="10607040" cy="640080"/>
+            <a:off x="731520" y="5486400"/>
+            <a:ext cx="10607040" cy="822960"/>
           </a:xfrm>
           <a:prstGeom prst="roundRect">
             <a:avLst/>
@@ -9158,19 +9720,18 @@
           </a:fontRef>
         </p:style>
         <p:txBody>
-          <a:bodyPr rtlCol="0" anchor="ctr" lIns="137160" tIns="137160"/>
+          <a:bodyPr rtlCol="0" anchor="ctr" lIns="182880" tIns="182880"/>
           <a:lstStyle/>
           <a:p>
             <a:pPr algn="ctr">
-              <a:defRPr sz="1100" b="1">
+              <a:defRPr sz="1150" b="1">
                 <a:solidFill>
                   <a:srgbClr val="171717"/>
                 </a:solidFill>
-                <a:latin typeface="Helvetica"/>
-              </a:defRPr>
-            </a:pPr>
-            <a:r>
-              <a:t>⚡ AUTOMATIC RECONCILIATION: Generates balanced double-entry vouchers (Debit 2440, Credit 1510) into the host ERP with 0.00 difference.</a:t>
+              </a:defRPr>
+            </a:pPr>
+            <a:r>
+              <a:t>Why didn't B2B get its VISA? Because 2.5% card fees are impossible on $100k orders, and companies cannot migrate ERPs. Accounted solves both.</a:t>
             </a:r>
           </a:p>
         </p:txBody>
@@ -9267,7 +9828,7 @@
               </a:defRPr>
             </a:pPr>
             <a:r>
-              <a:t>MECHANISM 01 // NETTING MATH</a:t>
+              <a:t>SOLUTION // THE PLATFORM</a:t>
             </a:r>
           </a:p>
         </p:txBody>
@@ -9280,7 +9841,7 @@
         </p:nvSpPr>
         <p:spPr>
           <a:xfrm>
-            <a:off x="731520" y="685800"/>
+            <a:off x="731520" y="658368"/>
             <a:ext cx="10698480" cy="640080"/>
           </a:xfrm>
           <a:prstGeom prst="rect">
@@ -9295,7 +9856,7 @@
           <a:lstStyle/>
           <a:p>
             <a:pPr>
-              <a:defRPr sz="2400" b="1">
+              <a:defRPr sz="2300" b="1">
                 <a:solidFill>
                   <a:srgbClr val="171717"/>
                 </a:solidFill>
@@ -9303,12 +9864,12 @@
               </a:defRPr>
             </a:pPr>
             <a:r>
-              <a:t>Creating Liquidity Out of Thin Air</a:t>
-            </a:r>
-          </a:p>
-          <a:p>
-            <a:pPr>
-              <a:defRPr sz="1200">
+              <a:t>Accounted Network: The Ledger-Native Rail</a:t>
+            </a:r>
+          </a:p>
+          <a:p>
+            <a:pPr>
+              <a:defRPr sz="1150">
                 <a:solidFill>
                   <a:srgbClr val="66625C"/>
                 </a:solidFill>
@@ -9316,7 +9877,7 @@
               </a:defRPr>
             </a:pPr>
             <a:r>
-              <a:t>How algorithmic multilateral netting eliminates 87.5% of external cash requirements</a:t>
+              <a:t>Turning existing single-player ERPs into connected multiplayer clearing nodes</a:t>
             </a:r>
           </a:p>
         </p:txBody>
@@ -9330,7 +9891,7 @@
         <p:spPr>
           <a:xfrm>
             <a:off x="731520" y="1645920"/>
-            <a:ext cx="5120640" cy="4389120"/>
+            <a:ext cx="3291840" cy="3840480"/>
           </a:xfrm>
           <a:prstGeom prst="roundRect">
             <a:avLst/>
@@ -9340,7 +9901,7 @@
           </a:solidFill>
           <a:ln w="12700">
             <a:solidFill>
-              <a:srgbClr val="B91C1C"/>
+              <a:srgbClr val="E4E0D8"/>
             </a:solidFill>
           </a:ln>
         </p:spPr>
@@ -9363,54 +9924,30 @@
           <a:lstStyle/>
           <a:p>
             <a:pPr algn="ctr">
-              <a:defRPr sz="1300" b="1">
-                <a:solidFill>
-                  <a:srgbClr val="B91C1C"/>
-                </a:solidFill>
-                <a:latin typeface="Helvetica"/>
-              </a:defRPr>
-            </a:pPr>
-            <a:r>
-              <a:t>TRADITIONAL GROSS SETTLEMENT</a:t>
-            </a:r>
-            <a:br/>
-          </a:p>
-          <a:p>
-            <a:pPr>
-              <a:defRPr sz="1200">
+              <a:defRPr sz="2800" b="1">
+                <a:solidFill>
+                  <a:srgbClr val="225E42"/>
+                </a:solidFill>
+                <a:latin typeface="Georgia"/>
+              </a:defRPr>
+            </a:pPr>
+            <a:r>
+              <a:t>01</a:t>
+            </a:r>
+            <a:br/>
+          </a:p>
+          <a:p>
+            <a:pPr>
+              <a:defRPr sz="1600" b="1">
                 <a:solidFill>
                   <a:srgbClr val="171717"/>
                 </a:solidFill>
-                <a:latin typeface="Helvetica"/>
-              </a:defRPr>
-            </a:pPr>
-            <a:r>
-              <a:t>Contractor A owes Subcontractor B:  60 000 SEK</a:t>
-            </a:r>
-            <a:br/>
-            <a:r>
-              <a:t>Subcontractor B owes Material Supplier C:  60 000 SEK</a:t>
-            </a:r>
-            <a:br/>
-            <a:r>
-              <a:t>Material Supplier C owes Contractor A:  40 000 SEK</a:t>
-            </a:r>
-            <a:br/>
-            <a:br/>
-          </a:p>
-          <a:p>
-            <a:pPr>
-              <a:defRPr sz="1800" b="1">
-                <a:solidFill>
-                  <a:srgbClr val="B91C1C"/>
-                </a:solidFill>
                 <a:latin typeface="Georgia"/>
               </a:defRPr>
             </a:pPr>
             <a:r>
-              <a:t>Total Gross Cash Required: 160 000 SEK</a:t>
-            </a:r>
-            <a:br/>
+              <a:t>Zero-Migration Companion</a:t>
+            </a:r>
             <a:br/>
           </a:p>
           <a:p>
@@ -9419,11 +9956,23 @@
                 <a:solidFill>
                   <a:srgbClr val="66625C"/>
                 </a:solidFill>
-                <a:latin typeface="Helvetica"/>
-              </a:defRPr>
-            </a:pPr>
-            <a:r>
-              <a:t>⚠️ 3 separate wire transfers, bank fees, 60 days of waiting, and triple default risk.</a:t>
+              </a:defRPr>
+            </a:pPr>
+            <a:r>
+              <a:t>Plugs via OAuth API directly into existing ERPs (Fortnox, Visma, Xero, NetSuite) in 60 seconds. CFOs change zero daily habits.</a:t>
+            </a:r>
+            <a:br/>
+          </a:p>
+          <a:p>
+            <a:pPr>
+              <a:defRPr sz="1100" b="1">
+                <a:solidFill>
+                  <a:srgbClr val="225E42"/>
+                </a:solidFill>
+              </a:defRPr>
+            </a:pPr>
+            <a:r>
+              <a:t>Live BAS 1510 / 2440 Sync</a:t>
             </a:r>
           </a:p>
         </p:txBody>
@@ -9436,14 +9985,14 @@
         </p:nvSpPr>
         <p:spPr>
           <a:xfrm>
-            <a:off x="6217920" y="1645920"/>
-            <a:ext cx="5120640" cy="4389120"/>
+            <a:off x="4389120" y="1645920"/>
+            <a:ext cx="3291840" cy="3840480"/>
           </a:xfrm>
           <a:prstGeom prst="roundRect">
             <a:avLst/>
           </a:prstGeom>
           <a:solidFill>
-            <a:srgbClr val="F1F7F3"/>
+            <a:srgbClr val="FFFFFF"/>
           </a:solidFill>
           <a:ln w="12700">
             <a:solidFill>
@@ -9470,67 +10019,204 @@
           <a:lstStyle/>
           <a:p>
             <a:pPr algn="ctr">
-              <a:defRPr sz="1300" b="1">
+              <a:defRPr sz="2800" b="1">
                 <a:solidFill>
                   <a:srgbClr val="225E42"/>
                 </a:solidFill>
-                <a:latin typeface="Helvetica"/>
-              </a:defRPr>
-            </a:pPr>
-            <a:r>
-              <a:t>ACCOUNTED MULTILATERAL NETTING</a:t>
-            </a:r>
-            <a:br/>
-          </a:p>
-          <a:p>
-            <a:pPr>
-              <a:defRPr sz="1200">
+                <a:latin typeface="Georgia"/>
+              </a:defRPr>
+            </a:pPr>
+            <a:r>
+              <a:t>02</a:t>
+            </a:r>
+            <a:br/>
+          </a:p>
+          <a:p>
+            <a:pPr>
+              <a:defRPr sz="1600" b="1">
+                <a:solidFill>
+                  <a:srgbClr val="171717"/>
+                </a:solidFill>
+                <a:latin typeface="Georgia"/>
+              </a:defRPr>
+            </a:pPr>
+            <a:r>
+              <a:t>Multilateral Netting Engine</a:t>
+            </a:r>
+            <a:br/>
+          </a:p>
+          <a:p>
+            <a:pPr>
+              <a:defRPr sz="1100">
+                <a:solidFill>
+                  <a:srgbClr val="66625C"/>
+                </a:solidFill>
+              </a:defRPr>
+            </a:pPr>
+            <a:r>
+              <a:t>Graph algorithm detects circular debt loops (A -&gt; B -&gt; C -&gt; A) and instantly cancels gross liabilities without cash leaving the bank.</a:t>
+            </a:r>
+            <a:br/>
+          </a:p>
+          <a:p>
+            <a:pPr>
+              <a:defRPr sz="1100" b="1">
                 <a:solidFill>
                   <a:srgbClr val="225E42"/>
                 </a:solidFill>
-                <a:latin typeface="Helvetica"/>
-              </a:defRPr>
-            </a:pPr>
-            <a:r>
-              <a:t>Contractor A liability:  0 SEK (Fully Extinguished)</a:t>
-            </a:r>
-            <a:br/>
-            <a:r>
-              <a:t>Material Supplier C liability:  0 SEK (Fully Extinguished)</a:t>
-            </a:r>
-            <a:br/>
-            <a:r>
-              <a:t>Subcontractor B residual payable:  20 000 SEK Net</a:t>
-            </a:r>
-            <a:br/>
-            <a:br/>
-          </a:p>
-          <a:p>
-            <a:pPr>
-              <a:defRPr sz="1800" b="1">
-                <a:solidFill>
-                  <a:srgbClr val="225E42"/>
+              </a:defRPr>
+            </a:pPr>
+            <a:r>
+              <a:t>Up to 70% Debt Cancelled</a:t>
+            </a:r>
+          </a:p>
+        </p:txBody>
+      </p:sp>
+      <p:sp>
+        <p:nvSpPr>
+          <p:cNvPr id="7" name="Rounded Rectangle 6"/>
+          <p:cNvSpPr/>
+          <p:nvPr/>
+        </p:nvSpPr>
+        <p:spPr>
+          <a:xfrm>
+            <a:off x="8046720" y="1645920"/>
+            <a:ext cx="3291840" cy="3840480"/>
+          </a:xfrm>
+          <a:prstGeom prst="roundRect">
+            <a:avLst/>
+          </a:prstGeom>
+          <a:solidFill>
+            <a:srgbClr val="FFFFFF"/>
+          </a:solidFill>
+          <a:ln w="12700">
+            <a:solidFill>
+              <a:srgbClr val="A65A24"/>
+            </a:solidFill>
+          </a:ln>
+        </p:spPr>
+        <p:style>
+          <a:lnRef idx="1">
+            <a:schemeClr val="accent1"/>
+          </a:lnRef>
+          <a:fillRef idx="3">
+            <a:schemeClr val="accent1"/>
+          </a:fillRef>
+          <a:effectRef idx="2">
+            <a:schemeClr val="accent1"/>
+          </a:effectRef>
+          <a:fontRef idx="minor">
+            <a:schemeClr val="lt1"/>
+          </a:fontRef>
+        </p:style>
+        <p:txBody>
+          <a:bodyPr rtlCol="0" anchor="ctr" lIns="274320" rIns="274320" tIns="274320"/>
+          <a:lstStyle/>
+          <a:p>
+            <a:pPr algn="ctr">
+              <a:defRPr sz="2800" b="1">
+                <a:solidFill>
+                  <a:srgbClr val="A65A24"/>
                 </a:solidFill>
                 <a:latin typeface="Georgia"/>
               </a:defRPr>
             </a:pPr>
             <a:r>
-              <a:t>External Cash Required to Settle: Only 20 000 SEK</a:t>
-            </a:r>
-            <a:br/>
+              <a:t>03</a:t>
+            </a:r>
+            <a:br/>
+          </a:p>
+          <a:p>
+            <a:pPr>
+              <a:defRPr sz="1600" b="1">
+                <a:solidFill>
+                  <a:srgbClr val="171717"/>
+                </a:solidFill>
+                <a:latin typeface="Georgia"/>
+              </a:defRPr>
+            </a:pPr>
+            <a:r>
+              <a:t>Anchor Treasury Liquidity</a:t>
+            </a:r>
+            <a:br/>
+          </a:p>
+          <a:p>
+            <a:pPr>
+              <a:defRPr sz="1100">
+                <a:solidFill>
+                  <a:srgbClr val="66625C"/>
+                </a:solidFill>
+              </a:defRPr>
+            </a:pPr>
+            <a:r>
+              <a:t>Instant 10-second cash advances funded directly by enterprise buyer corporate treasuries, earning 8% APY with zero platform debt.</a:t>
+            </a:r>
             <a:br/>
           </a:p>
           <a:p>
             <a:pPr>
               <a:defRPr sz="1100" b="1">
                 <a:solidFill>
+                  <a:srgbClr val="A65A24"/>
+                </a:solidFill>
+              </a:defRPr>
+            </a:pPr>
+            <a:r>
+              <a:t>Self-Funding Supply Chains</a:t>
+            </a:r>
+          </a:p>
+        </p:txBody>
+      </p:sp>
+      <p:sp>
+        <p:nvSpPr>
+          <p:cNvPr id="8" name="Rounded Rectangle 7"/>
+          <p:cNvSpPr/>
+          <p:nvPr/>
+        </p:nvSpPr>
+        <p:spPr>
+          <a:xfrm>
+            <a:off x="731520" y="5669280"/>
+            <a:ext cx="10607040" cy="640080"/>
+          </a:xfrm>
+          <a:prstGeom prst="roundRect">
+            <a:avLst/>
+          </a:prstGeom>
+          <a:solidFill>
+            <a:srgbClr val="F3F0EA"/>
+          </a:solidFill>
+          <a:ln w="12700">
+            <a:solidFill>
+              <a:srgbClr val="E4E0D8"/>
+            </a:solidFill>
+          </a:ln>
+        </p:spPr>
+        <p:style>
+          <a:lnRef idx="1">
+            <a:schemeClr val="accent1"/>
+          </a:lnRef>
+          <a:fillRef idx="3">
+            <a:schemeClr val="accent1"/>
+          </a:fillRef>
+          <a:effectRef idx="2">
+            <a:schemeClr val="accent1"/>
+          </a:effectRef>
+          <a:fontRef idx="minor">
+            <a:schemeClr val="lt1"/>
+          </a:fontRef>
+        </p:style>
+        <p:txBody>
+          <a:bodyPr rtlCol="0" anchor="ctr" lIns="137160" tIns="137160"/>
+          <a:lstStyle/>
+          <a:p>
+            <a:pPr algn="ctr">
+              <a:defRPr sz="1100" b="1">
+                <a:solidFill>
                   <a:srgbClr val="171717"/>
                 </a:solidFill>
-                <a:latin typeface="Helvetica"/>
-              </a:defRPr>
-            </a:pPr>
-            <a:r>
-              <a:t>✓ 140 000 SEK in gross debt erased. Systemic counterparty risk reduced by 87.5%.</a:t>
+              </a:defRPr>
+            </a:pPr>
+            <a:r>
+              <a:t>⚡ AUTOMATIC RECONCILIATION: Generates balanced double-entry vouchers (Debit 2440, Credit 1510) into the host ERP with 0.00 difference.</a:t>
             </a:r>
           </a:p>
         </p:txBody>
@@ -9627,7 +10313,7 @@
               </a:defRPr>
             </a:pPr>
             <a:r>
-              <a:t>MECHANISM 02 // FOUNDATIONAL SETTLEMENT</a:t>
+              <a:t>MECHANISM 01 // NETTING MATH</a:t>
             </a:r>
           </a:p>
         </p:txBody>
@@ -9640,7 +10326,7 @@
         </p:nvSpPr>
         <p:spPr>
           <a:xfrm>
-            <a:off x="731520" y="685800"/>
+            <a:off x="731520" y="658368"/>
             <a:ext cx="10698480" cy="640080"/>
           </a:xfrm>
           <a:prstGeom prst="rect">
@@ -9655,7 +10341,7 @@
           <a:lstStyle/>
           <a:p>
             <a:pPr>
-              <a:defRPr sz="2400" b="1">
+              <a:defRPr sz="2300" b="1">
                 <a:solidFill>
                   <a:srgbClr val="171717"/>
                 </a:solidFill>
@@ -9663,12 +10349,12 @@
               </a:defRPr>
             </a:pPr>
             <a:r>
-              <a:t>'Collect First, Disburse Later' (PvP Clearing)</a:t>
-            </a:r>
-          </a:p>
-          <a:p>
-            <a:pPr>
-              <a:defRPr sz="1200">
+              <a:t>Creating Liquidity Out of Thin Air</a:t>
+            </a:r>
+          </a:p>
+          <a:p>
+            <a:pPr>
+              <a:defRPr sz="1150">
                 <a:solidFill>
                   <a:srgbClr val="66625C"/>
                 </a:solidFill>
@@ -9676,7 +10362,7 @@
               </a:defRPr>
             </a:pPr>
             <a:r>
-              <a:t>Eliminating platform credit risk and external debt through Asymmetric Settlement</a:t>
+              <a:t>How algorithmic multilateral netting eliminates 87.5% of external cash requirements</a:t>
             </a:r>
           </a:p>
         </p:txBody>
@@ -9690,7 +10376,7 @@
         <p:spPr>
           <a:xfrm>
             <a:off x="731520" y="1645920"/>
-            <a:ext cx="2514600" cy="3931920"/>
+            <a:ext cx="5120640" cy="4389120"/>
           </a:xfrm>
           <a:prstGeom prst="roundRect">
             <a:avLst/>
@@ -9700,7 +10386,7 @@
           </a:solidFill>
           <a:ln w="12700">
             <a:solidFill>
-              <a:srgbClr val="E4E0D8"/>
+              <a:srgbClr val="B91C1C"/>
             </a:solidFill>
           </a:ln>
         </p:spPr>
@@ -9719,63 +10405,68 @@
           </a:fontRef>
         </p:style>
         <p:txBody>
-          <a:bodyPr rtlCol="0" anchor="ctr" lIns="228600" rIns="228600" tIns="228600"/>
+          <a:bodyPr rtlCol="0" anchor="ctr" lIns="274320" rIns="274320" tIns="274320"/>
           <a:lstStyle/>
           <a:p>
             <a:pPr algn="ctr">
-              <a:defRPr sz="1100" b="1">
+              <a:defRPr sz="1300" b="1">
+                <a:solidFill>
+                  <a:srgbClr val="B91C1C"/>
+                </a:solidFill>
+              </a:defRPr>
+            </a:pPr>
+            <a:r>
+              <a:t>TRADITIONAL GROSS SETTLEMENT</a:t>
+            </a:r>
+            <a:br/>
+          </a:p>
+          <a:p>
+            <a:pPr>
+              <a:defRPr sz="1200">
                 <a:solidFill>
                   <a:srgbClr val="171717"/>
                 </a:solidFill>
-                <a:latin typeface="Helvetica"/>
-              </a:defRPr>
-            </a:pPr>
-            <a:r>
-              <a:t>DAY 20</a:t>
-            </a:r>
-            <a:br/>
-          </a:p>
-          <a:p>
-            <a:pPr>
-              <a:defRPr sz="1400" b="1">
-                <a:solidFill>
-                  <a:srgbClr val="171717"/>
+              </a:defRPr>
+            </a:pPr>
+            <a:r>
+              <a:t>Contractor A owes Subcontractor B:  60 000 SEK</a:t>
+            </a:r>
+            <a:br/>
+            <a:r>
+              <a:t>Subcontractor B owes Material Supplier C:  60 000 SEK</a:t>
+            </a:r>
+            <a:br/>
+            <a:r>
+              <a:t>Material Supplier C owes Contractor A:  40 000 SEK</a:t>
+            </a:r>
+            <a:br/>
+            <a:br/>
+          </a:p>
+          <a:p>
+            <a:pPr>
+              <a:defRPr sz="1800" b="1">
+                <a:solidFill>
+                  <a:srgbClr val="B91C1C"/>
                 </a:solidFill>
                 <a:latin typeface="Georgia"/>
               </a:defRPr>
             </a:pPr>
             <a:r>
-              <a:t>Netting Optimization</a:t>
-            </a:r>
-            <a:br/>
-            <a:br/>
-          </a:p>
-          <a:p>
-            <a:pPr>
-              <a:defRPr sz="1050">
+              <a:t>Total Gross Cash Required: 160 000 SEK</a:t>
+            </a:r>
+            <a:br/>
+            <a:br/>
+          </a:p>
+          <a:p>
+            <a:pPr>
+              <a:defRPr sz="1100">
                 <a:solidFill>
                   <a:srgbClr val="66625C"/>
                 </a:solidFill>
-                <a:latin typeface="Helvetica"/>
-              </a:defRPr>
-            </a:pPr>
-            <a:r>
-              <a:t>Graph engine computes all circular cancellations. Up to 70% of gross liabilities are wiped out with zero cash moving.</a:t>
-            </a:r>
-            <a:br/>
-            <a:br/>
-          </a:p>
-          <a:p>
-            <a:pPr>
-              <a:defRPr sz="1000" b="1">
-                <a:solidFill>
-                  <a:srgbClr val="171717"/>
-                </a:solidFill>
-                <a:latin typeface="Helvetica"/>
-              </a:defRPr>
-            </a:pPr>
-            <a:r>
-              <a:t>$0 Cash Needed</a:t>
+              </a:defRPr>
+            </a:pPr>
+            <a:r>
+              <a:t>⚠️ 3 separate wire transfers, bank fees, 60 days of waiting, and triple default risk.</a:t>
             </a:r>
           </a:p>
         </p:txBody>
@@ -9788,14 +10479,14 @@
         </p:nvSpPr>
         <p:spPr>
           <a:xfrm>
-            <a:off x="3429000" y="1645920"/>
-            <a:ext cx="2514600" cy="3931920"/>
+            <a:off x="6217920" y="1645920"/>
+            <a:ext cx="5120640" cy="4389120"/>
           </a:xfrm>
           <a:prstGeom prst="roundRect">
             <a:avLst/>
           </a:prstGeom>
           <a:solidFill>
-            <a:srgbClr val="FFFFFF"/>
+            <a:srgbClr val="F1F7F3"/>
           </a:solidFill>
           <a:ln w="12700">
             <a:solidFill>
@@ -9818,316 +10509,68 @@
           </a:fontRef>
         </p:style>
         <p:txBody>
-          <a:bodyPr rtlCol="0" anchor="ctr" lIns="228600" rIns="228600" tIns="228600"/>
+          <a:bodyPr rtlCol="0" anchor="ctr" lIns="274320" rIns="274320" tIns="274320"/>
           <a:lstStyle/>
           <a:p>
             <a:pPr algn="ctr">
+              <a:defRPr sz="1300" b="1">
+                <a:solidFill>
+                  <a:srgbClr val="225E42"/>
+                </a:solidFill>
+              </a:defRPr>
+            </a:pPr>
+            <a:r>
+              <a:t>ACCOUNTED MULTILATERAL NETTING</a:t>
+            </a:r>
+            <a:br/>
+          </a:p>
+          <a:p>
+            <a:pPr>
+              <a:defRPr sz="1200">
+                <a:solidFill>
+                  <a:srgbClr val="225E42"/>
+                </a:solidFill>
+              </a:defRPr>
+            </a:pPr>
+            <a:r>
+              <a:t>Contractor A liability:  0 SEK (Fully Extinguished)</a:t>
+            </a:r>
+            <a:br/>
+            <a:r>
+              <a:t>Material Supplier C liability:  0 SEK (Fully Extinguished)</a:t>
+            </a:r>
+            <a:br/>
+            <a:r>
+              <a:t>Subcontractor B residual payable:  20 000 SEK Net</a:t>
+            </a:r>
+            <a:br/>
+            <a:br/>
+          </a:p>
+          <a:p>
+            <a:pPr>
+              <a:defRPr sz="1800" b="1">
+                <a:solidFill>
+                  <a:srgbClr val="225E42"/>
+                </a:solidFill>
+                <a:latin typeface="Georgia"/>
+              </a:defRPr>
+            </a:pPr>
+            <a:r>
+              <a:t>External Cash Required to Settle: Only 20 000 SEK</a:t>
+            </a:r>
+            <a:br/>
+            <a:br/>
+          </a:p>
+          <a:p>
+            <a:pPr>
               <a:defRPr sz="1100" b="1">
                 <a:solidFill>
-                  <a:srgbClr val="225E42"/>
-                </a:solidFill>
-                <a:latin typeface="Helvetica"/>
-              </a:defRPr>
-            </a:pPr>
-            <a:r>
-              <a:t>DAY 25 (T+0)</a:t>
-            </a:r>
-            <a:br/>
-          </a:p>
-          <a:p>
-            <a:pPr>
-              <a:defRPr sz="1400" b="1">
-                <a:solidFill>
                   <a:srgbClr val="171717"/>
                 </a:solidFill>
-                <a:latin typeface="Georgia"/>
-              </a:defRPr>
-            </a:pPr>
-            <a:r>
-              <a:t>Inbound Collection</a:t>
-            </a:r>
-            <a:br/>
-            <a:br/>
-          </a:p>
-          <a:p>
-            <a:pPr>
-              <a:defRPr sz="1050">
-                <a:solidFill>
-                  <a:srgbClr val="66625C"/>
-                </a:solidFill>
-                <a:latin typeface="Helvetica"/>
-              </a:defRPr>
-            </a:pPr>
-            <a:r>
-              <a:t>Autogiro &amp; SEPA Direct Debit initiates from Net Debtors. Funds land securely in an authorized segregated escrow custodian (Klientmedelskonto).</a:t>
-            </a:r>
-            <a:br/>
-            <a:br/>
-          </a:p>
-          <a:p>
-            <a:pPr>
-              <a:defRPr sz="1000" b="1">
-                <a:solidFill>
-                  <a:srgbClr val="225E42"/>
-                </a:solidFill>
-                <a:latin typeface="Helvetica"/>
-              </a:defRPr>
-            </a:pPr>
-            <a:r>
-              <a:t>Cash Received in Full</a:t>
-            </a:r>
-          </a:p>
-        </p:txBody>
-      </p:sp>
-      <p:sp>
-        <p:nvSpPr>
-          <p:cNvPr id="7" name="Rounded Rectangle 6"/>
-          <p:cNvSpPr/>
-          <p:nvPr/>
-        </p:nvSpPr>
-        <p:spPr>
-          <a:xfrm>
-            <a:off x="6126480" y="1645920"/>
-            <a:ext cx="2514600" cy="3931920"/>
-          </a:xfrm>
-          <a:prstGeom prst="roundRect">
-            <a:avLst/>
-          </a:prstGeom>
-          <a:solidFill>
-            <a:srgbClr val="FFFFFF"/>
-          </a:solidFill>
-          <a:ln w="12700">
-            <a:solidFill>
-              <a:srgbClr val="A65A24"/>
-            </a:solidFill>
-          </a:ln>
-        </p:spPr>
-        <p:style>
-          <a:lnRef idx="1">
-            <a:schemeClr val="accent1"/>
-          </a:lnRef>
-          <a:fillRef idx="3">
-            <a:schemeClr val="accent1"/>
-          </a:fillRef>
-          <a:effectRef idx="2">
-            <a:schemeClr val="accent1"/>
-          </a:effectRef>
-          <a:fontRef idx="minor">
-            <a:schemeClr val="lt1"/>
-          </a:fontRef>
-        </p:style>
-        <p:txBody>
-          <a:bodyPr rtlCol="0" anchor="ctr" lIns="228600" rIns="228600" tIns="228600"/>
-          <a:lstStyle/>
-          <a:p>
-            <a:pPr algn="ctr">
-              <a:defRPr sz="1100" b="1">
-                <a:solidFill>
-                  <a:srgbClr val="A65A24"/>
-                </a:solidFill>
-                <a:latin typeface="Helvetica"/>
-              </a:defRPr>
-            </a:pPr>
-            <a:r>
-              <a:t>DAY 26–27 (T+1 to T+2)</a:t>
-            </a:r>
-            <a:br/>
-          </a:p>
-          <a:p>
-            <a:pPr>
-              <a:defRPr sz="1400" b="1">
-                <a:solidFill>
-                  <a:srgbClr val="171717"/>
-                </a:solidFill>
-                <a:latin typeface="Georgia"/>
-              </a:defRPr>
-            </a:pPr>
-            <a:r>
-              <a:t>Irrevocable Float</a:t>
-            </a:r>
-            <a:br/>
-            <a:br/>
-          </a:p>
-          <a:p>
-            <a:pPr>
-              <a:defRPr sz="1050">
-                <a:solidFill>
-                  <a:srgbClr val="66625C"/>
-                </a:solidFill>
-                <a:latin typeface="Helvetica"/>
-              </a:defRPr>
-            </a:pPr>
-            <a:r>
-              <a:t>Inbound funds clear irrevocably. Zero clawback risk. Capital generates risk-free central bank deposit float (3.0%–3.5%).</a:t>
-            </a:r>
-            <a:br/>
-            <a:br/>
-          </a:p>
-          <a:p>
-            <a:pPr>
-              <a:defRPr sz="1000" b="1">
-                <a:solidFill>
-                  <a:srgbClr val="A65A24"/>
-                </a:solidFill>
-                <a:latin typeface="Helvetica"/>
-              </a:defRPr>
-            </a:pPr>
-            <a:r>
-              <a:t>100% Margin Float</a:t>
-            </a:r>
-          </a:p>
-        </p:txBody>
-      </p:sp>
-      <p:sp>
-        <p:nvSpPr>
-          <p:cNvPr id="8" name="Rounded Rectangle 7"/>
-          <p:cNvSpPr/>
-          <p:nvPr/>
-        </p:nvSpPr>
-        <p:spPr>
-          <a:xfrm>
-            <a:off x="8823960" y="1645920"/>
-            <a:ext cx="2514600" cy="3931920"/>
-          </a:xfrm>
-          <a:prstGeom prst="roundRect">
-            <a:avLst/>
-          </a:prstGeom>
-          <a:solidFill>
-            <a:srgbClr val="FFFFFF"/>
-          </a:solidFill>
-          <a:ln w="12700">
-            <a:solidFill>
-              <a:srgbClr val="225E42"/>
-            </a:solidFill>
-          </a:ln>
-        </p:spPr>
-        <p:style>
-          <a:lnRef idx="1">
-            <a:schemeClr val="accent1"/>
-          </a:lnRef>
-          <a:fillRef idx="3">
-            <a:schemeClr val="accent1"/>
-          </a:fillRef>
-          <a:effectRef idx="2">
-            <a:schemeClr val="accent1"/>
-          </a:effectRef>
-          <a:fontRef idx="minor">
-            <a:schemeClr val="lt1"/>
-          </a:fontRef>
-        </p:style>
-        <p:txBody>
-          <a:bodyPr rtlCol="0" anchor="ctr" lIns="228600" rIns="228600" tIns="228600"/>
-          <a:lstStyle/>
-          <a:p>
-            <a:pPr algn="ctr">
-              <a:defRPr sz="1100" b="1">
-                <a:solidFill>
-                  <a:srgbClr val="225E42"/>
-                </a:solidFill>
-                <a:latin typeface="Helvetica"/>
-              </a:defRPr>
-            </a:pPr>
-            <a:r>
-              <a:t>DAY 28 (T+3)</a:t>
-            </a:r>
-            <a:br/>
-          </a:p>
-          <a:p>
-            <a:pPr>
-              <a:defRPr sz="1400" b="1">
-                <a:solidFill>
-                  <a:srgbClr val="171717"/>
-                </a:solidFill>
-                <a:latin typeface="Georgia"/>
-              </a:defRPr>
-            </a:pPr>
-            <a:r>
-              <a:t>Outbound Payout</a:t>
-            </a:r>
-            <a:br/>
-            <a:br/>
-          </a:p>
-          <a:p>
-            <a:pPr>
-              <a:defRPr sz="1050">
-                <a:solidFill>
-                  <a:srgbClr val="66625C"/>
-                </a:solidFill>
-                <a:latin typeface="Helvetica"/>
-              </a:defRPr>
-            </a:pPr>
-            <a:r>
-              <a:t>Automated payouts disburse to Net Creditors. Balanced BAS Serie A vouchers post back into Fortnox/Visma with 0.00 difference.</a:t>
-            </a:r>
-            <a:br/>
-            <a:br/>
-          </a:p>
-          <a:p>
-            <a:pPr>
-              <a:defRPr sz="1000" b="1">
-                <a:solidFill>
-                  <a:srgbClr val="225E42"/>
-                </a:solidFill>
-                <a:latin typeface="Helvetica"/>
-              </a:defRPr>
-            </a:pPr>
-            <a:r>
-              <a:t>Zero Default Risk</a:t>
-            </a:r>
-          </a:p>
-        </p:txBody>
-      </p:sp>
-      <p:sp>
-        <p:nvSpPr>
-          <p:cNvPr id="9" name="Rounded Rectangle 8"/>
-          <p:cNvSpPr/>
-          <p:nvPr/>
-        </p:nvSpPr>
-        <p:spPr>
-          <a:xfrm>
-            <a:off x="731520" y="5760720"/>
-            <a:ext cx="10607040" cy="594360"/>
-          </a:xfrm>
-          <a:prstGeom prst="roundRect">
-            <a:avLst/>
-          </a:prstGeom>
-          <a:solidFill>
-            <a:srgbClr val="F3F0EA"/>
-          </a:solidFill>
-          <a:ln w="12700">
-            <a:solidFill>
-              <a:srgbClr val="E4E0D8"/>
-            </a:solidFill>
-          </a:ln>
-        </p:spPr>
-        <p:style>
-          <a:lnRef idx="1">
-            <a:schemeClr val="accent1"/>
-          </a:lnRef>
-          <a:fillRef idx="3">
-            <a:schemeClr val="accent1"/>
-          </a:fillRef>
-          <a:effectRef idx="2">
-            <a:schemeClr val="accent1"/>
-          </a:effectRef>
-          <a:fontRef idx="minor">
-            <a:schemeClr val="lt1"/>
-          </a:fontRef>
-        </p:style>
-        <p:txBody>
-          <a:bodyPr rtlCol="0" anchor="ctr" lIns="137160" tIns="137160"/>
-          <a:lstStyle/>
-          <a:p>
-            <a:pPr algn="ctr">
-              <a:defRPr sz="1100" b="1">
-                <a:solidFill>
-                  <a:srgbClr val="225E42"/>
-                </a:solidFill>
-                <a:latin typeface="Helvetica"/>
-              </a:defRPr>
-            </a:pPr>
-            <a:r>
-              <a:t>🛡️ ZERO DEBT ENGINE: Because payouts are funded by verified collections 48h prior, Accounted requires $0 in external debt warehouse lines.</a:t>
+              </a:defRPr>
+            </a:pPr>
+            <a:r>
+              <a:t>✓ 140 000 SEK in gross debt erased. Systemic counterparty risk reduced by 87.5%.</a:t>
             </a:r>
           </a:p>
         </p:txBody>
@@ -10224,7 +10667,7 @@
               </a:defRPr>
             </a:pPr>
             <a:r>
-              <a:t>MECHANISM 03 // LIQUIDITY ENGINE</a:t>
+              <a:t>MECHANISM 02 // FOUNDATIONAL SETTLEMENT</a:t>
             </a:r>
           </a:p>
         </p:txBody>
@@ -10237,7 +10680,7 @@
         </p:nvSpPr>
         <p:spPr>
           <a:xfrm>
-            <a:off x="731520" y="685800"/>
+            <a:off x="731520" y="658368"/>
             <a:ext cx="10698480" cy="640080"/>
           </a:xfrm>
           <a:prstGeom prst="rect">
@@ -10252,7 +10695,7 @@
           <a:lstStyle/>
           <a:p>
             <a:pPr>
-              <a:defRPr sz="2400" b="1">
+              <a:defRPr sz="2300" b="1">
                 <a:solidFill>
                   <a:srgbClr val="171717"/>
                 </a:solidFill>
@@ -10260,12 +10703,12 @@
               </a:defRPr>
             </a:pPr>
             <a:r>
-              <a:t>The Anchor Treasury Engine</a:t>
-            </a:r>
-          </a:p>
-          <a:p>
-            <a:pPr>
-              <a:defRPr sz="1200">
+              <a:t>'Collect First, Disburse Later' (PvP Clearing)</a:t>
+            </a:r>
+          </a:p>
+          <a:p>
+            <a:pPr>
+              <a:defRPr sz="1150">
                 <a:solidFill>
                   <a:srgbClr val="66625C"/>
                 </a:solidFill>
@@ -10273,7 +10716,7 @@
               </a:defRPr>
             </a:pPr>
             <a:r>
-              <a:t>Self-funding early payouts while turning enterprise CFOs into viral platform champions</a:t>
+              <a:t>Eliminating platform credit risk and external debt through Asymmetric Settlement</a:t>
             </a:r>
           </a:p>
         </p:txBody>
@@ -10287,7 +10730,7 @@
         <p:spPr>
           <a:xfrm>
             <a:off x="731520" y="1645920"/>
-            <a:ext cx="5120640" cy="3840480"/>
+            <a:ext cx="2514600" cy="3931920"/>
           </a:xfrm>
           <a:prstGeom prst="roundRect">
             <a:avLst/>
@@ -10316,62 +10759,60 @@
           </a:fontRef>
         </p:style>
         <p:txBody>
-          <a:bodyPr rtlCol="0" anchor="ctr" lIns="274320" rIns="274320" tIns="274320"/>
+          <a:bodyPr rtlCol="0" anchor="ctr" lIns="228600" rIns="228600" tIns="228600"/>
           <a:lstStyle/>
           <a:p>
             <a:pPr algn="ctr">
               <a:defRPr sz="1100" b="1">
                 <a:solidFill>
+                  <a:srgbClr val="171717"/>
+                </a:solidFill>
+              </a:defRPr>
+            </a:pPr>
+            <a:r>
+              <a:t>DAY 20</a:t>
+            </a:r>
+            <a:br/>
+          </a:p>
+          <a:p>
+            <a:pPr>
+              <a:defRPr sz="1400" b="1">
+                <a:solidFill>
+                  <a:srgbClr val="171717"/>
+                </a:solidFill>
+                <a:latin typeface="Georgia"/>
+              </a:defRPr>
+            </a:pPr>
+            <a:r>
+              <a:t>Netting Optimization</a:t>
+            </a:r>
+            <a:br/>
+            <a:br/>
+          </a:p>
+          <a:p>
+            <a:pPr>
+              <a:defRPr sz="1050">
+                <a:solidFill>
                   <a:srgbClr val="66625C"/>
                 </a:solidFill>
-                <a:latin typeface="Helvetica"/>
-              </a:defRPr>
-            </a:pPr>
-            <a:r>
-              <a:t>THE PROBLEM WITH EARLY DRAWDOWNS</a:t>
-            </a:r>
-            <a:br/>
-          </a:p>
-          <a:p>
-            <a:pPr>
-              <a:defRPr sz="1800" b="1">
+              </a:defRPr>
+            </a:pPr>
+            <a:r>
+              <a:t>Graph engine computes all circular cancellations. Up to 70% of gross liabilities are wiped out with zero cash moving.</a:t>
+            </a:r>
+            <a:br/>
+            <a:br/>
+          </a:p>
+          <a:p>
+            <a:pPr>
+              <a:defRPr sz="1000" b="1">
                 <a:solidFill>
                   <a:srgbClr val="171717"/>
                 </a:solidFill>
-                <a:latin typeface="Georgia"/>
-              </a:defRPr>
-            </a:pPr>
-            <a:r>
-              <a:t>What if a supplier needs cash on Day 10?</a:t>
-            </a:r>
-            <a:br/>
-          </a:p>
-          <a:p>
-            <a:pPr>
-              <a:defRPr sz="1150">
-                <a:solidFill>
-                  <a:srgbClr val="66625C"/>
-                </a:solidFill>
-                <a:latin typeface="Helvetica"/>
-              </a:defRPr>
-            </a:pPr>
-            <a:r>
-              <a:t>Scheduled monthly settlement clears on the 28th. But subcontractors frequently need payroll cash on Day 10. Traditional fintechs borrow from expensive 8% debt funds to front this money.</a:t>
-            </a:r>
-            <a:br/>
-            <a:br/>
-          </a:p>
-          <a:p>
-            <a:pPr>
-              <a:defRPr sz="1150" b="1">
-                <a:solidFill>
-                  <a:srgbClr val="171717"/>
-                </a:solidFill>
-                <a:latin typeface="Helvetica"/>
-              </a:defRPr>
-            </a:pPr>
-            <a:r>
-              <a:t>The Accounted Breakthrough: We route early cashouts to the Anchor Buyer's Corporate Treasury.</a:t>
+              </a:defRPr>
+            </a:pPr>
+            <a:r>
+              <a:t>$0 Cash Needed</a:t>
             </a:r>
           </a:p>
         </p:txBody>
@@ -10384,8 +10825,8 @@
         </p:nvSpPr>
         <p:spPr>
           <a:xfrm>
-            <a:off x="6217920" y="1645920"/>
-            <a:ext cx="5120640" cy="3840480"/>
+            <a:off x="3429000" y="1645920"/>
+            <a:ext cx="2514600" cy="3931920"/>
           </a:xfrm>
           <a:prstGeom prst="roundRect">
             <a:avLst/>
@@ -10414,7 +10855,7 @@
           </a:fontRef>
         </p:style>
         <p:txBody>
-          <a:bodyPr rtlCol="0" anchor="ctr" lIns="274320" rIns="274320" tIns="274320"/>
+          <a:bodyPr rtlCol="0" anchor="ctr" lIns="228600" rIns="228600" tIns="228600"/>
           <a:lstStyle/>
           <a:p>
             <a:pPr algn="ctr">
@@ -10422,17 +10863,16 @@
                 <a:solidFill>
                   <a:srgbClr val="225E42"/>
                 </a:solidFill>
-                <a:latin typeface="Helvetica"/>
-              </a:defRPr>
-            </a:pPr>
-            <a:r>
-              <a:t>CORPORATE TREASURY ARBITRAGE</a:t>
-            </a:r>
-            <a:br/>
-          </a:p>
-          <a:p>
-            <a:pPr>
-              <a:defRPr sz="1800" b="1">
+              </a:defRPr>
+            </a:pPr>
+            <a:r>
+              <a:t>DAY 25 (T+0)</a:t>
+            </a:r>
+            <a:br/>
+          </a:p>
+          <a:p>
+            <a:pPr>
+              <a:defRPr sz="1400" b="1">
                 <a:solidFill>
                   <a:srgbClr val="171717"/>
                 </a:solidFill>
@@ -10440,36 +10880,35 @@
               </a:defRPr>
             </a:pPr>
             <a:r>
-              <a:t>Earning 8%–10% APY on Idle AP Cash</a:t>
-            </a:r>
-            <a:br/>
-          </a:p>
-          <a:p>
-            <a:pPr>
-              <a:defRPr sz="1150">
+              <a:t>Inbound Collection</a:t>
+            </a:r>
+            <a:br/>
+            <a:br/>
+          </a:p>
+          <a:p>
+            <a:pPr>
+              <a:defRPr sz="1050">
                 <a:solidFill>
                   <a:srgbClr val="66625C"/>
                 </a:solidFill>
-                <a:latin typeface="Helvetica"/>
-              </a:defRPr>
-            </a:pPr>
-            <a:r>
-              <a:t>Enterprise buyers (e.g. Skanska, Peab, funded startups) currently earn ~2.5% in commercial bank deposits. By funding early payouts to their own verified suppliers, the Anchor earns a 1% discount on 15-day turnover:</a:t>
-            </a:r>
-            <a:br/>
-            <a:br/>
-          </a:p>
-          <a:p>
-            <a:pPr>
-              <a:defRPr sz="1400" b="1">
+              </a:defRPr>
+            </a:pPr>
+            <a:r>
+              <a:t>Autogiro &amp; SEPA Direct Debit initiates from Net Debtors. Funds land securely in an authorized segregated escrow custodian (Klientmedelskonto).</a:t>
+            </a:r>
+            <a:br/>
+            <a:br/>
+          </a:p>
+          <a:p>
+            <a:pPr>
+              <a:defRPr sz="1000" b="1">
                 <a:solidFill>
                   <a:srgbClr val="225E42"/>
                 </a:solidFill>
-                <a:latin typeface="Georgia"/>
-              </a:defRPr>
-            </a:pPr>
-            <a:r>
-              <a:t>1.0% in 15 days = ~24% Annualized Return on Idle Cash!</a:t>
+              </a:defRPr>
+            </a:pPr>
+            <a:r>
+              <a:t>Cash Received in Full</a:t>
             </a:r>
           </a:p>
         </p:txBody>
@@ -10482,8 +10921,200 @@
         </p:nvSpPr>
         <p:spPr>
           <a:xfrm>
-            <a:off x="731520" y="5669280"/>
-            <a:ext cx="10607040" cy="640080"/>
+            <a:off x="6126480" y="1645920"/>
+            <a:ext cx="2514600" cy="3931920"/>
+          </a:xfrm>
+          <a:prstGeom prst="roundRect">
+            <a:avLst/>
+          </a:prstGeom>
+          <a:solidFill>
+            <a:srgbClr val="FFFFFF"/>
+          </a:solidFill>
+          <a:ln w="12700">
+            <a:solidFill>
+              <a:srgbClr val="A65A24"/>
+            </a:solidFill>
+          </a:ln>
+        </p:spPr>
+        <p:style>
+          <a:lnRef idx="1">
+            <a:schemeClr val="accent1"/>
+          </a:lnRef>
+          <a:fillRef idx="3">
+            <a:schemeClr val="accent1"/>
+          </a:fillRef>
+          <a:effectRef idx="2">
+            <a:schemeClr val="accent1"/>
+          </a:effectRef>
+          <a:fontRef idx="minor">
+            <a:schemeClr val="lt1"/>
+          </a:fontRef>
+        </p:style>
+        <p:txBody>
+          <a:bodyPr rtlCol="0" anchor="ctr" lIns="228600" rIns="228600" tIns="228600"/>
+          <a:lstStyle/>
+          <a:p>
+            <a:pPr algn="ctr">
+              <a:defRPr sz="1100" b="1">
+                <a:solidFill>
+                  <a:srgbClr val="A65A24"/>
+                </a:solidFill>
+              </a:defRPr>
+            </a:pPr>
+            <a:r>
+              <a:t>DAY 26–27 (T+1 to T+2)</a:t>
+            </a:r>
+            <a:br/>
+          </a:p>
+          <a:p>
+            <a:pPr>
+              <a:defRPr sz="1400" b="1">
+                <a:solidFill>
+                  <a:srgbClr val="171717"/>
+                </a:solidFill>
+                <a:latin typeface="Georgia"/>
+              </a:defRPr>
+            </a:pPr>
+            <a:r>
+              <a:t>Irrevocable Float</a:t>
+            </a:r>
+            <a:br/>
+            <a:br/>
+          </a:p>
+          <a:p>
+            <a:pPr>
+              <a:defRPr sz="1050">
+                <a:solidFill>
+                  <a:srgbClr val="66625C"/>
+                </a:solidFill>
+              </a:defRPr>
+            </a:pPr>
+            <a:r>
+              <a:t>Inbound funds clear irrevocably. Zero clawback risk. Capital generates risk-free central bank deposit float (3.0%–3.5%).</a:t>
+            </a:r>
+            <a:br/>
+            <a:br/>
+          </a:p>
+          <a:p>
+            <a:pPr>
+              <a:defRPr sz="1000" b="1">
+                <a:solidFill>
+                  <a:srgbClr val="A65A24"/>
+                </a:solidFill>
+              </a:defRPr>
+            </a:pPr>
+            <a:r>
+              <a:t>100% Margin Float</a:t>
+            </a:r>
+          </a:p>
+        </p:txBody>
+      </p:sp>
+      <p:sp>
+        <p:nvSpPr>
+          <p:cNvPr id="8" name="Rounded Rectangle 7"/>
+          <p:cNvSpPr/>
+          <p:nvPr/>
+        </p:nvSpPr>
+        <p:spPr>
+          <a:xfrm>
+            <a:off x="8823960" y="1645920"/>
+            <a:ext cx="2514600" cy="3931920"/>
+          </a:xfrm>
+          <a:prstGeom prst="roundRect">
+            <a:avLst/>
+          </a:prstGeom>
+          <a:solidFill>
+            <a:srgbClr val="FFFFFF"/>
+          </a:solidFill>
+          <a:ln w="12700">
+            <a:solidFill>
+              <a:srgbClr val="225E42"/>
+            </a:solidFill>
+          </a:ln>
+        </p:spPr>
+        <p:style>
+          <a:lnRef idx="1">
+            <a:schemeClr val="accent1"/>
+          </a:lnRef>
+          <a:fillRef idx="3">
+            <a:schemeClr val="accent1"/>
+          </a:fillRef>
+          <a:effectRef idx="2">
+            <a:schemeClr val="accent1"/>
+          </a:effectRef>
+          <a:fontRef idx="minor">
+            <a:schemeClr val="lt1"/>
+          </a:fontRef>
+        </p:style>
+        <p:txBody>
+          <a:bodyPr rtlCol="0" anchor="ctr" lIns="228600" rIns="228600" tIns="228600"/>
+          <a:lstStyle/>
+          <a:p>
+            <a:pPr algn="ctr">
+              <a:defRPr sz="1100" b="1">
+                <a:solidFill>
+                  <a:srgbClr val="225E42"/>
+                </a:solidFill>
+              </a:defRPr>
+            </a:pPr>
+            <a:r>
+              <a:t>DAY 28 (T+3)</a:t>
+            </a:r>
+            <a:br/>
+          </a:p>
+          <a:p>
+            <a:pPr>
+              <a:defRPr sz="1400" b="1">
+                <a:solidFill>
+                  <a:srgbClr val="171717"/>
+                </a:solidFill>
+                <a:latin typeface="Georgia"/>
+              </a:defRPr>
+            </a:pPr>
+            <a:r>
+              <a:t>Outbound Payout</a:t>
+            </a:r>
+            <a:br/>
+            <a:br/>
+          </a:p>
+          <a:p>
+            <a:pPr>
+              <a:defRPr sz="1050">
+                <a:solidFill>
+                  <a:srgbClr val="66625C"/>
+                </a:solidFill>
+              </a:defRPr>
+            </a:pPr>
+            <a:r>
+              <a:t>Automated payouts disburse to Net Creditors. Balanced BAS Serie A vouchers post back into Fortnox/Visma with 0.00 difference.</a:t>
+            </a:r>
+            <a:br/>
+            <a:br/>
+          </a:p>
+          <a:p>
+            <a:pPr>
+              <a:defRPr sz="1000" b="1">
+                <a:solidFill>
+                  <a:srgbClr val="225E42"/>
+                </a:solidFill>
+              </a:defRPr>
+            </a:pPr>
+            <a:r>
+              <a:t>Zero Default Risk</a:t>
+            </a:r>
+          </a:p>
+        </p:txBody>
+      </p:sp>
+      <p:sp>
+        <p:nvSpPr>
+          <p:cNvPr id="9" name="Rounded Rectangle 8"/>
+          <p:cNvSpPr/>
+          <p:nvPr/>
+        </p:nvSpPr>
+        <p:spPr>
+          <a:xfrm>
+            <a:off x="731520" y="5760720"/>
+            <a:ext cx="10607040" cy="594360"/>
           </a:xfrm>
           <a:prstGeom prst="roundRect">
             <a:avLst/>
@@ -10518,13 +11149,12 @@
             <a:pPr algn="ctr">
               <a:defRPr sz="1100" b="1">
                 <a:solidFill>
-                  <a:srgbClr val="171717"/>
-                </a:solidFill>
-                <a:latin typeface="Helvetica"/>
-              </a:defRPr>
-            </a:pPr>
-            <a:r>
-              <a:t>🚀 THE VIRAL MANDATE: Anchor CFOs actively mandate all 100–500 suppliers join Accounted to capture treasury yield across their entire vendor base.</a:t>
+                  <a:srgbClr val="225E42"/>
+                </a:solidFill>
+              </a:defRPr>
+            </a:pPr>
+            <a:r>
+              <a:t>🛡️ ZERO DEBT ENGINE: Because payouts are funded by verified collections 48h prior, Accounted requires $0 in external debt warehouse lines.</a:t>
             </a:r>
           </a:p>
         </p:txBody>
@@ -10621,7 +11251,7 @@
               </a:defRPr>
             </a:pPr>
             <a:r>
-              <a:t>MECHANISM 04 // CAPITAL ARCHITECTURE</a:t>
+              <a:t>MECHANISM 03 // LIQUIDITY ENGINE</a:t>
             </a:r>
           </a:p>
         </p:txBody>
@@ -10634,7 +11264,7 @@
         </p:nvSpPr>
         <p:spPr>
           <a:xfrm>
-            <a:off x="731520" y="685800"/>
+            <a:off x="731520" y="658368"/>
             <a:ext cx="10698480" cy="640080"/>
           </a:xfrm>
           <a:prstGeom prst="rect">
@@ -10649,7 +11279,7 @@
           <a:lstStyle/>
           <a:p>
             <a:pPr>
-              <a:defRPr sz="2400" b="1">
+              <a:defRPr sz="2300" b="1">
                 <a:solidFill>
                   <a:srgbClr val="171717"/>
                 </a:solidFill>
@@ -10657,12 +11287,12 @@
               </a:defRPr>
             </a:pPr>
             <a:r>
-              <a:t>The 4-Layer Liquidity Waterfall</a:t>
-            </a:r>
-          </a:p>
-          <a:p>
-            <a:pPr>
-              <a:defRPr sz="1200">
+              <a:t>The Anchor Treasury Engine</a:t>
+            </a:r>
+          </a:p>
+          <a:p>
+            <a:pPr>
+              <a:defRPr sz="1150">
                 <a:solidFill>
                   <a:srgbClr val="66625C"/>
                 </a:solidFill>
@@ -10670,7 +11300,7 @@
               </a:defRPr>
             </a:pPr>
             <a:r>
-              <a:t>Guaranteed 10-second cashouts with an ultra-low blended cost of capital</a:t>
+              <a:t>Self-funding early payouts while turning enterprise CFOs into viral platform champions</a:t>
             </a:r>
           </a:p>
         </p:txBody>
@@ -10684,7 +11314,7 @@
         <p:spPr>
           <a:xfrm>
             <a:off x="731520" y="1645920"/>
-            <a:ext cx="10607040" cy="1005840"/>
+            <a:ext cx="5120640" cy="3840480"/>
           </a:xfrm>
           <a:prstGeom prst="roundRect">
             <a:avLst/>
@@ -10713,33 +11343,59 @@
           </a:fontRef>
         </p:style>
         <p:txBody>
-          <a:bodyPr rtlCol="0" anchor="ctr" lIns="274320" tIns="182880"/>
+          <a:bodyPr rtlCol="0" anchor="ctr" lIns="274320" rIns="274320" tIns="274320"/>
           <a:lstStyle/>
           <a:p>
             <a:pPr algn="ctr">
-              <a:defRPr sz="1300" b="1">
+              <a:defRPr sz="1100" b="1">
+                <a:solidFill>
+                  <a:srgbClr val="66625C"/>
+                </a:solidFill>
+              </a:defRPr>
+            </a:pPr>
+            <a:r>
+              <a:t>THE PROBLEM WITH EARLY DRAWDOWNS</a:t>
+            </a:r>
+            <a:br/>
+          </a:p>
+          <a:p>
+            <a:pPr>
+              <a:defRPr sz="1800" b="1">
                 <a:solidFill>
                   <a:srgbClr val="171717"/>
                 </a:solidFill>
-                <a:latin typeface="Helvetica"/>
-              </a:defRPr>
-            </a:pPr>
-            <a:r>
-              <a:t>Layer 1: Multilateral Netting   |   Cost: 0.0% Capital Cost</a:t>
-            </a:r>
-            <a:br/>
-          </a:p>
-          <a:p>
-            <a:pPr>
-              <a:defRPr sz="1100">
+                <a:latin typeface="Georgia"/>
+              </a:defRPr>
+            </a:pPr>
+            <a:r>
+              <a:t>What if a supplier needs cash on Day 10?</a:t>
+            </a:r>
+            <a:br/>
+          </a:p>
+          <a:p>
+            <a:pPr>
+              <a:defRPr sz="1150">
+                <a:solidFill>
+                  <a:srgbClr val="66625C"/>
+                </a:solidFill>
+              </a:defRPr>
+            </a:pPr>
+            <a:r>
+              <a:t>Scheduled monthly settlement clears on the 28th. But subcontractors frequently need payroll cash on Day 10. Traditional fintechs borrow from expensive 8% debt funds to front this money.</a:t>
+            </a:r>
+            <a:br/>
+            <a:br/>
+          </a:p>
+          <a:p>
+            <a:pPr>
+              <a:defRPr sz="1150" b="1">
                 <a:solidFill>
                   <a:srgbClr val="171717"/>
                 </a:solidFill>
-                <a:latin typeface="Helvetica"/>
-              </a:defRPr>
-            </a:pPr>
-            <a:r>
-              <a:t>Extinguishes 40%–70% of gross liabilities mathematically with zero cash.  ($0 Cash Movement)</a:t>
+              </a:defRPr>
+            </a:pPr>
+            <a:r>
+              <a:t>The Accounted Breakthrough: We route early cashouts to the Anchor Buyer's Corporate Treasury.</a:t>
             </a:r>
           </a:p>
         </p:txBody>
@@ -10752,8 +11408,8 @@
         </p:nvSpPr>
         <p:spPr>
           <a:xfrm>
-            <a:off x="731520" y="2788920"/>
-            <a:ext cx="10607040" cy="1005840"/>
+            <a:off x="6217920" y="1645920"/>
+            <a:ext cx="5120640" cy="3840480"/>
           </a:xfrm>
           <a:prstGeom prst="roundRect">
             <a:avLst/>
@@ -10782,33 +11438,60 @@
           </a:fontRef>
         </p:style>
         <p:txBody>
-          <a:bodyPr rtlCol="0" anchor="ctr" lIns="274320" tIns="182880"/>
+          <a:bodyPr rtlCol="0" anchor="ctr" lIns="274320" rIns="274320" tIns="274320"/>
           <a:lstStyle/>
           <a:p>
             <a:pPr algn="ctr">
-              <a:defRPr sz="1300" b="1">
+              <a:defRPr sz="1100" b="1">
                 <a:solidFill>
                   <a:srgbClr val="225E42"/>
                 </a:solidFill>
-                <a:latin typeface="Helvetica"/>
-              </a:defRPr>
-            </a:pPr>
-            <a:r>
-              <a:t>Layer 2: Anchor Treasury Self-Funding   |   Cost: 0.0% Cost to Accounted</a:t>
-            </a:r>
-            <a:br/>
-          </a:p>
-          <a:p>
-            <a:pPr>
-              <a:defRPr sz="1100">
+              </a:defRPr>
+            </a:pPr>
+            <a:r>
+              <a:t>CORPORATE TREASURY ARBITRAGE</a:t>
+            </a:r>
+            <a:br/>
+          </a:p>
+          <a:p>
+            <a:pPr>
+              <a:defRPr sz="1800" b="1">
                 <a:solidFill>
                   <a:srgbClr val="171717"/>
                 </a:solidFill>
-                <a:latin typeface="Helvetica"/>
-              </a:defRPr>
-            </a:pPr>
-            <a:r>
-              <a:t>Anchor buyer funds own verified suppliers for 8% APY treasury yield.  (Anchor Earns Fee)</a:t>
+                <a:latin typeface="Georgia"/>
+              </a:defRPr>
+            </a:pPr>
+            <a:r>
+              <a:t>Earning 8%–10% APY on Idle AP Cash</a:t>
+            </a:r>
+            <a:br/>
+          </a:p>
+          <a:p>
+            <a:pPr>
+              <a:defRPr sz="1150">
+                <a:solidFill>
+                  <a:srgbClr val="66625C"/>
+                </a:solidFill>
+              </a:defRPr>
+            </a:pPr>
+            <a:r>
+              <a:t>Enterprise buyers (e.g. Skanska, Peab, funded startups) currently earn ~2.5% in commercial bank deposits. By funding early payouts to their own verified suppliers, the Anchor earns a 1% discount on 15-day turnover:</a:t>
+            </a:r>
+            <a:br/>
+            <a:br/>
+          </a:p>
+          <a:p>
+            <a:pPr>
+              <a:defRPr sz="1400" b="1">
+                <a:solidFill>
+                  <a:srgbClr val="225E42"/>
+                </a:solidFill>
+                <a:latin typeface="Georgia"/>
+              </a:defRPr>
+            </a:pPr>
+            <a:r>
+              <a:t>1.0% in 15 days = ~24% Annualized Return on Idle Cash!</a:t>
             </a:r>
           </a:p>
         </p:txBody>
@@ -10821,83 +11504,14 @@
         </p:nvSpPr>
         <p:spPr>
           <a:xfrm>
-            <a:off x="731520" y="3931920"/>
-            <a:ext cx="10607040" cy="1005840"/>
+            <a:off x="731520" y="5669280"/>
+            <a:ext cx="10607040" cy="640080"/>
           </a:xfrm>
           <a:prstGeom prst="roundRect">
             <a:avLst/>
           </a:prstGeom>
           <a:solidFill>
-            <a:srgbClr val="FFFFFF"/>
-          </a:solidFill>
-          <a:ln w="12700">
-            <a:solidFill>
-              <a:srgbClr val="A65A24"/>
-            </a:solidFill>
-          </a:ln>
-        </p:spPr>
-        <p:style>
-          <a:lnRef idx="1">
-            <a:schemeClr val="accent1"/>
-          </a:lnRef>
-          <a:fillRef idx="3">
-            <a:schemeClr val="accent1"/>
-          </a:fillRef>
-          <a:effectRef idx="2">
-            <a:schemeClr val="accent1"/>
-          </a:effectRef>
-          <a:fontRef idx="minor">
-            <a:schemeClr val="lt1"/>
-          </a:fontRef>
-        </p:style>
-        <p:txBody>
-          <a:bodyPr rtlCol="0" anchor="ctr" lIns="274320" tIns="182880"/>
-          <a:lstStyle/>
-          <a:p>
-            <a:pPr algn="ctr">
-              <a:defRPr sz="1300" b="1">
-                <a:solidFill>
-                  <a:srgbClr val="A65A24"/>
-                </a:solidFill>
-                <a:latin typeface="Helvetica"/>
-              </a:defRPr>
-            </a:pPr>
-            <a:r>
-              <a:t>Layer 3: Network Pre-Payer Pool   |   Cost: ~1.5% Rebate Cost</a:t>
-            </a:r>
-            <a:br/>
-          </a:p>
-          <a:p>
-            <a:pPr>
-              <a:defRPr sz="1100">
-                <a:solidFill>
-                  <a:srgbClr val="171717"/>
-                </a:solidFill>
-                <a:latin typeface="Helvetica"/>
-              </a:defRPr>
-            </a:pPr>
-            <a:r>
-              <a:t>Net debtors receive fee rebates for settling 10 days early, funding outgoing advances.  (Funded by Float)</a:t>
-            </a:r>
-          </a:p>
-        </p:txBody>
-      </p:sp>
-      <p:sp>
-        <p:nvSpPr>
-          <p:cNvPr id="8" name="Rounded Rectangle 7"/>
-          <p:cNvSpPr/>
-          <p:nvPr/>
-        </p:nvSpPr>
-        <p:spPr>
-          <a:xfrm>
-            <a:off x="731520" y="5074920"/>
-            <a:ext cx="10607040" cy="1005840"/>
-          </a:xfrm>
-          <a:prstGeom prst="roundRect">
-            <a:avLst/>
-          </a:prstGeom>
-          <a:solidFill>
-            <a:srgbClr val="FFFFFF"/>
+            <a:srgbClr val="F3F0EA"/>
           </a:solidFill>
           <a:ln w="12700">
             <a:solidFill>
@@ -10920,33 +11534,18 @@
           </a:fontRef>
         </p:style>
         <p:txBody>
-          <a:bodyPr rtlCol="0" anchor="ctr" lIns="274320" tIns="182880"/>
+          <a:bodyPr rtlCol="0" anchor="ctr" lIns="137160" tIns="137160"/>
           <a:lstStyle/>
           <a:p>
             <a:pPr algn="ctr">
-              <a:defRPr sz="1300" b="1">
-                <a:solidFill>
-                  <a:srgbClr val="66625C"/>
-                </a:solidFill>
-                <a:latin typeface="Helvetica"/>
-              </a:defRPr>
-            </a:pPr>
-            <a:r>
-              <a:t>Layer 4: Institutional SPV Backstop   |   Cost: STIBOR + 350 bps</a:t>
-            </a:r>
-            <a:br/>
-          </a:p>
-          <a:p>
-            <a:pPr>
-              <a:defRPr sz="1100">
+              <a:defRPr sz="1100" b="1">
                 <a:solidFill>
                   <a:srgbClr val="171717"/>
                 </a:solidFill>
-                <a:latin typeface="Helvetica"/>
-              </a:defRPr>
-            </a:pPr>
-            <a:r>
-              <a:t>Small high-velocity credit warehouse facility to guarantee 100% SLA uptime.  (100% SLA Guarantee)</a:t>
+              </a:defRPr>
+            </a:pPr>
+            <a:r>
+              <a:t>🚀 THE VIRAL MANDATE: Anchor CFOs actively mandate all 100–500 suppliers join Accounted to capture treasury yield across their entire vendor base.</a:t>
             </a:r>
           </a:p>
         </p:txBody>
